--- a/presentation_house_price.pptx
+++ b/presentation_house_price.pptx
@@ -22,9 +22,6 @@
     <p:sldId id="270" r:id="rId21"/>
     <p:sldId id="271" r:id="rId22"/>
     <p:sldId id="272" r:id="rId23"/>
-    <p:sldId id="273" r:id="rId24"/>
-    <p:sldId id="274" r:id="rId25"/>
-    <p:sldId id="275" r:id="rId26"/>
   </p:sldIdLst>
   <p:sldSz cx="12191695" cy="6858000" type="screen4x3"/>
   <p:notesSz cx="6858000" cy="9144000"/>
@@ -3236,7 +3233,7 @@
               </a:defRPr>
             </a:pPr>
             <a:r>
-              <a:t>Previsão de Preços de Imóveis</a:t>
+              <a:t>Previsao de Precos de Imoveis</a:t>
             </a:r>
           </a:p>
         </p:txBody>
@@ -3272,7 +3269,7 @@
               </a:defRPr>
             </a:pPr>
             <a:r>
-              <a:t>Seattle, WA — Desafio de Data Science</a:t>
+              <a:t>Seattle, WA - Desafio de Data Science</a:t>
             </a:r>
           </a:p>
         </p:txBody>
@@ -3308,7 +3305,7 @@
               </a:defRPr>
             </a:pPr>
             <a:r>
-              <a:t>End-to-End: EDA  →  Feature Engineering  →  XGBoost  →  Deploy</a:t>
+              <a:t>End-to-End: EDA -&gt; Feature Engineering -&gt; XGBoost -&gt; Deploy</a:t>
             </a:r>
           </a:p>
         </p:txBody>
@@ -3344,7 +3341,7 @@
               </a:defRPr>
             </a:pPr>
             <a:r>
-              <a:t>R² = 0.91   |   MAE = $63.127   |   MAPE = 11.6%</a:t>
+              <a:t>R2 = 0.91  |  MAE = .127  |  MAPE = 11.6%</a:t>
             </a:r>
           </a:p>
         </p:txBody>
@@ -3380,7 +3377,7 @@
               </a:defRPr>
             </a:pPr>
             <a:r>
-              <a:t>21.613 imóveis  ·  70 zipcodes  ·  36 features</a:t>
+              <a:t>21.613 imoveis  70 zipcodes  36 features</a:t>
             </a:r>
           </a:p>
         </p:txBody>
@@ -3399,7 +3396,7 @@
     <p:bg>
       <p:bgPr>
         <a:solidFill>
-          <a:srgbClr val="0D1B2A"/>
+          <a:srgbClr val="F4F8FB"/>
         </a:solidFill>
         <a:effectLst/>
       </p:bgPr>
@@ -3420,7 +3417,7 @@
         <p:spPr>
           <a:xfrm>
             <a:off x="0" y="0"/>
-            <a:ext cx="12191695" cy="6858000"/>
+            <a:ext cx="12191695" cy="960120"/>
           </a:xfrm>
           <a:prstGeom prst="rect">
             <a:avLst/>
@@ -3458,20 +3455,56 @@
       </p:sp>
       <p:sp>
         <p:nvSpPr>
-          <p:cNvPr id="3" name="Rectangle 2"/>
+          <p:cNvPr id="3" name="TextBox 2"/>
+          <p:cNvSpPr txBox="1"/>
+          <p:nvPr/>
+        </p:nvSpPr>
+        <p:spPr>
+          <a:xfrm>
+            <a:off x="457200" y="109728"/>
+            <a:ext cx="10972800" cy="685800"/>
+          </a:xfrm>
+          <a:prstGeom prst="rect">
+            <a:avLst/>
+          </a:prstGeom>
+          <a:noFill/>
+        </p:spPr>
+        <p:txBody>
+          <a:bodyPr wrap="square">
+            <a:spAutoFit/>
+          </a:bodyPr>
+          <a:lstStyle/>
+          <a:p>
+            <a:pPr algn="l">
+              <a:defRPr sz="2600" b="1">
+                <a:solidFill>
+                  <a:srgbClr val="FFFFFF"/>
+                </a:solidFill>
+                <a:latin typeface="Arial"/>
+              </a:defRPr>
+            </a:pPr>
+            <a:r>
+              <a:t>10  XGBoost - Por que este modelo?</a:t>
+            </a:r>
+          </a:p>
+        </p:txBody>
+      </p:sp>
+      <p:sp>
+        <p:nvSpPr>
+          <p:cNvPr id="4" name="Rectangle 3"/>
           <p:cNvSpPr/>
           <p:nvPr/>
         </p:nvSpPr>
         <p:spPr>
           <a:xfrm>
-            <a:off x="0" y="3063240"/>
-            <a:ext cx="12191695" cy="54864"/>
+            <a:off x="365760" y="1051560"/>
+            <a:ext cx="3657600" cy="5212080"/>
           </a:xfrm>
           <a:prstGeom prst="rect">
             <a:avLst/>
           </a:prstGeom>
           <a:solidFill>
-            <a:srgbClr val="1C7293"/>
+            <a:srgbClr val="E8F4F8"/>
           </a:solidFill>
           <a:ln>
             <a:solidFill>
@@ -3503,14 +3536,104 @@
       </p:sp>
       <p:sp>
         <p:nvSpPr>
-          <p:cNvPr id="4" name="TextBox 3"/>
+          <p:cNvPr id="5" name="Rectangle 4"/>
+          <p:cNvSpPr/>
+          <p:nvPr/>
+        </p:nvSpPr>
+        <p:spPr>
+          <a:xfrm>
+            <a:off x="4297680" y="1051560"/>
+            <a:ext cx="3657600" cy="5212080"/>
+          </a:xfrm>
+          <a:prstGeom prst="rect">
+            <a:avLst/>
+          </a:prstGeom>
+          <a:solidFill>
+            <a:srgbClr val="E8F4F8"/>
+          </a:solidFill>
+          <a:ln>
+            <a:solidFill>
+              <a:srgbClr val="1C7293"/>
+            </a:solidFill>
+          </a:ln>
+        </p:spPr>
+        <p:style>
+          <a:lnRef idx="1">
+            <a:schemeClr val="accent1"/>
+          </a:lnRef>
+          <a:fillRef idx="3">
+            <a:schemeClr val="accent1"/>
+          </a:fillRef>
+          <a:effectRef idx="2">
+            <a:schemeClr val="accent1"/>
+          </a:effectRef>
+          <a:fontRef idx="minor">
+            <a:schemeClr val="lt1"/>
+          </a:fontRef>
+        </p:style>
+        <p:txBody>
+          <a:bodyPr rtlCol="0" anchor="ctr"/>
+          <a:lstStyle/>
+          <a:p>
+            <a:pPr algn="ctr"/>
+          </a:p>
+        </p:txBody>
+      </p:sp>
+      <p:sp>
+        <p:nvSpPr>
+          <p:cNvPr id="6" name="Rectangle 5"/>
+          <p:cNvSpPr/>
+          <p:nvPr/>
+        </p:nvSpPr>
+        <p:spPr>
+          <a:xfrm>
+            <a:off x="8229600" y="1051560"/>
+            <a:ext cx="3657600" cy="5212080"/>
+          </a:xfrm>
+          <a:prstGeom prst="rect">
+            <a:avLst/>
+          </a:prstGeom>
+          <a:solidFill>
+            <a:srgbClr val="FFF8E1"/>
+          </a:solidFill>
+          <a:ln>
+            <a:solidFill>
+              <a:srgbClr val="F9A825"/>
+            </a:solidFill>
+          </a:ln>
+        </p:spPr>
+        <p:style>
+          <a:lnRef idx="1">
+            <a:schemeClr val="accent1"/>
+          </a:lnRef>
+          <a:fillRef idx="3">
+            <a:schemeClr val="accent1"/>
+          </a:fillRef>
+          <a:effectRef idx="2">
+            <a:schemeClr val="accent1"/>
+          </a:effectRef>
+          <a:fontRef idx="minor">
+            <a:schemeClr val="lt1"/>
+          </a:fontRef>
+        </p:style>
+        <p:txBody>
+          <a:bodyPr rtlCol="0" anchor="ctr"/>
+          <a:lstStyle/>
+          <a:p>
+            <a:pPr algn="ctr"/>
+          </a:p>
+        </p:txBody>
+      </p:sp>
+      <p:sp>
+        <p:nvSpPr>
+          <p:cNvPr id="7" name="TextBox 6"/>
           <p:cNvSpPr txBox="1"/>
           <p:nvPr/>
         </p:nvSpPr>
         <p:spPr>
           <a:xfrm>
-            <a:off x="457200" y="1371600"/>
-            <a:ext cx="10972800" cy="640080"/>
+            <a:off x="548640" y="1188720"/>
+            <a:ext cx="3291840" cy="411480"/>
           </a:xfrm>
           <a:prstGeom prst="rect">
             <a:avLst/>
@@ -3523,30 +3646,30 @@
           </a:bodyPr>
           <a:lstStyle/>
           <a:p>
-            <a:pPr algn="ctr">
-              <a:defRPr sz="1800" b="0">
+            <a:pPr algn="l">
+              <a:defRPr sz="1200" b="1">
                 <a:solidFill>
-                  <a:srgbClr val="90E0EF"/>
+                  <a:srgbClr val="1C7293"/>
                 </a:solidFill>
                 <a:latin typeface="Arial"/>
               </a:defRPr>
             </a:pPr>
             <a:r>
-              <a:t>PARTE 2</a:t>
-            </a:r>
-          </a:p>
-        </p:txBody>
-      </p:sp>
-      <p:sp>
-        <p:nvSpPr>
-          <p:cNvPr id="5" name="TextBox 4"/>
+              <a:t>Vantagens</a:t>
+            </a:r>
+          </a:p>
+        </p:txBody>
+      </p:sp>
+      <p:sp>
+        <p:nvSpPr>
+          <p:cNvPr id="8" name="TextBox 7"/>
           <p:cNvSpPr txBox="1"/>
           <p:nvPr/>
         </p:nvSpPr>
         <p:spPr>
           <a:xfrm>
-            <a:off x="457200" y="2103120"/>
-            <a:ext cx="10972800" cy="1005840"/>
+            <a:off x="548640" y="1737360"/>
+            <a:ext cx="3291840" cy="4297680"/>
           </a:xfrm>
           <a:prstGeom prst="rect">
             <a:avLst/>
@@ -3559,30 +3682,50 @@
           </a:bodyPr>
           <a:lstStyle/>
           <a:p>
-            <a:pPr algn="ctr">
-              <a:defRPr sz="4200" b="1">
+            <a:pPr algn="l">
+              <a:defRPr sz="1200" b="0">
                 <a:solidFill>
-                  <a:srgbClr val="FFFFFF"/>
+                  <a:srgbClr val="0D1B2A"/>
                 </a:solidFill>
                 <a:latin typeface="Arial"/>
               </a:defRPr>
             </a:pPr>
             <a:r>
-              <a:t>Modelagem &amp; Deploy</a:t>
-            </a:r>
-          </a:p>
-        </p:txBody>
-      </p:sp>
-      <p:sp>
-        <p:nvSpPr>
-          <p:cNvPr id="6" name="TextBox 5"/>
+              <a:t>Relacoes nao-lineares</a:t>
+            </a:r>
+            <a:br/>
+            <a:br/>
+            <a:r>
+              <a:t>Regularizacao L1+L2</a:t>
+            </a:r>
+            <a:br/>
+            <a:br/>
+            <a:r>
+              <a:t>Robusto a outliers</a:t>
+            </a:r>
+            <a:br/>
+            <a:br/>
+            <a:r>
+              <a:t>Inferencia rapida</a:t>
+            </a:r>
+            <a:br/>
+            <a:br/>
+            <a:r>
+              <a:t>Nativo para tabulares</a:t>
+            </a:r>
+          </a:p>
+        </p:txBody>
+      </p:sp>
+      <p:sp>
+        <p:nvSpPr>
+          <p:cNvPr id="9" name="TextBox 8"/>
           <p:cNvSpPr txBox="1"/>
           <p:nvPr/>
         </p:nvSpPr>
         <p:spPr>
           <a:xfrm>
-            <a:off x="457200" y="3291840"/>
-            <a:ext cx="10972800" cy="640080"/>
+            <a:off x="4480560" y="1188720"/>
+            <a:ext cx="3291840" cy="411480"/>
           </a:xfrm>
           <a:prstGeom prst="rect">
             <a:avLst/>
@@ -3595,16 +3738,172 @@
           </a:bodyPr>
           <a:lstStyle/>
           <a:p>
-            <a:pPr algn="ctr">
-              <a:defRPr sz="1600" b="0">
+            <a:pPr algn="l">
+              <a:defRPr sz="1200" b="1">
                 <a:solidFill>
-                  <a:srgbClr val="ADE8F4"/>
+                  <a:srgbClr val="1C7293"/>
                 </a:solidFill>
                 <a:latin typeface="Arial"/>
               </a:defRPr>
             </a:pPr>
             <a:r>
-              <a:t>Feature Engineering  ·  XGBoost  ·  Avaliação  ·  Previsões  ·  Estratégia de Produção</a:t>
+              <a:t>Hiperparametros</a:t>
+            </a:r>
+          </a:p>
+        </p:txBody>
+      </p:sp>
+      <p:sp>
+        <p:nvSpPr>
+          <p:cNvPr id="10" name="TextBox 9"/>
+          <p:cNvSpPr txBox="1"/>
+          <p:nvPr/>
+        </p:nvSpPr>
+        <p:spPr>
+          <a:xfrm>
+            <a:off x="4480560" y="1737360"/>
+            <a:ext cx="3291840" cy="4297680"/>
+          </a:xfrm>
+          <a:prstGeom prst="rect">
+            <a:avLst/>
+          </a:prstGeom>
+          <a:noFill/>
+        </p:spPr>
+        <p:txBody>
+          <a:bodyPr wrap="square">
+            <a:spAutoFit/>
+          </a:bodyPr>
+          <a:lstStyle/>
+          <a:p>
+            <a:pPr algn="l">
+              <a:defRPr sz="1200" b="0">
+                <a:solidFill>
+                  <a:srgbClr val="0D1B2A"/>
+                </a:solidFill>
+                <a:latin typeface="Arial"/>
+              </a:defRPr>
+            </a:pPr>
+            <a:r>
+              <a:t>n_estimators: 500</a:t>
+            </a:r>
+            <a:br/>
+            <a:r>
+              <a:t>learning_rate: 0.05</a:t>
+            </a:r>
+            <a:br/>
+            <a:r>
+              <a:t>max_depth: 6</a:t>
+            </a:r>
+            <a:br/>
+            <a:r>
+              <a:t>subsample: 0.8</a:t>
+            </a:r>
+            <a:br/>
+            <a:r>
+              <a:t>colsample_bytree: 0.8</a:t>
+            </a:r>
+            <a:br/>
+            <a:r>
+              <a:t>reg_alpha: 0.1</a:t>
+            </a:r>
+            <a:br/>
+            <a:r>
+              <a:t>reg_lambda: 1.0</a:t>
+            </a:r>
+            <a:br/>
+            <a:r>
+              <a:t>Target: log1p(price)</a:t>
+            </a:r>
+          </a:p>
+        </p:txBody>
+      </p:sp>
+      <p:sp>
+        <p:nvSpPr>
+          <p:cNvPr id="11" name="TextBox 10"/>
+          <p:cNvSpPr txBox="1"/>
+          <p:nvPr/>
+        </p:nvSpPr>
+        <p:spPr>
+          <a:xfrm>
+            <a:off x="8412480" y="1188720"/>
+            <a:ext cx="3291840" cy="411480"/>
+          </a:xfrm>
+          <a:prstGeom prst="rect">
+            <a:avLst/>
+          </a:prstGeom>
+          <a:noFill/>
+        </p:spPr>
+        <p:txBody>
+          <a:bodyPr wrap="square">
+            <a:spAutoFit/>
+          </a:bodyPr>
+          <a:lstStyle/>
+          <a:p>
+            <a:pPr algn="l">
+              <a:defRPr sz="1200" b="1">
+                <a:solidFill>
+                  <a:srgbClr val="E65100"/>
+                </a:solidFill>
+                <a:latin typeface="Arial"/>
+              </a:defRPr>
+            </a:pPr>
+            <a:r>
+              <a:t>Generalizacao</a:t>
+            </a:r>
+          </a:p>
+        </p:txBody>
+      </p:sp>
+      <p:sp>
+        <p:nvSpPr>
+          <p:cNvPr id="12" name="TextBox 11"/>
+          <p:cNvSpPr txBox="1"/>
+          <p:nvPr/>
+        </p:nvSpPr>
+        <p:spPr>
+          <a:xfrm>
+            <a:off x="8412480" y="1737360"/>
+            <a:ext cx="3291840" cy="4297680"/>
+          </a:xfrm>
+          <a:prstGeom prst="rect">
+            <a:avLst/>
+          </a:prstGeom>
+          <a:noFill/>
+        </p:spPr>
+        <p:txBody>
+          <a:bodyPr wrap="square">
+            <a:spAutoFit/>
+          </a:bodyPr>
+          <a:lstStyle/>
+          <a:p>
+            <a:pPr algn="l">
+              <a:defRPr sz="1200" b="0">
+                <a:solidFill>
+                  <a:srgbClr val="0D1B2A"/>
+                </a:solidFill>
+                <a:latin typeface="Arial"/>
+              </a:defRPr>
+            </a:pPr>
+            <a:r>
+              <a:t>1. Train/Test split 80/20</a:t>
+            </a:r>
+            <a:br/>
+            <a:br/>
+            <a:r>
+              <a:t>2. 5-Fold CV</a:t>
+            </a:r>
+            <a:br/>
+            <a:br/>
+            <a:r>
+              <a:t>3. Subsampling evita memorizacao</a:t>
+            </a:r>
+            <a:br/>
+            <a:br/>
+            <a:r>
+              <a:t>4. Regularizacao L1+L2</a:t>
+            </a:r>
+            <a:br/>
+            <a:br/>
+            <a:r>
+              <a:t>5. Log-transform normaliza</a:t>
             </a:r>
           </a:p>
         </p:txBody>
@@ -3711,21 +4010,45 @@
               </a:defRPr>
             </a:pPr>
             <a:r>
-              <a:t>08  Feature Engineering</a:t>
-            </a:r>
-          </a:p>
-        </p:txBody>
-      </p:sp>
-      <p:sp>
-        <p:nvSpPr>
-          <p:cNvPr id="4" name="Rectangle 3"/>
+              <a:t>11  Importancia das Features</a:t>
+            </a:r>
+          </a:p>
+        </p:txBody>
+      </p:sp>
+      <p:pic>
+        <p:nvPicPr>
+          <p:cNvPr id="4" name="Picture 3" descr="12_feature_importance.png"/>
+          <p:cNvPicPr>
+            <a:picLocks noChangeAspect="1"/>
+          </p:cNvPicPr>
+          <p:nvPr/>
+        </p:nvPicPr>
+        <p:blipFill>
+          <a:blip r:embed="rId2"/>
+          <a:stretch>
+            <a:fillRect/>
+          </a:stretch>
+        </p:blipFill>
+        <p:spPr>
+          <a:xfrm>
+            <a:off x="274320" y="1005840"/>
+            <a:ext cx="6858000" cy="5577840"/>
+          </a:xfrm>
+          <a:prstGeom prst="rect">
+            <a:avLst/>
+          </a:prstGeom>
+        </p:spPr>
+      </p:pic>
+      <p:sp>
+        <p:nvSpPr>
+          <p:cNvPr id="5" name="Rectangle 4"/>
           <p:cNvSpPr/>
           <p:nvPr/>
         </p:nvSpPr>
         <p:spPr>
           <a:xfrm>
-            <a:off x="365760" y="1051560"/>
-            <a:ext cx="5394960" cy="5212080"/>
+            <a:off x="7406640" y="1005840"/>
+            <a:ext cx="4480560" cy="5577840"/>
           </a:xfrm>
           <a:prstGeom prst="rect">
             <a:avLst/>
@@ -3763,59 +4086,14 @@
       </p:sp>
       <p:sp>
         <p:nvSpPr>
-          <p:cNvPr id="5" name="Rectangle 4"/>
-          <p:cNvSpPr/>
-          <p:nvPr/>
-        </p:nvSpPr>
-        <p:spPr>
-          <a:xfrm>
-            <a:off x="6035040" y="1051560"/>
-            <a:ext cx="5760720" cy="5212080"/>
-          </a:xfrm>
-          <a:prstGeom prst="rect">
-            <a:avLst/>
-          </a:prstGeom>
-          <a:solidFill>
-            <a:srgbClr val="FFF8E1"/>
-          </a:solidFill>
-          <a:ln>
-            <a:solidFill>
-              <a:srgbClr val="F9A825"/>
-            </a:solidFill>
-          </a:ln>
-        </p:spPr>
-        <p:style>
-          <a:lnRef idx="1">
-            <a:schemeClr val="accent1"/>
-          </a:lnRef>
-          <a:fillRef idx="3">
-            <a:schemeClr val="accent1"/>
-          </a:fillRef>
-          <a:effectRef idx="2">
-            <a:schemeClr val="accent1"/>
-          </a:effectRef>
-          <a:fontRef idx="minor">
-            <a:schemeClr val="lt1"/>
-          </a:fontRef>
-        </p:style>
-        <p:txBody>
-          <a:bodyPr rtlCol="0" anchor="ctr"/>
-          <a:lstStyle/>
-          <a:p>
-            <a:pPr algn="ctr"/>
-          </a:p>
-        </p:txBody>
-      </p:sp>
-      <p:sp>
-        <p:nvSpPr>
           <p:cNvPr id="6" name="TextBox 5"/>
           <p:cNvSpPr txBox="1"/>
           <p:nvPr/>
         </p:nvSpPr>
         <p:spPr>
           <a:xfrm>
-            <a:off x="548640" y="1188720"/>
-            <a:ext cx="5029200" cy="457200"/>
+            <a:off x="7589520" y="1143000"/>
+            <a:ext cx="4114800" cy="411480"/>
           </a:xfrm>
           <a:prstGeom prst="rect">
             <a:avLst/>
@@ -3837,7 +4115,7 @@
               </a:defRPr>
             </a:pPr>
             <a:r>
-              <a:t>Features Criadas (10 novas)</a:t>
+              <a:t>Interpretacao:</a:t>
             </a:r>
           </a:p>
         </p:txBody>
@@ -3850,8 +4128,8 @@
         </p:nvSpPr>
         <p:spPr>
           <a:xfrm>
-            <a:off x="548640" y="1783080"/>
-            <a:ext cx="5029200" cy="4206240"/>
+            <a:off x="7589520" y="1645920"/>
+            <a:ext cx="4114800" cy="4754880"/>
           </a:xfrm>
           <a:prstGeom prst="rect">
             <a:avLst/>
@@ -3865,7 +4143,7 @@
           <a:lstStyle/>
           <a:p>
             <a:pPr algn="l">
-              <a:defRPr sz="1300" b="0">
+              <a:defRPr sz="1150" b="0">
                 <a:solidFill>
                   <a:srgbClr val="0D1B2A"/>
                 </a:solidFill>
@@ -3873,160 +4151,38 @@
               </a:defRPr>
             </a:pPr>
             <a:r>
-              <a:t>age = 2015 - yr_built</a:t>
-            </a:r>
-            <a:br/>
-            <a:r>
-              <a:t>was_renovated  (flag binária)</a:t>
-            </a:r>
-            <a:br/>
-            <a:r>
-              <a:t>years_since_reno</a:t>
-            </a:r>
-            <a:br/>
-            <a:r>
-              <a:t>sqft_ratio = área / lote</a:t>
-            </a:r>
-            <a:br/>
-            <a:r>
-              <a:t>basement_ratio</a:t>
-            </a:r>
-            <a:br/>
-            <a:r>
-              <a:t>grade_sqft = grade × área</a:t>
-            </a:r>
-            <a:br/>
-            <a:r>
-              <a:t>grade_age = grade × idade</a:t>
-            </a:r>
-            <a:br/>
-            <a:r>
-              <a:t>bath_bed_ratio</a:t>
-            </a:r>
-            <a:br/>
-            <a:r>
-              <a:t>high_season  (mar–jul)</a:t>
-            </a:r>
-            <a:br/>
-            <a:r>
-              <a:t>income_grade = renda × grade</a:t>
-            </a:r>
-          </a:p>
-        </p:txBody>
-      </p:sp>
-      <p:sp>
-        <p:nvSpPr>
-          <p:cNvPr id="8" name="TextBox 7"/>
-          <p:cNvSpPr txBox="1"/>
-          <p:nvPr/>
-        </p:nvSpPr>
-        <p:spPr>
-          <a:xfrm>
-            <a:off x="6217920" y="1188720"/>
-            <a:ext cx="5394960" cy="457200"/>
-          </a:xfrm>
-          <a:prstGeom prst="rect">
-            <a:avLst/>
-          </a:prstGeom>
-          <a:noFill/>
-        </p:spPr>
-        <p:txBody>
-          <a:bodyPr wrap="square">
-            <a:spAutoFit/>
-          </a:bodyPr>
-          <a:lstStyle/>
-          <a:p>
-            <a:pPr algn="l">
-              <a:defRPr sz="1300" b="1">
-                <a:solidFill>
-                  <a:srgbClr val="E65100"/>
-                </a:solidFill>
-                <a:latin typeface="Arial"/>
-              </a:defRPr>
-            </a:pPr>
-            <a:r>
-              <a:t>Por que feature engineering?</a:t>
-            </a:r>
-          </a:p>
-        </p:txBody>
-      </p:sp>
-      <p:sp>
-        <p:nvSpPr>
-          <p:cNvPr id="9" name="TextBox 8"/>
-          <p:cNvSpPr txBox="1"/>
-          <p:nvPr/>
-        </p:nvSpPr>
-        <p:spPr>
-          <a:xfrm>
-            <a:off x="6217920" y="1783080"/>
-            <a:ext cx="5394960" cy="4206240"/>
-          </a:xfrm>
-          <a:prstGeom prst="rect">
-            <a:avLst/>
-          </a:prstGeom>
-          <a:noFill/>
-        </p:spPr>
-        <p:txBody>
-          <a:bodyPr wrap="square">
-            <a:spAutoFit/>
-          </a:bodyPr>
-          <a:lstStyle/>
-          <a:p>
-            <a:pPr algn="l">
-              <a:defRPr sz="1300" b="0">
-                <a:solidFill>
-                  <a:srgbClr val="0D1B2A"/>
-                </a:solidFill>
-                <a:latin typeface="Arial"/>
-              </a:defRPr>
-            </a:pPr>
-            <a:r>
-              <a:t>Modelos capturam padrões</a:t>
-            </a:r>
-            <a:br/>
-            <a:r>
-              <a:t>lineares com facilidade.</a:t>
-            </a:r>
-            <a:br/>
-            <a:r>
-              <a:t>Interações e ratios permitem</a:t>
-            </a:r>
-            <a:br/>
-            <a:r>
-              <a:t>capturar relações não-lineares</a:t>
-            </a:r>
-            <a:br/>
-            <a:r>
-              <a:t>que o modelo sozinho teria</a:t>
-            </a:r>
-            <a:br/>
-            <a:r>
-              <a:t>dificuldade de aprender.</a:t>
-            </a:r>
-            <a:br/>
-            <a:br/>
-            <a:r>
-              <a:t>Exemplo: grade_sqft une</a:t>
-            </a:r>
-            <a:br/>
-            <a:r>
-              <a:t>qualidade e tamanho —</a:t>
-            </a:r>
-            <a:br/>
-            <a:r>
-              <a:t>duas casas com mesmo</a:t>
-            </a:r>
-            <a:br/>
-            <a:r>
-              <a:t>grade podem ter preços</a:t>
-            </a:r>
-            <a:br/>
-            <a:r>
-              <a:t>muito diferentes se a área</a:t>
-            </a:r>
-            <a:br/>
-            <a:r>
-              <a:t>for diferente.</a:t>
+              <a:t>lat / long</a:t>
+            </a:r>
+            <a:br/>
+            <a:r>
+              <a:t>Localizacao e o preditor mais poderoso.</a:t>
+            </a:r>
+            <a:br/>
+            <a:br/>
+            <a:r>
+              <a:t>grade_sqft</a:t>
+            </a:r>
+            <a:br/>
+            <a:r>
+              <a:t>Interacao criada - qualidade x area explica preco premium.</a:t>
+            </a:r>
+            <a:br/>
+            <a:br/>
+            <a:r>
+              <a:t>hous_val_amt</a:t>
+            </a:r>
+            <a:br/>
+            <a:r>
+              <a:t>Valor medio do bairro = contexto mercadologico.</a:t>
+            </a:r>
+            <a:br/>
+            <a:br/>
+            <a:r>
+              <a:t>age / yr_built</a:t>
+            </a:r>
+            <a:br/>
+            <a:r>
+              <a:t>Imoveis mais novos valem mais.</a:t>
             </a:r>
           </a:p>
         </p:txBody>
@@ -4133,14 +4289,354 @@
               </a:defRPr>
             </a:pPr>
             <a:r>
-              <a:t>09  Comparação de Modelos</a:t>
+              <a:t>12  Avaliacao do Modelo</a:t>
+            </a:r>
+          </a:p>
+        </p:txBody>
+      </p:sp>
+      <p:sp>
+        <p:nvSpPr>
+          <p:cNvPr id="4" name="Rectangle 3"/>
+          <p:cNvSpPr/>
+          <p:nvPr/>
+        </p:nvSpPr>
+        <p:spPr>
+          <a:xfrm>
+            <a:off x="365760" y="1051560"/>
+            <a:ext cx="2560320" cy="1417320"/>
+          </a:xfrm>
+          <a:prstGeom prst="rect">
+            <a:avLst/>
+          </a:prstGeom>
+          <a:solidFill>
+            <a:srgbClr val="0D1B2A"/>
+          </a:solidFill>
+          <a:ln>
+            <a:solidFill>
+              <a:srgbClr val="0D1B2A"/>
+            </a:solidFill>
+          </a:ln>
+        </p:spPr>
+        <p:style>
+          <a:lnRef idx="1">
+            <a:schemeClr val="accent1"/>
+          </a:lnRef>
+          <a:fillRef idx="3">
+            <a:schemeClr val="accent1"/>
+          </a:fillRef>
+          <a:effectRef idx="2">
+            <a:schemeClr val="accent1"/>
+          </a:effectRef>
+          <a:fontRef idx="minor">
+            <a:schemeClr val="lt1"/>
+          </a:fontRef>
+        </p:style>
+        <p:txBody>
+          <a:bodyPr rtlCol="0" anchor="ctr"/>
+          <a:lstStyle/>
+          <a:p>
+            <a:pPr algn="ctr"/>
+          </a:p>
+        </p:txBody>
+      </p:sp>
+      <p:sp>
+        <p:nvSpPr>
+          <p:cNvPr id="5" name="Rectangle 4"/>
+          <p:cNvSpPr/>
+          <p:nvPr/>
+        </p:nvSpPr>
+        <p:spPr>
+          <a:xfrm>
+            <a:off x="3200400" y="1051560"/>
+            <a:ext cx="2560320" cy="1417320"/>
+          </a:xfrm>
+          <a:prstGeom prst="rect">
+            <a:avLst/>
+          </a:prstGeom>
+          <a:solidFill>
+            <a:srgbClr val="1C7293"/>
+          </a:solidFill>
+          <a:ln>
+            <a:solidFill>
+              <a:srgbClr val="1C7293"/>
+            </a:solidFill>
+          </a:ln>
+        </p:spPr>
+        <p:style>
+          <a:lnRef idx="1">
+            <a:schemeClr val="accent1"/>
+          </a:lnRef>
+          <a:fillRef idx="3">
+            <a:schemeClr val="accent1"/>
+          </a:fillRef>
+          <a:effectRef idx="2">
+            <a:schemeClr val="accent1"/>
+          </a:effectRef>
+          <a:fontRef idx="minor">
+            <a:schemeClr val="lt1"/>
+          </a:fontRef>
+        </p:style>
+        <p:txBody>
+          <a:bodyPr rtlCol="0" anchor="ctr"/>
+          <a:lstStyle/>
+          <a:p>
+            <a:pPr algn="ctr"/>
+          </a:p>
+        </p:txBody>
+      </p:sp>
+      <p:sp>
+        <p:nvSpPr>
+          <p:cNvPr id="6" name="Rectangle 5"/>
+          <p:cNvSpPr/>
+          <p:nvPr/>
+        </p:nvSpPr>
+        <p:spPr>
+          <a:xfrm>
+            <a:off x="6035040" y="1051560"/>
+            <a:ext cx="2560320" cy="1417320"/>
+          </a:xfrm>
+          <a:prstGeom prst="rect">
+            <a:avLst/>
+          </a:prstGeom>
+          <a:solidFill>
+            <a:srgbClr val="27AE60"/>
+          </a:solidFill>
+          <a:ln>
+            <a:solidFill>
+              <a:srgbClr val="27AE60"/>
+            </a:solidFill>
+          </a:ln>
+        </p:spPr>
+        <p:style>
+          <a:lnRef idx="1">
+            <a:schemeClr val="accent1"/>
+          </a:lnRef>
+          <a:fillRef idx="3">
+            <a:schemeClr val="accent1"/>
+          </a:fillRef>
+          <a:effectRef idx="2">
+            <a:schemeClr val="accent1"/>
+          </a:effectRef>
+          <a:fontRef idx="minor">
+            <a:schemeClr val="lt1"/>
+          </a:fontRef>
+        </p:style>
+        <p:txBody>
+          <a:bodyPr rtlCol="0" anchor="ctr"/>
+          <a:lstStyle/>
+          <a:p>
+            <a:pPr algn="ctr"/>
+          </a:p>
+        </p:txBody>
+      </p:sp>
+      <p:sp>
+        <p:nvSpPr>
+          <p:cNvPr id="7" name="Rectangle 6"/>
+          <p:cNvSpPr/>
+          <p:nvPr/>
+        </p:nvSpPr>
+        <p:spPr>
+          <a:xfrm>
+            <a:off x="8869680" y="1051560"/>
+            <a:ext cx="3017520" cy="1417320"/>
+          </a:xfrm>
+          <a:prstGeom prst="rect">
+            <a:avLst/>
+          </a:prstGeom>
+          <a:solidFill>
+            <a:srgbClr val="E67E22"/>
+          </a:solidFill>
+          <a:ln>
+            <a:solidFill>
+              <a:srgbClr val="E67E22"/>
+            </a:solidFill>
+          </a:ln>
+        </p:spPr>
+        <p:style>
+          <a:lnRef idx="1">
+            <a:schemeClr val="accent1"/>
+          </a:lnRef>
+          <a:fillRef idx="3">
+            <a:schemeClr val="accent1"/>
+          </a:fillRef>
+          <a:effectRef idx="2">
+            <a:schemeClr val="accent1"/>
+          </a:effectRef>
+          <a:fontRef idx="minor">
+            <a:schemeClr val="lt1"/>
+          </a:fontRef>
+        </p:style>
+        <p:txBody>
+          <a:bodyPr rtlCol="0" anchor="ctr"/>
+          <a:lstStyle/>
+          <a:p>
+            <a:pPr algn="ctr"/>
+          </a:p>
+        </p:txBody>
+      </p:sp>
+      <p:sp>
+        <p:nvSpPr>
+          <p:cNvPr id="8" name="TextBox 7"/>
+          <p:cNvSpPr txBox="1"/>
+          <p:nvPr/>
+        </p:nvSpPr>
+        <p:spPr>
+          <a:xfrm>
+            <a:off x="365760" y="1051560"/>
+            <a:ext cx="2560320" cy="1417320"/>
+          </a:xfrm>
+          <a:prstGeom prst="rect">
+            <a:avLst/>
+          </a:prstGeom>
+          <a:noFill/>
+        </p:spPr>
+        <p:txBody>
+          <a:bodyPr wrap="square">
+            <a:spAutoFit/>
+          </a:bodyPr>
+          <a:lstStyle/>
+          <a:p>
+            <a:pPr algn="ctr">
+              <a:defRPr sz="2400" b="1">
+                <a:solidFill>
+                  <a:srgbClr val="FFFFFF"/>
+                </a:solidFill>
+                <a:latin typeface="Arial"/>
+              </a:defRPr>
+            </a:pPr>
+            <a:r>
+              <a:t>R2</a:t>
+            </a:r>
+            <a:br/>
+            <a:r>
+              <a:t>0.9138</a:t>
+            </a:r>
+          </a:p>
+        </p:txBody>
+      </p:sp>
+      <p:sp>
+        <p:nvSpPr>
+          <p:cNvPr id="9" name="TextBox 8"/>
+          <p:cNvSpPr txBox="1"/>
+          <p:nvPr/>
+        </p:nvSpPr>
+        <p:spPr>
+          <a:xfrm>
+            <a:off x="3200400" y="1051560"/>
+            <a:ext cx="2560320" cy="1417320"/>
+          </a:xfrm>
+          <a:prstGeom prst="rect">
+            <a:avLst/>
+          </a:prstGeom>
+          <a:noFill/>
+        </p:spPr>
+        <p:txBody>
+          <a:bodyPr wrap="square">
+            <a:spAutoFit/>
+          </a:bodyPr>
+          <a:lstStyle/>
+          <a:p>
+            <a:pPr algn="ctr">
+              <a:defRPr sz="2400" b="1">
+                <a:solidFill>
+                  <a:srgbClr val="FFFFFF"/>
+                </a:solidFill>
+                <a:latin typeface="Arial"/>
+              </a:defRPr>
+            </a:pPr>
+            <a:r>
+              <a:t>MAE</a:t>
+            </a:r>
+            <a:br/>
+            <a:r>
+              <a:t>63.127</a:t>
+            </a:r>
+          </a:p>
+        </p:txBody>
+      </p:sp>
+      <p:sp>
+        <p:nvSpPr>
+          <p:cNvPr id="10" name="TextBox 9"/>
+          <p:cNvSpPr txBox="1"/>
+          <p:nvPr/>
+        </p:nvSpPr>
+        <p:spPr>
+          <a:xfrm>
+            <a:off x="6035040" y="1051560"/>
+            <a:ext cx="2560320" cy="1417320"/>
+          </a:xfrm>
+          <a:prstGeom prst="rect">
+            <a:avLst/>
+          </a:prstGeom>
+          <a:noFill/>
+        </p:spPr>
+        <p:txBody>
+          <a:bodyPr wrap="square">
+            <a:spAutoFit/>
+          </a:bodyPr>
+          <a:lstStyle/>
+          <a:p>
+            <a:pPr algn="ctr">
+              <a:defRPr sz="2200" b="1">
+                <a:solidFill>
+                  <a:srgbClr val="FFFFFF"/>
+                </a:solidFill>
+                <a:latin typeface="Arial"/>
+              </a:defRPr>
+            </a:pPr>
+            <a:r>
+              <a:t>RMSE</a:t>
+            </a:r>
+            <a:br/>
+            <a:r>
+              <a:t>114.173</a:t>
+            </a:r>
+          </a:p>
+        </p:txBody>
+      </p:sp>
+      <p:sp>
+        <p:nvSpPr>
+          <p:cNvPr id="11" name="TextBox 10"/>
+          <p:cNvSpPr txBox="1"/>
+          <p:nvPr/>
+        </p:nvSpPr>
+        <p:spPr>
+          <a:xfrm>
+            <a:off x="8869680" y="1051560"/>
+            <a:ext cx="3017520" cy="1417320"/>
+          </a:xfrm>
+          <a:prstGeom prst="rect">
+            <a:avLst/>
+          </a:prstGeom>
+          <a:noFill/>
+        </p:spPr>
+        <p:txBody>
+          <a:bodyPr wrap="square">
+            <a:spAutoFit/>
+          </a:bodyPr>
+          <a:lstStyle/>
+          <a:p>
+            <a:pPr algn="ctr">
+              <a:defRPr sz="2400" b="1">
+                <a:solidFill>
+                  <a:srgbClr val="FFFFFF"/>
+                </a:solidFill>
+                <a:latin typeface="Arial"/>
+              </a:defRPr>
+            </a:pPr>
+            <a:r>
+              <a:t>MAPE</a:t>
+            </a:r>
+            <a:br/>
+            <a:r>
+              <a:t>11.56%</a:t>
             </a:r>
           </a:p>
         </p:txBody>
       </p:sp>
       <p:pic>
         <p:nvPicPr>
-          <p:cNvPr id="4" name="Picture 3" descr="11_model_comparison.png"/>
+          <p:cNvPr id="12" name="Picture 11" descr="13_actual_vs_predicted.png"/>
           <p:cNvPicPr>
             <a:picLocks noChangeAspect="1"/>
           </p:cNvPicPr>
@@ -4154,191 +4650,8 @@
         </p:blipFill>
         <p:spPr>
           <a:xfrm>
-            <a:off x="274320" y="1005840"/>
-            <a:ext cx="6858000" cy="3474720"/>
-          </a:xfrm>
-          <a:prstGeom prst="rect">
-            <a:avLst/>
-          </a:prstGeom>
-        </p:spPr>
-      </p:pic>
-      <p:sp>
-        <p:nvSpPr>
-          <p:cNvPr id="5" name="Rectangle 4"/>
-          <p:cNvSpPr/>
-          <p:nvPr/>
-        </p:nvSpPr>
-        <p:spPr>
-          <a:xfrm>
-            <a:off x="7406640" y="1005840"/>
-            <a:ext cx="4480560" cy="3474720"/>
-          </a:xfrm>
-          <a:prstGeom prst="rect">
-            <a:avLst/>
-          </a:prstGeom>
-          <a:solidFill>
-            <a:srgbClr val="E8F4F8"/>
-          </a:solidFill>
-          <a:ln>
-            <a:solidFill>
-              <a:srgbClr val="1C7293"/>
-            </a:solidFill>
-          </a:ln>
-        </p:spPr>
-        <p:style>
-          <a:lnRef idx="1">
-            <a:schemeClr val="accent1"/>
-          </a:lnRef>
-          <a:fillRef idx="3">
-            <a:schemeClr val="accent1"/>
-          </a:fillRef>
-          <a:effectRef idx="2">
-            <a:schemeClr val="accent1"/>
-          </a:effectRef>
-          <a:fontRef idx="minor">
-            <a:schemeClr val="lt1"/>
-          </a:fontRef>
-        </p:style>
-        <p:txBody>
-          <a:bodyPr rtlCol="0" anchor="ctr"/>
-          <a:lstStyle/>
-          <a:p>
-            <a:pPr algn="ctr"/>
-          </a:p>
-        </p:txBody>
-      </p:sp>
-      <p:sp>
-        <p:nvSpPr>
-          <p:cNvPr id="6" name="TextBox 5"/>
-          <p:cNvSpPr txBox="1"/>
-          <p:nvPr/>
-        </p:nvSpPr>
-        <p:spPr>
-          <a:xfrm>
-            <a:off x="7589520" y="1143000"/>
-            <a:ext cx="4114800" cy="411480"/>
-          </a:xfrm>
-          <a:prstGeom prst="rect">
-            <a:avLst/>
-          </a:prstGeom>
-          <a:noFill/>
-        </p:spPr>
-        <p:txBody>
-          <a:bodyPr wrap="square">
-            <a:spAutoFit/>
-          </a:bodyPr>
-          <a:lstStyle/>
-          <a:p>
-            <a:pPr algn="l">
-              <a:defRPr sz="1200" b="1">
-                <a:solidFill>
-                  <a:srgbClr val="1C7293"/>
-                </a:solidFill>
-                <a:latin typeface="Arial"/>
-              </a:defRPr>
-            </a:pPr>
-            <a:r>
-              <a:t>Metodologia — 5-Fold CV</a:t>
-            </a:r>
-          </a:p>
-        </p:txBody>
-      </p:sp>
-      <p:sp>
-        <p:nvSpPr>
-          <p:cNvPr id="7" name="TextBox 6"/>
-          <p:cNvSpPr txBox="1"/>
-          <p:nvPr/>
-        </p:nvSpPr>
-        <p:spPr>
-          <a:xfrm>
-            <a:off x="7589520" y="1645920"/>
-            <a:ext cx="4114800" cy="2651760"/>
-          </a:xfrm>
-          <a:prstGeom prst="rect">
-            <a:avLst/>
-          </a:prstGeom>
-          <a:noFill/>
-        </p:spPr>
-        <p:txBody>
-          <a:bodyPr wrap="square">
-            <a:spAutoFit/>
-          </a:bodyPr>
-          <a:lstStyle/>
-          <a:p>
-            <a:pPr algn="l">
-              <a:defRPr sz="1200" b="0">
-                <a:solidFill>
-                  <a:srgbClr val="0D1B2A"/>
-                </a:solidFill>
-                <a:latin typeface="Arial"/>
-              </a:defRPr>
-            </a:pPr>
-            <a:r>
-              <a:t>Avaliamos 4 modelos com</a:t>
-            </a:r>
-            <a:br/>
-            <a:r>
-              <a:t>5-Fold Cross-Validation.</a:t>
-            </a:r>
-            <a:br/>
-            <a:r>
-              <a:t>O dataset foi dividido em</a:t>
-            </a:r>
-            <a:br/>
-            <a:r>
-              <a:t>80% treino / 20% teste.</a:t>
-            </a:r>
-            <a:br/>
-            <a:br/>
-            <a:r>
-              <a:t>Métrica: RMSE no target</a:t>
-            </a:r>
-            <a:br/>
-            <a:r>
-              <a:t>em escala log — reduz</a:t>
-            </a:r>
-            <a:br/>
-            <a:r>
-              <a:t>impacto dos outliers.</a:t>
-            </a:r>
-            <a:br/>
-            <a:br/>
-            <a:r>
-              <a:t>XGBoost venceu por:</a:t>
-            </a:r>
-            <a:br/>
-            <a:r>
-              <a:t>• Menor RMSE médio</a:t>
-            </a:r>
-            <a:br/>
-            <a:r>
-              <a:t>• Menor desvio padrão</a:t>
-            </a:r>
-            <a:br/>
-            <a:r>
-              <a:t>  entre folds (+ estável)</a:t>
-            </a:r>
-          </a:p>
-        </p:txBody>
-      </p:sp>
-      <p:pic>
-        <p:nvPicPr>
-          <p:cNvPr id="8" name="Picture 7" descr="14_cv_folds.png"/>
-          <p:cNvPicPr>
-            <a:picLocks noChangeAspect="1"/>
-          </p:cNvPicPr>
-          <p:nvPr/>
-        </p:nvPicPr>
-        <p:blipFill>
-          <a:blip r:embed="rId3"/>
-          <a:stretch>
-            <a:fillRect/>
-          </a:stretch>
-        </p:blipFill>
-        <p:spPr>
-          <a:xfrm>
-            <a:off x="274320" y="4663440"/>
-            <a:ext cx="11612880" cy="2011680"/>
+            <a:off x="274320" y="2651760"/>
+            <a:ext cx="11612880" cy="3977639"/>
           </a:xfrm>
           <a:prstGeom prst="rect">
             <a:avLst/>
@@ -4447,479 +4760,59 @@
               </a:defRPr>
             </a:pPr>
             <a:r>
-              <a:t>10  XGBoost — Por que este modelo?</a:t>
-            </a:r>
-          </a:p>
-        </p:txBody>
-      </p:sp>
-      <p:sp>
-        <p:nvSpPr>
-          <p:cNvPr id="4" name="Rectangle 3"/>
-          <p:cNvSpPr/>
-          <p:nvPr/>
-        </p:nvSpPr>
-        <p:spPr>
-          <a:xfrm>
-            <a:off x="365760" y="1051560"/>
-            <a:ext cx="3657600" cy="5212080"/>
-          </a:xfrm>
-          <a:prstGeom prst="rect">
-            <a:avLst/>
-          </a:prstGeom>
-          <a:solidFill>
-            <a:srgbClr val="E8F4F8"/>
-          </a:solidFill>
-          <a:ln>
-            <a:solidFill>
-              <a:srgbClr val="1C7293"/>
-            </a:solidFill>
-          </a:ln>
-        </p:spPr>
-        <p:style>
-          <a:lnRef idx="1">
-            <a:schemeClr val="accent1"/>
-          </a:lnRef>
-          <a:fillRef idx="3">
-            <a:schemeClr val="accent1"/>
-          </a:fillRef>
-          <a:effectRef idx="2">
-            <a:schemeClr val="accent1"/>
-          </a:effectRef>
-          <a:fontRef idx="minor">
-            <a:schemeClr val="lt1"/>
-          </a:fontRef>
-        </p:style>
-        <p:txBody>
-          <a:bodyPr rtlCol="0" anchor="ctr"/>
-          <a:lstStyle/>
-          <a:p>
-            <a:pPr algn="ctr"/>
-          </a:p>
-        </p:txBody>
-      </p:sp>
-      <p:sp>
-        <p:nvSpPr>
-          <p:cNvPr id="5" name="Rectangle 4"/>
-          <p:cNvSpPr/>
-          <p:nvPr/>
-        </p:nvSpPr>
-        <p:spPr>
-          <a:xfrm>
-            <a:off x="4297680" y="1051560"/>
-            <a:ext cx="3657600" cy="5212080"/>
-          </a:xfrm>
-          <a:prstGeom prst="rect">
-            <a:avLst/>
-          </a:prstGeom>
-          <a:solidFill>
-            <a:srgbClr val="E8F4F8"/>
-          </a:solidFill>
-          <a:ln>
-            <a:solidFill>
-              <a:srgbClr val="1C7293"/>
-            </a:solidFill>
-          </a:ln>
-        </p:spPr>
-        <p:style>
-          <a:lnRef idx="1">
-            <a:schemeClr val="accent1"/>
-          </a:lnRef>
-          <a:fillRef idx="3">
-            <a:schemeClr val="accent1"/>
-          </a:fillRef>
-          <a:effectRef idx="2">
-            <a:schemeClr val="accent1"/>
-          </a:effectRef>
-          <a:fontRef idx="minor">
-            <a:schemeClr val="lt1"/>
-          </a:fontRef>
-        </p:style>
-        <p:txBody>
-          <a:bodyPr rtlCol="0" anchor="ctr"/>
-          <a:lstStyle/>
-          <a:p>
-            <a:pPr algn="ctr"/>
-          </a:p>
-        </p:txBody>
-      </p:sp>
-      <p:sp>
-        <p:nvSpPr>
-          <p:cNvPr id="6" name="Rectangle 5"/>
-          <p:cNvSpPr/>
-          <p:nvPr/>
-        </p:nvSpPr>
-        <p:spPr>
-          <a:xfrm>
-            <a:off x="8229600" y="1051560"/>
-            <a:ext cx="3657600" cy="5212080"/>
-          </a:xfrm>
-          <a:prstGeom prst="rect">
-            <a:avLst/>
-          </a:prstGeom>
-          <a:solidFill>
-            <a:srgbClr val="FFF8E1"/>
-          </a:solidFill>
-          <a:ln>
-            <a:solidFill>
-              <a:srgbClr val="F9A825"/>
-            </a:solidFill>
-          </a:ln>
-        </p:spPr>
-        <p:style>
-          <a:lnRef idx="1">
-            <a:schemeClr val="accent1"/>
-          </a:lnRef>
-          <a:fillRef idx="3">
-            <a:schemeClr val="accent1"/>
-          </a:fillRef>
-          <a:effectRef idx="2">
-            <a:schemeClr val="accent1"/>
-          </a:effectRef>
-          <a:fontRef idx="minor">
-            <a:schemeClr val="lt1"/>
-          </a:fontRef>
-        </p:style>
-        <p:txBody>
-          <a:bodyPr rtlCol="0" anchor="ctr"/>
-          <a:lstStyle/>
-          <a:p>
-            <a:pPr algn="ctr"/>
-          </a:p>
-        </p:txBody>
-      </p:sp>
-      <p:sp>
-        <p:nvSpPr>
-          <p:cNvPr id="7" name="TextBox 6"/>
-          <p:cNvSpPr txBox="1"/>
-          <p:nvPr/>
-        </p:nvSpPr>
-        <p:spPr>
-          <a:xfrm>
-            <a:off x="548640" y="1188720"/>
-            <a:ext cx="3291840" cy="411480"/>
-          </a:xfrm>
-          <a:prstGeom prst="rect">
-            <a:avLst/>
-          </a:prstGeom>
-          <a:noFill/>
-        </p:spPr>
-        <p:txBody>
-          <a:bodyPr wrap="square">
-            <a:spAutoFit/>
-          </a:bodyPr>
-          <a:lstStyle/>
-          <a:p>
-            <a:pPr algn="l">
-              <a:defRPr sz="1200" b="1">
-                <a:solidFill>
-                  <a:srgbClr val="1C7293"/>
-                </a:solidFill>
-                <a:latin typeface="Arial"/>
-              </a:defRPr>
-            </a:pPr>
-            <a:r>
-              <a:t>Vantagens</a:t>
-            </a:r>
-          </a:p>
-        </p:txBody>
-      </p:sp>
-      <p:sp>
-        <p:nvSpPr>
-          <p:cNvPr id="8" name="TextBox 7"/>
-          <p:cNvSpPr txBox="1"/>
-          <p:nvPr/>
-        </p:nvSpPr>
-        <p:spPr>
-          <a:xfrm>
-            <a:off x="548640" y="1737360"/>
-            <a:ext cx="3291840" cy="4297680"/>
-          </a:xfrm>
-          <a:prstGeom prst="rect">
-            <a:avLst/>
-          </a:prstGeom>
-          <a:noFill/>
-        </p:spPr>
-        <p:txBody>
-          <a:bodyPr wrap="square">
-            <a:spAutoFit/>
-          </a:bodyPr>
-          <a:lstStyle/>
-          <a:p>
-            <a:pPr algn="l">
-              <a:defRPr sz="1200" b="0">
-                <a:solidFill>
-                  <a:srgbClr val="0D1B2A"/>
-                </a:solidFill>
-                <a:latin typeface="Arial"/>
-              </a:defRPr>
-            </a:pPr>
-            <a:r>
-              <a:t>Captura relações</a:t>
-            </a:r>
-            <a:br/>
-            <a:r>
-              <a:t>não-lineares</a:t>
-            </a:r>
-            <a:br/>
-            <a:br/>
-            <a:r>
-              <a:t>Regularização L1+L2</a:t>
-            </a:r>
-            <a:br/>
-            <a:r>
-              <a:t>embutida</a:t>
-            </a:r>
-            <a:br/>
-            <a:br/>
-            <a:r>
-              <a:t>Robusta a outliers</a:t>
-            </a:r>
-            <a:br/>
-            <a:br/>
-            <a:r>
-              <a:t>Rápida inferência</a:t>
-            </a:r>
-            <a:br/>
-            <a:r>
-              <a:t>(&lt; 5ms / predição)</a:t>
-            </a:r>
-            <a:br/>
-            <a:br/>
-            <a:r>
-              <a:t>Nativa para dados</a:t>
-            </a:r>
-            <a:br/>
-            <a:r>
-              <a:t>tabulares</a:t>
-            </a:r>
-          </a:p>
-        </p:txBody>
-      </p:sp>
-      <p:sp>
-        <p:nvSpPr>
-          <p:cNvPr id="9" name="TextBox 8"/>
-          <p:cNvSpPr txBox="1"/>
-          <p:nvPr/>
-        </p:nvSpPr>
-        <p:spPr>
-          <a:xfrm>
-            <a:off x="4480560" y="1188720"/>
-            <a:ext cx="3291840" cy="411480"/>
-          </a:xfrm>
-          <a:prstGeom prst="rect">
-            <a:avLst/>
-          </a:prstGeom>
-          <a:noFill/>
-        </p:spPr>
-        <p:txBody>
-          <a:bodyPr wrap="square">
-            <a:spAutoFit/>
-          </a:bodyPr>
-          <a:lstStyle/>
-          <a:p>
-            <a:pPr algn="l">
-              <a:defRPr sz="1200" b="1">
-                <a:solidFill>
-                  <a:srgbClr val="1C7293"/>
-                </a:solidFill>
-                <a:latin typeface="Arial"/>
-              </a:defRPr>
-            </a:pPr>
-            <a:r>
-              <a:t>Hiperparâmetros</a:t>
-            </a:r>
-          </a:p>
-        </p:txBody>
-      </p:sp>
-      <p:sp>
-        <p:nvSpPr>
-          <p:cNvPr id="10" name="TextBox 9"/>
-          <p:cNvSpPr txBox="1"/>
-          <p:nvPr/>
-        </p:nvSpPr>
-        <p:spPr>
-          <a:xfrm>
-            <a:off x="4480560" y="1737360"/>
-            <a:ext cx="3291840" cy="4297680"/>
-          </a:xfrm>
-          <a:prstGeom prst="rect">
-            <a:avLst/>
-          </a:prstGeom>
-          <a:noFill/>
-        </p:spPr>
-        <p:txBody>
-          <a:bodyPr wrap="square">
-            <a:spAutoFit/>
-          </a:bodyPr>
-          <a:lstStyle/>
-          <a:p>
-            <a:pPr algn="l">
-              <a:defRPr sz="1200" b="0">
-                <a:solidFill>
-                  <a:srgbClr val="0D1B2A"/>
-                </a:solidFill>
-                <a:latin typeface="Arial"/>
-              </a:defRPr>
-            </a:pPr>
-            <a:r>
-              <a:t>n_estimators: 500</a:t>
-            </a:r>
-            <a:br/>
-            <a:r>
-              <a:t>learning_rate: 0.05</a:t>
-            </a:r>
-            <a:br/>
-            <a:r>
-              <a:t>max_depth: 6</a:t>
-            </a:r>
-            <a:br/>
-            <a:r>
-              <a:t>subsample: 0.8</a:t>
-            </a:r>
-            <a:br/>
-            <a:r>
-              <a:t>colsample_bytree: 0.8</a:t>
-            </a:r>
-            <a:br/>
-            <a:r>
-              <a:t>reg_alpha: 0.1</a:t>
-            </a:r>
-            <a:br/>
-            <a:r>
-              <a:t>reg_lambda: 1.0</a:t>
-            </a:r>
-            <a:br/>
-            <a:br/>
-            <a:r>
-              <a:t>Target: log1p(price)</a:t>
-            </a:r>
-            <a:br/>
-            <a:r>
-              <a:t>— estabiliza variância</a:t>
-            </a:r>
-            <a:br/>
-            <a:r>
-              <a:t>e reduz assimetria</a:t>
-            </a:r>
-          </a:p>
-        </p:txBody>
-      </p:sp>
-      <p:sp>
-        <p:nvSpPr>
-          <p:cNvPr id="11" name="TextBox 10"/>
-          <p:cNvSpPr txBox="1"/>
-          <p:nvPr/>
-        </p:nvSpPr>
-        <p:spPr>
-          <a:xfrm>
-            <a:off x="8412480" y="1188720"/>
-            <a:ext cx="3291840" cy="411480"/>
-          </a:xfrm>
-          <a:prstGeom prst="rect">
-            <a:avLst/>
-          </a:prstGeom>
-          <a:noFill/>
-        </p:spPr>
-        <p:txBody>
-          <a:bodyPr wrap="square">
-            <a:spAutoFit/>
-          </a:bodyPr>
-          <a:lstStyle/>
-          <a:p>
-            <a:pPr algn="l">
-              <a:defRPr sz="1200" b="1">
-                <a:solidFill>
-                  <a:srgbClr val="E65100"/>
-                </a:solidFill>
-                <a:latin typeface="Arial"/>
-              </a:defRPr>
-            </a:pPr>
-            <a:r>
-              <a:t>Generalização</a:t>
-            </a:r>
-          </a:p>
-        </p:txBody>
-      </p:sp>
-      <p:sp>
-        <p:nvSpPr>
-          <p:cNvPr id="12" name="TextBox 11"/>
-          <p:cNvSpPr txBox="1"/>
-          <p:nvPr/>
-        </p:nvSpPr>
-        <p:spPr>
-          <a:xfrm>
-            <a:off x="8412480" y="1737360"/>
-            <a:ext cx="3291840" cy="4297680"/>
-          </a:xfrm>
-          <a:prstGeom prst="rect">
-            <a:avLst/>
-          </a:prstGeom>
-          <a:noFill/>
-        </p:spPr>
-        <p:txBody>
-          <a:bodyPr wrap="square">
-            <a:spAutoFit/>
-          </a:bodyPr>
-          <a:lstStyle/>
-          <a:p>
-            <a:pPr algn="l">
-              <a:defRPr sz="1200" b="0">
-                <a:solidFill>
-                  <a:srgbClr val="0D1B2A"/>
-                </a:solidFill>
-                <a:latin typeface="Arial"/>
-              </a:defRPr>
-            </a:pPr>
-            <a:r>
-              <a:t>1. Train/Test split 80/20</a:t>
-            </a:r>
-            <a:br/>
-            <a:br/>
-            <a:r>
-              <a:t>2. 5-Fold CV — dados</a:t>
-            </a:r>
-            <a:br/>
-            <a:r>
-              <a:t>   de teste nunca vistos</a:t>
-            </a:r>
-            <a:br/>
-            <a:r>
-              <a:t>   no treino</a:t>
-            </a:r>
-            <a:br/>
-            <a:br/>
-            <a:r>
-              <a:t>3. Subsampling evita</a:t>
-            </a:r>
-            <a:br/>
-            <a:r>
-              <a:t>   memorização</a:t>
-            </a:r>
-            <a:br/>
-            <a:br/>
-            <a:r>
-              <a:t>4. Regularização L1+L2</a:t>
-            </a:r>
-            <a:br/>
-            <a:r>
-              <a:t>   penaliza complexidade</a:t>
-            </a:r>
-            <a:br/>
-            <a:br/>
-            <a:r>
-              <a:t>5. Log-transform do</a:t>
-            </a:r>
-            <a:br/>
-            <a:r>
-              <a:t>   target normaliza</a:t>
-            </a:r>
-            <a:br/>
-            <a:r>
-              <a:t>   a distribuição</a:t>
-            </a:r>
-          </a:p>
-        </p:txBody>
-      </p:sp>
+              <a:t>13  Metricas de Negocio &amp; Previsoes Finais</a:t>
+            </a:r>
+          </a:p>
+        </p:txBody>
+      </p:sp>
+      <p:pic>
+        <p:nvPicPr>
+          <p:cNvPr id="4" name="Picture 3" descr="15_business_metrics.png"/>
+          <p:cNvPicPr>
+            <a:picLocks noChangeAspect="1"/>
+          </p:cNvPicPr>
+          <p:nvPr/>
+        </p:nvPicPr>
+        <p:blipFill>
+          <a:blip r:embed="rId2"/>
+          <a:stretch>
+            <a:fillRect/>
+          </a:stretch>
+        </p:blipFill>
+        <p:spPr>
+          <a:xfrm>
+            <a:off x="274320" y="1005840"/>
+            <a:ext cx="11612880" cy="2834640"/>
+          </a:xfrm>
+          <a:prstGeom prst="rect">
+            <a:avLst/>
+          </a:prstGeom>
+        </p:spPr>
+      </p:pic>
+      <p:pic>
+        <p:nvPicPr>
+          <p:cNvPr id="5" name="Picture 4" descr="16_future_predictions.png"/>
+          <p:cNvPicPr>
+            <a:picLocks noChangeAspect="1"/>
+          </p:cNvPicPr>
+          <p:nvPr/>
+        </p:nvPicPr>
+        <p:blipFill>
+          <a:blip r:embed="rId3"/>
+          <a:stretch>
+            <a:fillRect/>
+          </a:stretch>
+        </p:blipFill>
+        <p:spPr>
+          <a:xfrm>
+            <a:off x="274320" y="3977639"/>
+            <a:ext cx="11612880" cy="2697480"/>
+          </a:xfrm>
+          <a:prstGeom prst="rect">
+            <a:avLst/>
+          </a:prstGeom>
+        </p:spPr>
+      </p:pic>
     </p:spTree>
   </p:cSld>
   <p:clrMapOvr>
@@ -5022,14 +4915,14 @@
               </a:defRPr>
             </a:pPr>
             <a:r>
-              <a:t>11  Importância das Features</a:t>
+              <a:t>14  Estrategia de Deploy</a:t>
             </a:r>
           </a:p>
         </p:txBody>
       </p:sp>
       <p:pic>
         <p:nvPicPr>
-          <p:cNvPr id="4" name="Picture 3" descr="12_feature_importance.png"/>
+          <p:cNvPr id="4" name="Picture 3" descr="deploy_architecture.png"/>
           <p:cNvPicPr>
             <a:picLocks noChangeAspect="1"/>
           </p:cNvPicPr>
@@ -5044,189 +4937,13 @@
         <p:spPr>
           <a:xfrm>
             <a:off x="274320" y="1005840"/>
-            <a:ext cx="6858000" cy="5577840"/>
+            <a:ext cx="11612880" cy="5577840"/>
           </a:xfrm>
           <a:prstGeom prst="rect">
             <a:avLst/>
           </a:prstGeom>
         </p:spPr>
       </p:pic>
-      <p:sp>
-        <p:nvSpPr>
-          <p:cNvPr id="5" name="Rectangle 4"/>
-          <p:cNvSpPr/>
-          <p:nvPr/>
-        </p:nvSpPr>
-        <p:spPr>
-          <a:xfrm>
-            <a:off x="7406640" y="1005840"/>
-            <a:ext cx="4480560" cy="5577840"/>
-          </a:xfrm>
-          <a:prstGeom prst="rect">
-            <a:avLst/>
-          </a:prstGeom>
-          <a:solidFill>
-            <a:srgbClr val="E8F4F8"/>
-          </a:solidFill>
-          <a:ln>
-            <a:solidFill>
-              <a:srgbClr val="1C7293"/>
-            </a:solidFill>
-          </a:ln>
-        </p:spPr>
-        <p:style>
-          <a:lnRef idx="1">
-            <a:schemeClr val="accent1"/>
-          </a:lnRef>
-          <a:fillRef idx="3">
-            <a:schemeClr val="accent1"/>
-          </a:fillRef>
-          <a:effectRef idx="2">
-            <a:schemeClr val="accent1"/>
-          </a:effectRef>
-          <a:fontRef idx="minor">
-            <a:schemeClr val="lt1"/>
-          </a:fontRef>
-        </p:style>
-        <p:txBody>
-          <a:bodyPr rtlCol="0" anchor="ctr"/>
-          <a:lstStyle/>
-          <a:p>
-            <a:pPr algn="ctr"/>
-          </a:p>
-        </p:txBody>
-      </p:sp>
-      <p:sp>
-        <p:nvSpPr>
-          <p:cNvPr id="6" name="TextBox 5"/>
-          <p:cNvSpPr txBox="1"/>
-          <p:nvPr/>
-        </p:nvSpPr>
-        <p:spPr>
-          <a:xfrm>
-            <a:off x="7589520" y="1143000"/>
-            <a:ext cx="4114800" cy="411480"/>
-          </a:xfrm>
-          <a:prstGeom prst="rect">
-            <a:avLst/>
-          </a:prstGeom>
-          <a:noFill/>
-        </p:spPr>
-        <p:txBody>
-          <a:bodyPr wrap="square">
-            <a:spAutoFit/>
-          </a:bodyPr>
-          <a:lstStyle/>
-          <a:p>
-            <a:pPr algn="l">
-              <a:defRPr sz="1300" b="1">
-                <a:solidFill>
-                  <a:srgbClr val="1C7293"/>
-                </a:solidFill>
-                <a:latin typeface="Arial"/>
-              </a:defRPr>
-            </a:pPr>
-            <a:r>
-              <a:t>Interpretação:</a:t>
-            </a:r>
-          </a:p>
-        </p:txBody>
-      </p:sp>
-      <p:sp>
-        <p:nvSpPr>
-          <p:cNvPr id="7" name="TextBox 6"/>
-          <p:cNvSpPr txBox="1"/>
-          <p:nvPr/>
-        </p:nvSpPr>
-        <p:spPr>
-          <a:xfrm>
-            <a:off x="7589520" y="1645920"/>
-            <a:ext cx="4114800" cy="4754880"/>
-          </a:xfrm>
-          <a:prstGeom prst="rect">
-            <a:avLst/>
-          </a:prstGeom>
-          <a:noFill/>
-        </p:spPr>
-        <p:txBody>
-          <a:bodyPr wrap="square">
-            <a:spAutoFit/>
-          </a:bodyPr>
-          <a:lstStyle/>
-          <a:p>
-            <a:pPr algn="l">
-              <a:defRPr sz="1150" b="0">
-                <a:solidFill>
-                  <a:srgbClr val="0D1B2A"/>
-                </a:solidFill>
-                <a:latin typeface="Arial"/>
-              </a:defRPr>
-            </a:pPr>
-            <a:r>
-              <a:t>lat / long</a:t>
-            </a:r>
-            <a:br/>
-            <a:r>
-              <a:t>Localização é o preditor</a:t>
-            </a:r>
-            <a:br/>
-            <a:r>
-              <a:t>mais poderoso.</a:t>
-            </a:r>
-            <a:br/>
-            <a:br/>
-            <a:r>
-              <a:t>grade_sqft</a:t>
-            </a:r>
-            <a:br/>
-            <a:r>
-              <a:t>Interação criada confirma</a:t>
-            </a:r>
-            <a:br/>
-            <a:r>
-              <a:t>que qualidade × área</a:t>
-            </a:r>
-            <a:br/>
-            <a:r>
-              <a:t>explica preço premium.</a:t>
-            </a:r>
-            <a:br/>
-            <a:br/>
-            <a:r>
-              <a:t>hous_val_amt</a:t>
-            </a:r>
-            <a:br/>
-            <a:r>
-              <a:t>Valor médio do bairro</a:t>
-            </a:r>
-            <a:br/>
-            <a:r>
-              <a:t>(demográfico) = contexto</a:t>
-            </a:r>
-            <a:br/>
-            <a:r>
-              <a:t>mercadológico essencial.</a:t>
-            </a:r>
-            <a:br/>
-            <a:br/>
-            <a:r>
-              <a:t>age / yr_built</a:t>
-            </a:r>
-            <a:br/>
-            <a:r>
-              <a:t>Imóveis mais novos</a:t>
-            </a:r>
-            <a:br/>
-            <a:r>
-              <a:t>valem consistentemente</a:t>
-            </a:r>
-            <a:br/>
-            <a:r>
-              <a:t>mais no dataset.</a:t>
-            </a:r>
-          </a:p>
-        </p:txBody>
-      </p:sp>
     </p:spTree>
   </p:cSld>
   <p:clrMapOvr>
@@ -5329,354 +5046,14 @@
               </a:defRPr>
             </a:pPr>
             <a:r>
-              <a:t>12  Avaliação do Modelo</a:t>
-            </a:r>
-          </a:p>
-        </p:txBody>
-      </p:sp>
-      <p:sp>
-        <p:nvSpPr>
-          <p:cNvPr id="4" name="Rectangle 3"/>
-          <p:cNvSpPr/>
-          <p:nvPr/>
-        </p:nvSpPr>
-        <p:spPr>
-          <a:xfrm>
-            <a:off x="365760" y="1051560"/>
-            <a:ext cx="2560320" cy="1417320"/>
-          </a:xfrm>
-          <a:prstGeom prst="rect">
-            <a:avLst/>
-          </a:prstGeom>
-          <a:solidFill>
-            <a:srgbClr val="0D1B2A"/>
-          </a:solidFill>
-          <a:ln>
-            <a:solidFill>
-              <a:srgbClr val="0D1B2A"/>
-            </a:solidFill>
-          </a:ln>
-        </p:spPr>
-        <p:style>
-          <a:lnRef idx="1">
-            <a:schemeClr val="accent1"/>
-          </a:lnRef>
-          <a:fillRef idx="3">
-            <a:schemeClr val="accent1"/>
-          </a:fillRef>
-          <a:effectRef idx="2">
-            <a:schemeClr val="accent1"/>
-          </a:effectRef>
-          <a:fontRef idx="minor">
-            <a:schemeClr val="lt1"/>
-          </a:fontRef>
-        </p:style>
-        <p:txBody>
-          <a:bodyPr rtlCol="0" anchor="ctr"/>
-          <a:lstStyle/>
-          <a:p>
-            <a:pPr algn="ctr"/>
-          </a:p>
-        </p:txBody>
-      </p:sp>
-      <p:sp>
-        <p:nvSpPr>
-          <p:cNvPr id="5" name="Rectangle 4"/>
-          <p:cNvSpPr/>
-          <p:nvPr/>
-        </p:nvSpPr>
-        <p:spPr>
-          <a:xfrm>
-            <a:off x="3200400" y="1051560"/>
-            <a:ext cx="2560320" cy="1417320"/>
-          </a:xfrm>
-          <a:prstGeom prst="rect">
-            <a:avLst/>
-          </a:prstGeom>
-          <a:solidFill>
-            <a:srgbClr val="1C7293"/>
-          </a:solidFill>
-          <a:ln>
-            <a:solidFill>
-              <a:srgbClr val="1C7293"/>
-            </a:solidFill>
-          </a:ln>
-        </p:spPr>
-        <p:style>
-          <a:lnRef idx="1">
-            <a:schemeClr val="accent1"/>
-          </a:lnRef>
-          <a:fillRef idx="3">
-            <a:schemeClr val="accent1"/>
-          </a:fillRef>
-          <a:effectRef idx="2">
-            <a:schemeClr val="accent1"/>
-          </a:effectRef>
-          <a:fontRef idx="minor">
-            <a:schemeClr val="lt1"/>
-          </a:fontRef>
-        </p:style>
-        <p:txBody>
-          <a:bodyPr rtlCol="0" anchor="ctr"/>
-          <a:lstStyle/>
-          <a:p>
-            <a:pPr algn="ctr"/>
-          </a:p>
-        </p:txBody>
-      </p:sp>
-      <p:sp>
-        <p:nvSpPr>
-          <p:cNvPr id="6" name="Rectangle 5"/>
-          <p:cNvSpPr/>
-          <p:nvPr/>
-        </p:nvSpPr>
-        <p:spPr>
-          <a:xfrm>
-            <a:off x="6035040" y="1051560"/>
-            <a:ext cx="2560320" cy="1417320"/>
-          </a:xfrm>
-          <a:prstGeom prst="rect">
-            <a:avLst/>
-          </a:prstGeom>
-          <a:solidFill>
-            <a:srgbClr val="27AE60"/>
-          </a:solidFill>
-          <a:ln>
-            <a:solidFill>
-              <a:srgbClr val="27AE60"/>
-            </a:solidFill>
-          </a:ln>
-        </p:spPr>
-        <p:style>
-          <a:lnRef idx="1">
-            <a:schemeClr val="accent1"/>
-          </a:lnRef>
-          <a:fillRef idx="3">
-            <a:schemeClr val="accent1"/>
-          </a:fillRef>
-          <a:effectRef idx="2">
-            <a:schemeClr val="accent1"/>
-          </a:effectRef>
-          <a:fontRef idx="minor">
-            <a:schemeClr val="lt1"/>
-          </a:fontRef>
-        </p:style>
-        <p:txBody>
-          <a:bodyPr rtlCol="0" anchor="ctr"/>
-          <a:lstStyle/>
-          <a:p>
-            <a:pPr algn="ctr"/>
-          </a:p>
-        </p:txBody>
-      </p:sp>
-      <p:sp>
-        <p:nvSpPr>
-          <p:cNvPr id="7" name="Rectangle 6"/>
-          <p:cNvSpPr/>
-          <p:nvPr/>
-        </p:nvSpPr>
-        <p:spPr>
-          <a:xfrm>
-            <a:off x="8869680" y="1051560"/>
-            <a:ext cx="3017520" cy="1417320"/>
-          </a:xfrm>
-          <a:prstGeom prst="rect">
-            <a:avLst/>
-          </a:prstGeom>
-          <a:solidFill>
-            <a:srgbClr val="E67E22"/>
-          </a:solidFill>
-          <a:ln>
-            <a:solidFill>
-              <a:srgbClr val="E67E22"/>
-            </a:solidFill>
-          </a:ln>
-        </p:spPr>
-        <p:style>
-          <a:lnRef idx="1">
-            <a:schemeClr val="accent1"/>
-          </a:lnRef>
-          <a:fillRef idx="3">
-            <a:schemeClr val="accent1"/>
-          </a:fillRef>
-          <a:effectRef idx="2">
-            <a:schemeClr val="accent1"/>
-          </a:effectRef>
-          <a:fontRef idx="minor">
-            <a:schemeClr val="lt1"/>
-          </a:fontRef>
-        </p:style>
-        <p:txBody>
-          <a:bodyPr rtlCol="0" anchor="ctr"/>
-          <a:lstStyle/>
-          <a:p>
-            <a:pPr algn="ctr"/>
-          </a:p>
-        </p:txBody>
-      </p:sp>
-      <p:sp>
-        <p:nvSpPr>
-          <p:cNvPr id="8" name="TextBox 7"/>
-          <p:cNvSpPr txBox="1"/>
-          <p:nvPr/>
-        </p:nvSpPr>
-        <p:spPr>
-          <a:xfrm>
-            <a:off x="365760" y="1051560"/>
-            <a:ext cx="2560320" cy="1417320"/>
-          </a:xfrm>
-          <a:prstGeom prst="rect">
-            <a:avLst/>
-          </a:prstGeom>
-          <a:noFill/>
-        </p:spPr>
-        <p:txBody>
-          <a:bodyPr wrap="square">
-            <a:spAutoFit/>
-          </a:bodyPr>
-          <a:lstStyle/>
-          <a:p>
-            <a:pPr algn="ctr">
-              <a:defRPr sz="2400" b="1">
-                <a:solidFill>
-                  <a:srgbClr val="FFFFFF"/>
-                </a:solidFill>
-                <a:latin typeface="Arial"/>
-              </a:defRPr>
-            </a:pPr>
-            <a:r>
-              <a:t>R²</a:t>
-            </a:r>
-            <a:br/>
-            <a:r>
-              <a:t>0.9138</a:t>
-            </a:r>
-          </a:p>
-        </p:txBody>
-      </p:sp>
-      <p:sp>
-        <p:nvSpPr>
-          <p:cNvPr id="9" name="TextBox 8"/>
-          <p:cNvSpPr txBox="1"/>
-          <p:nvPr/>
-        </p:nvSpPr>
-        <p:spPr>
-          <a:xfrm>
-            <a:off x="3200400" y="1051560"/>
-            <a:ext cx="2560320" cy="1417320"/>
-          </a:xfrm>
-          <a:prstGeom prst="rect">
-            <a:avLst/>
-          </a:prstGeom>
-          <a:noFill/>
-        </p:spPr>
-        <p:txBody>
-          <a:bodyPr wrap="square">
-            <a:spAutoFit/>
-          </a:bodyPr>
-          <a:lstStyle/>
-          <a:p>
-            <a:pPr algn="ctr">
-              <a:defRPr sz="2400" b="1">
-                <a:solidFill>
-                  <a:srgbClr val="FFFFFF"/>
-                </a:solidFill>
-                <a:latin typeface="Arial"/>
-              </a:defRPr>
-            </a:pPr>
-            <a:r>
-              <a:t>MAE</a:t>
-            </a:r>
-            <a:br/>
-            <a:r>
-              <a:t>$63.127</a:t>
-            </a:r>
-          </a:p>
-        </p:txBody>
-      </p:sp>
-      <p:sp>
-        <p:nvSpPr>
-          <p:cNvPr id="10" name="TextBox 9"/>
-          <p:cNvSpPr txBox="1"/>
-          <p:nvPr/>
-        </p:nvSpPr>
-        <p:spPr>
-          <a:xfrm>
-            <a:off x="6035040" y="1051560"/>
-            <a:ext cx="2560320" cy="1417320"/>
-          </a:xfrm>
-          <a:prstGeom prst="rect">
-            <a:avLst/>
-          </a:prstGeom>
-          <a:noFill/>
-        </p:spPr>
-        <p:txBody>
-          <a:bodyPr wrap="square">
-            <a:spAutoFit/>
-          </a:bodyPr>
-          <a:lstStyle/>
-          <a:p>
-            <a:pPr algn="ctr">
-              <a:defRPr sz="2200" b="1">
-                <a:solidFill>
-                  <a:srgbClr val="FFFFFF"/>
-                </a:solidFill>
-                <a:latin typeface="Arial"/>
-              </a:defRPr>
-            </a:pPr>
-            <a:r>
-              <a:t>RMSE</a:t>
-            </a:r>
-            <a:br/>
-            <a:r>
-              <a:t>$114.173</a:t>
-            </a:r>
-          </a:p>
-        </p:txBody>
-      </p:sp>
-      <p:sp>
-        <p:nvSpPr>
-          <p:cNvPr id="11" name="TextBox 10"/>
-          <p:cNvSpPr txBox="1"/>
-          <p:nvPr/>
-        </p:nvSpPr>
-        <p:spPr>
-          <a:xfrm>
-            <a:off x="8869680" y="1051560"/>
-            <a:ext cx="3017520" cy="1417320"/>
-          </a:xfrm>
-          <a:prstGeom prst="rect">
-            <a:avLst/>
-          </a:prstGeom>
-          <a:noFill/>
-        </p:spPr>
-        <p:txBody>
-          <a:bodyPr wrap="square">
-            <a:spAutoFit/>
-          </a:bodyPr>
-          <a:lstStyle/>
-          <a:p>
-            <a:pPr algn="ctr">
-              <a:defRPr sz="2400" b="1">
-                <a:solidFill>
-                  <a:srgbClr val="FFFFFF"/>
-                </a:solidFill>
-                <a:latin typeface="Arial"/>
-              </a:defRPr>
-            </a:pPr>
-            <a:r>
-              <a:t>MAPE</a:t>
-            </a:r>
-            <a:br/>
-            <a:r>
-              <a:t>11.56%</a:t>
+              <a:t>15  Aprendizado Continuo</a:t>
             </a:r>
           </a:p>
         </p:txBody>
       </p:sp>
       <p:pic>
         <p:nvPicPr>
-          <p:cNvPr id="12" name="Picture 11" descr="13_actual_vs_predicted.png"/>
+          <p:cNvPr id="4" name="Picture 3" descr="continuous_learning.png"/>
           <p:cNvPicPr>
             <a:picLocks noChangeAspect="1"/>
           </p:cNvPicPr>
@@ -5690,14 +5067,269 @@
         </p:blipFill>
         <p:spPr>
           <a:xfrm>
-            <a:off x="274320" y="2651760"/>
-            <a:ext cx="11612880" cy="3977639"/>
+            <a:off x="274320" y="1005840"/>
+            <a:ext cx="11612880" cy="4114800"/>
           </a:xfrm>
           <a:prstGeom prst="rect">
             <a:avLst/>
           </a:prstGeom>
         </p:spPr>
       </p:pic>
+      <p:sp>
+        <p:nvSpPr>
+          <p:cNvPr id="5" name="Rectangle 4"/>
+          <p:cNvSpPr/>
+          <p:nvPr/>
+        </p:nvSpPr>
+        <p:spPr>
+          <a:xfrm>
+            <a:off x="365760" y="5303520"/>
+            <a:ext cx="3657600" cy="1371600"/>
+          </a:xfrm>
+          <a:prstGeom prst="rect">
+            <a:avLst/>
+          </a:prstGeom>
+          <a:solidFill>
+            <a:srgbClr val="1A5276"/>
+          </a:solidFill>
+          <a:ln>
+            <a:solidFill>
+              <a:srgbClr val="1A5276"/>
+            </a:solidFill>
+          </a:ln>
+        </p:spPr>
+        <p:style>
+          <a:lnRef idx="1">
+            <a:schemeClr val="accent1"/>
+          </a:lnRef>
+          <a:fillRef idx="3">
+            <a:schemeClr val="accent1"/>
+          </a:fillRef>
+          <a:effectRef idx="2">
+            <a:schemeClr val="accent1"/>
+          </a:effectRef>
+          <a:fontRef idx="minor">
+            <a:schemeClr val="lt1"/>
+          </a:fontRef>
+        </p:style>
+        <p:txBody>
+          <a:bodyPr rtlCol="0" anchor="ctr"/>
+          <a:lstStyle/>
+          <a:p>
+            <a:pPr algn="ctr"/>
+          </a:p>
+        </p:txBody>
+      </p:sp>
+      <p:sp>
+        <p:nvSpPr>
+          <p:cNvPr id="6" name="Rectangle 5"/>
+          <p:cNvSpPr/>
+          <p:nvPr/>
+        </p:nvSpPr>
+        <p:spPr>
+          <a:xfrm>
+            <a:off x="4297680" y="5303520"/>
+            <a:ext cx="3657600" cy="1371600"/>
+          </a:xfrm>
+          <a:prstGeom prst="rect">
+            <a:avLst/>
+          </a:prstGeom>
+          <a:solidFill>
+            <a:srgbClr val="1A5276"/>
+          </a:solidFill>
+          <a:ln>
+            <a:solidFill>
+              <a:srgbClr val="1A5276"/>
+            </a:solidFill>
+          </a:ln>
+        </p:spPr>
+        <p:style>
+          <a:lnRef idx="1">
+            <a:schemeClr val="accent1"/>
+          </a:lnRef>
+          <a:fillRef idx="3">
+            <a:schemeClr val="accent1"/>
+          </a:fillRef>
+          <a:effectRef idx="2">
+            <a:schemeClr val="accent1"/>
+          </a:effectRef>
+          <a:fontRef idx="minor">
+            <a:schemeClr val="lt1"/>
+          </a:fontRef>
+        </p:style>
+        <p:txBody>
+          <a:bodyPr rtlCol="0" anchor="ctr"/>
+          <a:lstStyle/>
+          <a:p>
+            <a:pPr algn="ctr"/>
+          </a:p>
+        </p:txBody>
+      </p:sp>
+      <p:sp>
+        <p:nvSpPr>
+          <p:cNvPr id="7" name="Rectangle 6"/>
+          <p:cNvSpPr/>
+          <p:nvPr/>
+        </p:nvSpPr>
+        <p:spPr>
+          <a:xfrm>
+            <a:off x="8229600" y="5303520"/>
+            <a:ext cx="3657600" cy="1371600"/>
+          </a:xfrm>
+          <a:prstGeom prst="rect">
+            <a:avLst/>
+          </a:prstGeom>
+          <a:solidFill>
+            <a:srgbClr val="1A5276"/>
+          </a:solidFill>
+          <a:ln>
+            <a:solidFill>
+              <a:srgbClr val="1A5276"/>
+            </a:solidFill>
+          </a:ln>
+        </p:spPr>
+        <p:style>
+          <a:lnRef idx="1">
+            <a:schemeClr val="accent1"/>
+          </a:lnRef>
+          <a:fillRef idx="3">
+            <a:schemeClr val="accent1"/>
+          </a:fillRef>
+          <a:effectRef idx="2">
+            <a:schemeClr val="accent1"/>
+          </a:effectRef>
+          <a:fontRef idx="minor">
+            <a:schemeClr val="lt1"/>
+          </a:fontRef>
+        </p:style>
+        <p:txBody>
+          <a:bodyPr rtlCol="0" anchor="ctr"/>
+          <a:lstStyle/>
+          <a:p>
+            <a:pPr algn="ctr"/>
+          </a:p>
+        </p:txBody>
+      </p:sp>
+      <p:sp>
+        <p:nvSpPr>
+          <p:cNvPr id="8" name="TextBox 7"/>
+          <p:cNvSpPr txBox="1"/>
+          <p:nvPr/>
+        </p:nvSpPr>
+        <p:spPr>
+          <a:xfrm>
+            <a:off x="365760" y="5303520"/>
+            <a:ext cx="3657600" cy="1371600"/>
+          </a:xfrm>
+          <a:prstGeom prst="rect">
+            <a:avLst/>
+          </a:prstGeom>
+          <a:noFill/>
+        </p:spPr>
+        <p:txBody>
+          <a:bodyPr wrap="square">
+            <a:spAutoFit/>
+          </a:bodyPr>
+          <a:lstStyle/>
+          <a:p>
+            <a:pPr algn="ctr">
+              <a:defRPr sz="1300" b="0">
+                <a:solidFill>
+                  <a:srgbClr val="FFFFFF"/>
+                </a:solidFill>
+                <a:latin typeface="Arial"/>
+              </a:defRPr>
+            </a:pPr>
+            <a:r>
+              <a:t>Data Drift</a:t>
+            </a:r>
+            <a:br/>
+            <a:r>
+              <a:t>KS-test p &lt; 0.05</a:t>
+            </a:r>
+          </a:p>
+        </p:txBody>
+      </p:sp>
+      <p:sp>
+        <p:nvSpPr>
+          <p:cNvPr id="9" name="TextBox 8"/>
+          <p:cNvSpPr txBox="1"/>
+          <p:nvPr/>
+        </p:nvSpPr>
+        <p:spPr>
+          <a:xfrm>
+            <a:off x="4297680" y="5303520"/>
+            <a:ext cx="3657600" cy="1371600"/>
+          </a:xfrm>
+          <a:prstGeom prst="rect">
+            <a:avLst/>
+          </a:prstGeom>
+          <a:noFill/>
+        </p:spPr>
+        <p:txBody>
+          <a:bodyPr wrap="square">
+            <a:spAutoFit/>
+          </a:bodyPr>
+          <a:lstStyle/>
+          <a:p>
+            <a:pPr algn="ctr">
+              <a:defRPr sz="1300" b="0">
+                <a:solidFill>
+                  <a:srgbClr val="FFFFFF"/>
+                </a:solidFill>
+                <a:latin typeface="Arial"/>
+              </a:defRPr>
+            </a:pPr>
+            <a:r>
+              <a:t>Degradacao</a:t>
+            </a:r>
+            <a:br/>
+            <a:r>
+              <a:t>MAE &gt; threshold</a:t>
+            </a:r>
+          </a:p>
+        </p:txBody>
+      </p:sp>
+      <p:sp>
+        <p:nvSpPr>
+          <p:cNvPr id="10" name="TextBox 9"/>
+          <p:cNvSpPr txBox="1"/>
+          <p:nvPr/>
+        </p:nvSpPr>
+        <p:spPr>
+          <a:xfrm>
+            <a:off x="8229600" y="5303520"/>
+            <a:ext cx="3657600" cy="1371600"/>
+          </a:xfrm>
+          <a:prstGeom prst="rect">
+            <a:avLst/>
+          </a:prstGeom>
+          <a:noFill/>
+        </p:spPr>
+        <p:txBody>
+          <a:bodyPr wrap="square">
+            <a:spAutoFit/>
+          </a:bodyPr>
+          <a:lstStyle/>
+          <a:p>
+            <a:pPr algn="ctr">
+              <a:defRPr sz="1300" b="0">
+                <a:solidFill>
+                  <a:srgbClr val="FFFFFF"/>
+                </a:solidFill>
+                <a:latin typeface="Arial"/>
+              </a:defRPr>
+            </a:pPr>
+            <a:r>
+              <a:t>Volume</a:t>
+            </a:r>
+            <a:br/>
+            <a:r>
+              <a:t>+500 novos imoveis</a:t>
+            </a:r>
+          </a:p>
+        </p:txBody>
+      </p:sp>
     </p:spTree>
   </p:cSld>
   <p:clrMapOvr>
@@ -5800,59 +5432,311 @@
               </a:defRPr>
             </a:pPr>
             <a:r>
-              <a:t>13  Métricas de Negócio &amp; Previsões Finais</a:t>
-            </a:r>
-          </a:p>
-        </p:txBody>
-      </p:sp>
-      <p:pic>
-        <p:nvPicPr>
-          <p:cNvPr id="4" name="Picture 3" descr="15_business_metrics.png"/>
-          <p:cNvPicPr>
-            <a:picLocks noChangeAspect="1"/>
-          </p:cNvPicPr>
-          <p:nvPr/>
-        </p:nvPicPr>
-        <p:blipFill>
-          <a:blip r:embed="rId2"/>
-          <a:stretch>
-            <a:fillRect/>
-          </a:stretch>
-        </p:blipFill>
-        <p:spPr>
-          <a:xfrm>
-            <a:off x="274320" y="1005840"/>
-            <a:ext cx="11612880" cy="2834640"/>
-          </a:xfrm>
-          <a:prstGeom prst="rect">
-            <a:avLst/>
-          </a:prstGeom>
-        </p:spPr>
-      </p:pic>
-      <p:pic>
-        <p:nvPicPr>
-          <p:cNvPr id="5" name="Picture 4" descr="16_future_predictions.png"/>
-          <p:cNvPicPr>
-            <a:picLocks noChangeAspect="1"/>
-          </p:cNvPicPr>
-          <p:nvPr/>
-        </p:nvPicPr>
-        <p:blipFill>
-          <a:blip r:embed="rId3"/>
-          <a:stretch>
-            <a:fillRect/>
-          </a:stretch>
-        </p:blipFill>
-        <p:spPr>
-          <a:xfrm>
-            <a:off x="274320" y="3977639"/>
-            <a:ext cx="11612880" cy="2697480"/>
-          </a:xfrm>
-          <a:prstGeom prst="rect">
-            <a:avLst/>
-          </a:prstGeom>
-        </p:spPr>
-      </p:pic>
+              <a:t>16  Comunicacao com Stakeholders</a:t>
+            </a:r>
+          </a:p>
+        </p:txBody>
+      </p:sp>
+      <p:sp>
+        <p:nvSpPr>
+          <p:cNvPr id="4" name="Rectangle 3"/>
+          <p:cNvSpPr/>
+          <p:nvPr/>
+        </p:nvSpPr>
+        <p:spPr>
+          <a:xfrm>
+            <a:off x="365760" y="1097280"/>
+            <a:ext cx="5394960" cy="5166360"/>
+          </a:xfrm>
+          <a:prstGeom prst="rect">
+            <a:avLst/>
+          </a:prstGeom>
+          <a:solidFill>
+            <a:srgbClr val="E8F4F8"/>
+          </a:solidFill>
+          <a:ln>
+            <a:solidFill>
+              <a:srgbClr val="1C7293"/>
+            </a:solidFill>
+          </a:ln>
+        </p:spPr>
+        <p:style>
+          <a:lnRef idx="1">
+            <a:schemeClr val="accent1"/>
+          </a:lnRef>
+          <a:fillRef idx="3">
+            <a:schemeClr val="accent1"/>
+          </a:fillRef>
+          <a:effectRef idx="2">
+            <a:schemeClr val="accent1"/>
+          </a:effectRef>
+          <a:fontRef idx="minor">
+            <a:schemeClr val="lt1"/>
+          </a:fontRef>
+        </p:style>
+        <p:txBody>
+          <a:bodyPr rtlCol="0" anchor="ctr"/>
+          <a:lstStyle/>
+          <a:p>
+            <a:pPr algn="ctr"/>
+          </a:p>
+        </p:txBody>
+      </p:sp>
+      <p:sp>
+        <p:nvSpPr>
+          <p:cNvPr id="5" name="Rectangle 4"/>
+          <p:cNvSpPr/>
+          <p:nvPr/>
+        </p:nvSpPr>
+        <p:spPr>
+          <a:xfrm>
+            <a:off x="6035040" y="1097280"/>
+            <a:ext cx="5852160" cy="5166360"/>
+          </a:xfrm>
+          <a:prstGeom prst="rect">
+            <a:avLst/>
+          </a:prstGeom>
+          <a:solidFill>
+            <a:srgbClr val="FFF8E1"/>
+          </a:solidFill>
+          <a:ln>
+            <a:solidFill>
+              <a:srgbClr val="F9A825"/>
+            </a:solidFill>
+          </a:ln>
+        </p:spPr>
+        <p:style>
+          <a:lnRef idx="1">
+            <a:schemeClr val="accent1"/>
+          </a:lnRef>
+          <a:fillRef idx="3">
+            <a:schemeClr val="accent1"/>
+          </a:fillRef>
+          <a:effectRef idx="2">
+            <a:schemeClr val="accent1"/>
+          </a:effectRef>
+          <a:fontRef idx="minor">
+            <a:schemeClr val="lt1"/>
+          </a:fontRef>
+        </p:style>
+        <p:txBody>
+          <a:bodyPr rtlCol="0" anchor="ctr"/>
+          <a:lstStyle/>
+          <a:p>
+            <a:pPr algn="ctr"/>
+          </a:p>
+        </p:txBody>
+      </p:sp>
+      <p:sp>
+        <p:nvSpPr>
+          <p:cNvPr id="6" name="TextBox 5"/>
+          <p:cNvSpPr txBox="1"/>
+          <p:nvPr/>
+        </p:nvSpPr>
+        <p:spPr>
+          <a:xfrm>
+            <a:off x="548640" y="1234440"/>
+            <a:ext cx="5029200" cy="457200"/>
+          </a:xfrm>
+          <a:prstGeom prst="rect">
+            <a:avLst/>
+          </a:prstGeom>
+          <a:noFill/>
+        </p:spPr>
+        <p:txBody>
+          <a:bodyPr wrap="square">
+            <a:spAutoFit/>
+          </a:bodyPr>
+          <a:lstStyle/>
+          <a:p>
+            <a:pPr algn="l">
+              <a:defRPr sz="1300" b="1">
+                <a:solidFill>
+                  <a:srgbClr val="1C7293"/>
+                </a:solidFill>
+                <a:latin typeface="Arial"/>
+              </a:defRPr>
+            </a:pPr>
+            <a:r>
+              <a:t>Traducao das metricas:</a:t>
+            </a:r>
+          </a:p>
+        </p:txBody>
+      </p:sp>
+      <p:sp>
+        <p:nvSpPr>
+          <p:cNvPr id="7" name="TextBox 6"/>
+          <p:cNvSpPr txBox="1"/>
+          <p:nvPr/>
+        </p:nvSpPr>
+        <p:spPr>
+          <a:xfrm>
+            <a:off x="548640" y="1783080"/>
+            <a:ext cx="5029200" cy="4206240"/>
+          </a:xfrm>
+          <a:prstGeom prst="rect">
+            <a:avLst/>
+          </a:prstGeom>
+          <a:noFill/>
+        </p:spPr>
+        <p:txBody>
+          <a:bodyPr wrap="square">
+            <a:spAutoFit/>
+          </a:bodyPr>
+          <a:lstStyle/>
+          <a:p>
+            <a:pPr algn="l">
+              <a:defRPr sz="1250" b="0">
+                <a:solidFill>
+                  <a:srgbClr val="0D1B2A"/>
+                </a:solidFill>
+                <a:latin typeface="Arial"/>
+              </a:defRPr>
+            </a:pPr>
+            <a:r>
+              <a:t>R2 = 0.91</a:t>
+            </a:r>
+            <a:br/>
+            <a:r>
+              <a:t>  O modelo explica 91% da variacao</a:t>
+            </a:r>
+            <a:br/>
+            <a:br/>
+            <a:r>
+              <a:t>MAE = .127</a:t>
+            </a:r>
+            <a:br/>
+            <a:r>
+              <a:t>  Em media, erra  na avaliacao</a:t>
+            </a:r>
+            <a:br/>
+            <a:br/>
+            <a:r>
+              <a:t>MAPE = 11.6%</a:t>
+            </a:r>
+            <a:br/>
+            <a:r>
+              <a:t>  Erro de 12% (aceitavel no setor)</a:t>
+            </a:r>
+            <a:br/>
+            <a:br/>
+            <a:r>
+              <a:t>Erro por faixa:</a:t>
+            </a:r>
+            <a:br/>
+            <a:r>
+              <a:t>  Imoveis ate 700k: &lt; 10%</a:t>
+            </a:r>
+            <a:br/>
+            <a:r>
+              <a:t>  Imoveis &gt; 1M: ~15-18%</a:t>
+            </a:r>
+          </a:p>
+        </p:txBody>
+      </p:sp>
+      <p:sp>
+        <p:nvSpPr>
+          <p:cNvPr id="8" name="TextBox 7"/>
+          <p:cNvSpPr txBox="1"/>
+          <p:nvPr/>
+        </p:nvSpPr>
+        <p:spPr>
+          <a:xfrm>
+            <a:off x="6217920" y="1234440"/>
+            <a:ext cx="5486400" cy="457200"/>
+          </a:xfrm>
+          <a:prstGeom prst="rect">
+            <a:avLst/>
+          </a:prstGeom>
+          <a:noFill/>
+        </p:spPr>
+        <p:txBody>
+          <a:bodyPr wrap="square">
+            <a:spAutoFit/>
+          </a:bodyPr>
+          <a:lstStyle/>
+          <a:p>
+            <a:pPr algn="l">
+              <a:defRPr sz="1300" b="1">
+                <a:solidFill>
+                  <a:srgbClr val="E65100"/>
+                </a:solidFill>
+                <a:latin typeface="Arial"/>
+              </a:defRPr>
+            </a:pPr>
+            <a:r>
+              <a:t>Valor para o negocio:</a:t>
+            </a:r>
+          </a:p>
+        </p:txBody>
+      </p:sp>
+      <p:sp>
+        <p:nvSpPr>
+          <p:cNvPr id="9" name="TextBox 8"/>
+          <p:cNvSpPr txBox="1"/>
+          <p:nvPr/>
+        </p:nvSpPr>
+        <p:spPr>
+          <a:xfrm>
+            <a:off x="6217920" y="1783080"/>
+            <a:ext cx="5486400" cy="4206240"/>
+          </a:xfrm>
+          <a:prstGeom prst="rect">
+            <a:avLst/>
+          </a:prstGeom>
+          <a:noFill/>
+        </p:spPr>
+        <p:txBody>
+          <a:bodyPr wrap="square">
+            <a:spAutoFit/>
+          </a:bodyPr>
+          <a:lstStyle/>
+          <a:p>
+            <a:pPr algn="l">
+              <a:defRPr sz="1250" b="0">
+                <a:solidFill>
+                  <a:srgbClr val="0D1B2A"/>
+                </a:solidFill>
+                <a:latin typeface="Arial"/>
+              </a:defRPr>
+            </a:pPr>
+            <a:r>
+              <a:t>Velocidade</a:t>
+            </a:r>
+            <a:br/>
+            <a:r>
+              <a:t>Avaliacao em segundos vs 2-3 dias</a:t>
+            </a:r>
+            <a:br/>
+            <a:br/>
+            <a:r>
+              <a:t>Consistencia</a:t>
+            </a:r>
+            <a:br/>
+            <a:r>
+              <a:t>Elimina variacao subjetiva</a:t>
+            </a:r>
+            <a:br/>
+            <a:br/>
+            <a:r>
+              <a:t>Escala</a:t>
+            </a:r>
+            <a:br/>
+            <a:r>
+              <a:t>Centenas de avaliacoes por minuto</a:t>
+            </a:r>
+            <a:br/>
+            <a:br/>
+            <a:r>
+              <a:t>Confianca</a:t>
+            </a:r>
+            <a:br/>
+            <a:r>
+              <a:t>91% de explicabilidade ao cliente</a:t>
+            </a:r>
+          </a:p>
+        </p:txBody>
+      </p:sp>
     </p:spTree>
   </p:cSld>
   <p:clrMapOvr>
@@ -5867,7 +5751,7 @@
     <p:bg>
       <p:bgPr>
         <a:solidFill>
-          <a:srgbClr val="F4F8FB"/>
+          <a:srgbClr val="0D1B2A"/>
         </a:solidFill>
         <a:effectLst/>
       </p:bgPr>
@@ -5888,7 +5772,7 @@
         <p:spPr>
           <a:xfrm>
             <a:off x="0" y="0"/>
-            <a:ext cx="12191695" cy="960120"/>
+            <a:ext cx="12191695" cy="6858000"/>
           </a:xfrm>
           <a:prstGeom prst="rect">
             <a:avLst/>
@@ -5926,14 +5810,104 @@
       </p:sp>
       <p:sp>
         <p:nvSpPr>
-          <p:cNvPr id="3" name="TextBox 2"/>
+          <p:cNvPr id="3" name="Rectangle 2"/>
+          <p:cNvSpPr/>
+          <p:nvPr/>
+        </p:nvSpPr>
+        <p:spPr>
+          <a:xfrm>
+            <a:off x="0" y="5394960"/>
+            <a:ext cx="12191695" cy="1463040"/>
+          </a:xfrm>
+          <a:prstGeom prst="rect">
+            <a:avLst/>
+          </a:prstGeom>
+          <a:solidFill>
+            <a:srgbClr val="1C7293"/>
+          </a:solidFill>
+          <a:ln>
+            <a:solidFill>
+              <a:srgbClr val="1C7293"/>
+            </a:solidFill>
+          </a:ln>
+        </p:spPr>
+        <p:style>
+          <a:lnRef idx="1">
+            <a:schemeClr val="accent1"/>
+          </a:lnRef>
+          <a:fillRef idx="3">
+            <a:schemeClr val="accent1"/>
+          </a:fillRef>
+          <a:effectRef idx="2">
+            <a:schemeClr val="accent1"/>
+          </a:effectRef>
+          <a:fontRef idx="minor">
+            <a:schemeClr val="lt1"/>
+          </a:fontRef>
+        </p:style>
+        <p:txBody>
+          <a:bodyPr rtlCol="0" anchor="ctr"/>
+          <a:lstStyle/>
+          <a:p>
+            <a:pPr algn="ctr"/>
+          </a:p>
+        </p:txBody>
+      </p:sp>
+      <p:sp>
+        <p:nvSpPr>
+          <p:cNvPr id="4" name="Rectangle 3"/>
+          <p:cNvSpPr/>
+          <p:nvPr/>
+        </p:nvSpPr>
+        <p:spPr>
+          <a:xfrm>
+            <a:off x="0" y="0"/>
+            <a:ext cx="164592" cy="6858000"/>
+          </a:xfrm>
+          <a:prstGeom prst="rect">
+            <a:avLst/>
+          </a:prstGeom>
+          <a:solidFill>
+            <a:srgbClr val="00B4D8"/>
+          </a:solidFill>
+          <a:ln>
+            <a:solidFill>
+              <a:srgbClr val="00B4D8"/>
+            </a:solidFill>
+          </a:ln>
+        </p:spPr>
+        <p:style>
+          <a:lnRef idx="1">
+            <a:schemeClr val="accent1"/>
+          </a:lnRef>
+          <a:fillRef idx="3">
+            <a:schemeClr val="accent1"/>
+          </a:fillRef>
+          <a:effectRef idx="2">
+            <a:schemeClr val="accent1"/>
+          </a:effectRef>
+          <a:fontRef idx="minor">
+            <a:schemeClr val="lt1"/>
+          </a:fontRef>
+        </p:style>
+        <p:txBody>
+          <a:bodyPr rtlCol="0" anchor="ctr"/>
+          <a:lstStyle/>
+          <a:p>
+            <a:pPr algn="ctr"/>
+          </a:p>
+        </p:txBody>
+      </p:sp>
+      <p:sp>
+        <p:nvSpPr>
+          <p:cNvPr id="5" name="TextBox 4"/>
           <p:cNvSpPr txBox="1"/>
           <p:nvPr/>
         </p:nvSpPr>
         <p:spPr>
           <a:xfrm>
-            <a:off x="457200" y="109728"/>
-            <a:ext cx="10972800" cy="685800"/>
+            <a:off x="457200" y="548640"/>
+            <a:ext cx="10972800" cy="914400"/>
           </a:xfrm>
           <a:prstGeom prst="rect">
             <a:avLst/>
@@ -5947,7 +5921,7 @@
           <a:lstStyle/>
           <a:p>
             <a:pPr algn="l">
-              <a:defRPr sz="2600" b="1">
+              <a:defRPr sz="3800" b="1">
                 <a:solidFill>
                   <a:srgbClr val="FFFFFF"/>
                 </a:solidFill>
@@ -5955,81 +5929,31 @@
               </a:defRPr>
             </a:pPr>
             <a:r>
-              <a:t>14  Estratégia de Deploy</a:t>
-            </a:r>
-          </a:p>
-        </p:txBody>
-      </p:sp>
-      <p:pic>
-        <p:nvPicPr>
-          <p:cNvPr id="4" name="Picture 3" descr="deploy_architecture.png"/>
-          <p:cNvPicPr>
-            <a:picLocks noChangeAspect="1"/>
-          </p:cNvPicPr>
-          <p:nvPr/>
-        </p:nvPicPr>
-        <p:blipFill>
-          <a:blip r:embed="rId2"/>
-          <a:stretch>
-            <a:fillRect/>
-          </a:stretch>
-        </p:blipFill>
-        <p:spPr>
-          <a:xfrm>
-            <a:off x="274320" y="1005840"/>
-            <a:ext cx="11612880" cy="5577840"/>
-          </a:xfrm>
-          <a:prstGeom prst="rect">
-            <a:avLst/>
-          </a:prstGeom>
-        </p:spPr>
-      </p:pic>
-    </p:spTree>
-  </p:cSld>
-  <p:clrMapOvr>
-    <a:masterClrMapping/>
-  </p:clrMapOvr>
-</p:sld>
-</file>
-
-<file path=ppt/slides/slide18.xml><?xml version="1.0" encoding="utf-8"?>
-<p:sld xmlns:a="http://schemas.openxmlformats.org/drawingml/2006/main" xmlns:p="http://schemas.openxmlformats.org/presentationml/2006/main" xmlns:r="http://schemas.openxmlformats.org/officeDocument/2006/relationships">
-  <p:cSld>
-    <p:bg>
-      <p:bgPr>
-        <a:solidFill>
-          <a:srgbClr val="F4F8FB"/>
-        </a:solidFill>
-        <a:effectLst/>
-      </p:bgPr>
-    </p:bg>
-    <p:spTree>
-      <p:nvGrpSpPr>
-        <p:cNvPr id="1" name=""/>
-        <p:cNvGrpSpPr/>
-        <p:nvPr/>
-      </p:nvGrpSpPr>
-      <p:grpSpPr/>
-      <p:sp>
-        <p:nvSpPr>
-          <p:cNvPr id="2" name="Rectangle 1"/>
+              <a:t>Conclusao</a:t>
+            </a:r>
+          </a:p>
+        </p:txBody>
+      </p:sp>
+      <p:sp>
+        <p:nvSpPr>
+          <p:cNvPr id="6" name="Rectangle 5"/>
           <p:cNvSpPr/>
           <p:nvPr/>
         </p:nvSpPr>
         <p:spPr>
           <a:xfrm>
-            <a:off x="0" y="0"/>
-            <a:ext cx="12191695" cy="960120"/>
+            <a:off x="457200" y="1645920"/>
+            <a:ext cx="3474720" cy="3200400"/>
           </a:xfrm>
           <a:prstGeom prst="rect">
             <a:avLst/>
           </a:prstGeom>
           <a:solidFill>
-            <a:srgbClr val="0D1B2A"/>
+            <a:srgbClr val="1C3A52"/>
           </a:solidFill>
           <a:ln>
             <a:solidFill>
-              <a:srgbClr val="0D1B2A"/>
+              <a:srgbClr val="1C7293"/>
             </a:solidFill>
           </a:ln>
         </p:spPr>
@@ -6057,84 +5981,24 @@
       </p:sp>
       <p:sp>
         <p:nvSpPr>
-          <p:cNvPr id="3" name="TextBox 2"/>
-          <p:cNvSpPr txBox="1"/>
-          <p:nvPr/>
-        </p:nvSpPr>
-        <p:spPr>
-          <a:xfrm>
-            <a:off x="457200" y="109728"/>
-            <a:ext cx="10972800" cy="685800"/>
-          </a:xfrm>
-          <a:prstGeom prst="rect">
-            <a:avLst/>
-          </a:prstGeom>
-          <a:noFill/>
-        </p:spPr>
-        <p:txBody>
-          <a:bodyPr wrap="square">
-            <a:spAutoFit/>
-          </a:bodyPr>
-          <a:lstStyle/>
-          <a:p>
-            <a:pPr algn="l">
-              <a:defRPr sz="2600" b="1">
-                <a:solidFill>
-                  <a:srgbClr val="FFFFFF"/>
-                </a:solidFill>
-                <a:latin typeface="Arial"/>
-              </a:defRPr>
-            </a:pPr>
-            <a:r>
-              <a:t>15  Aprendizado Contínuo</a:t>
-            </a:r>
-          </a:p>
-        </p:txBody>
-      </p:sp>
-      <p:pic>
-        <p:nvPicPr>
-          <p:cNvPr id="4" name="Picture 3" descr="continuous_learning.png"/>
-          <p:cNvPicPr>
-            <a:picLocks noChangeAspect="1"/>
-          </p:cNvPicPr>
-          <p:nvPr/>
-        </p:nvPicPr>
-        <p:blipFill>
-          <a:blip r:embed="rId2"/>
-          <a:stretch>
-            <a:fillRect/>
-          </a:stretch>
-        </p:blipFill>
-        <p:spPr>
-          <a:xfrm>
-            <a:off x="274320" y="1005840"/>
-            <a:ext cx="11612880" cy="4114800"/>
-          </a:xfrm>
-          <a:prstGeom prst="rect">
-            <a:avLst/>
-          </a:prstGeom>
-        </p:spPr>
-      </p:pic>
-      <p:sp>
-        <p:nvSpPr>
-          <p:cNvPr id="5" name="Rectangle 4"/>
+          <p:cNvPr id="7" name="Rectangle 6"/>
           <p:cNvSpPr/>
           <p:nvPr/>
         </p:nvSpPr>
         <p:spPr>
           <a:xfrm>
-            <a:off x="365760" y="5303520"/>
-            <a:ext cx="3657600" cy="1371600"/>
+            <a:off x="4206240" y="1645920"/>
+            <a:ext cx="3474720" cy="3200400"/>
           </a:xfrm>
           <a:prstGeom prst="rect">
             <a:avLst/>
           </a:prstGeom>
           <a:solidFill>
-            <a:srgbClr val="1A5276"/>
+            <a:srgbClr val="1C3A52"/>
           </a:solidFill>
           <a:ln>
             <a:solidFill>
-              <a:srgbClr val="1A5276"/>
+              <a:srgbClr val="1C7293"/>
             </a:solidFill>
           </a:ln>
         </p:spPr>
@@ -6162,24 +6026,24 @@
       </p:sp>
       <p:sp>
         <p:nvSpPr>
-          <p:cNvPr id="6" name="Rectangle 5"/>
+          <p:cNvPr id="8" name="Rectangle 7"/>
           <p:cNvSpPr/>
           <p:nvPr/>
         </p:nvSpPr>
         <p:spPr>
           <a:xfrm>
-            <a:off x="4297680" y="5303520"/>
-            <a:ext cx="3657600" cy="1371600"/>
+            <a:off x="7955279" y="1645920"/>
+            <a:ext cx="3931920" cy="3200400"/>
           </a:xfrm>
           <a:prstGeom prst="rect">
             <a:avLst/>
           </a:prstGeom>
           <a:solidFill>
-            <a:srgbClr val="1A5276"/>
+            <a:srgbClr val="1C3A52"/>
           </a:solidFill>
           <a:ln>
             <a:solidFill>
-              <a:srgbClr val="1A5276"/>
+              <a:srgbClr val="1C7293"/>
             </a:solidFill>
           </a:ln>
         </p:spPr>
@@ -6207,59 +6071,50 @@
       </p:sp>
       <p:sp>
         <p:nvSpPr>
-          <p:cNvPr id="7" name="Rectangle 6"/>
-          <p:cNvSpPr/>
-          <p:nvPr/>
-        </p:nvSpPr>
-        <p:spPr>
-          <a:xfrm>
-            <a:off x="8229600" y="5303520"/>
-            <a:ext cx="3657600" cy="1371600"/>
-          </a:xfrm>
-          <a:prstGeom prst="rect">
-            <a:avLst/>
-          </a:prstGeom>
-          <a:solidFill>
-            <a:srgbClr val="1A5276"/>
-          </a:solidFill>
-          <a:ln>
-            <a:solidFill>
-              <a:srgbClr val="1A5276"/>
-            </a:solidFill>
-          </a:ln>
-        </p:spPr>
-        <p:style>
-          <a:lnRef idx="1">
-            <a:schemeClr val="accent1"/>
-          </a:lnRef>
-          <a:fillRef idx="3">
-            <a:schemeClr val="accent1"/>
-          </a:fillRef>
-          <a:effectRef idx="2">
-            <a:schemeClr val="accent1"/>
-          </a:effectRef>
-          <a:fontRef idx="minor">
-            <a:schemeClr val="lt1"/>
-          </a:fontRef>
-        </p:style>
-        <p:txBody>
-          <a:bodyPr rtlCol="0" anchor="ctr"/>
-          <a:lstStyle/>
-          <a:p>
-            <a:pPr algn="ctr"/>
-          </a:p>
-        </p:txBody>
-      </p:sp>
-      <p:sp>
-        <p:nvSpPr>
-          <p:cNvPr id="8" name="TextBox 7"/>
+          <p:cNvPr id="9" name="TextBox 8"/>
           <p:cNvSpPr txBox="1"/>
           <p:nvPr/>
         </p:nvSpPr>
         <p:spPr>
           <a:xfrm>
-            <a:off x="365760" y="5303520"/>
-            <a:ext cx="3657600" cy="1371600"/>
+            <a:off x="457200" y="1645920"/>
+            <a:ext cx="3474720" cy="731520"/>
+          </a:xfrm>
+          <a:prstGeom prst="rect">
+            <a:avLst/>
+          </a:prstGeom>
+          <a:noFill/>
+        </p:spPr>
+        <p:txBody>
+          <a:bodyPr wrap="square">
+            <a:spAutoFit/>
+          </a:bodyPr>
+          <a:lstStyle/>
+          <a:p>
+            <a:pPr algn="ctr">
+              <a:defRPr sz="1300" b="1">
+                <a:solidFill>
+                  <a:srgbClr val="90E0EF"/>
+                </a:solidFill>
+                <a:latin typeface="Arial"/>
+              </a:defRPr>
+            </a:pPr>
+            <a:r>
+              <a:t>Dados Explorados</a:t>
+            </a:r>
+          </a:p>
+        </p:txBody>
+      </p:sp>
+      <p:sp>
+        <p:nvSpPr>
+          <p:cNvPr id="10" name="TextBox 9"/>
+          <p:cNvSpPr txBox="1"/>
+          <p:nvPr/>
+        </p:nvSpPr>
+        <p:spPr>
+          <a:xfrm>
+            <a:off x="457200" y="2468880"/>
+            <a:ext cx="3474720" cy="2194560"/>
           </a:xfrm>
           <a:prstGeom prst="rect">
             <a:avLst/>
@@ -6281,25 +6136,69 @@
               </a:defRPr>
             </a:pPr>
             <a:r>
-              <a:t>Data Drift</a:t>
-            </a:r>
-            <a:br/>
-            <a:r>
-              <a:t>KS-test p &lt; 0.05</a:t>
-            </a:r>
-          </a:p>
-        </p:txBody>
-      </p:sp>
-      <p:sp>
-        <p:nvSpPr>
-          <p:cNvPr id="9" name="TextBox 8"/>
+              <a:t>21.613 imoveis</a:t>
+            </a:r>
+            <a:br/>
+            <a:r>
+              <a:t>70 zipcodes</a:t>
+            </a:r>
+            <a:br/>
+            <a:r>
+              <a:t>47 features</a:t>
+            </a:r>
+            <a:br/>
+            <a:r>
+              <a:t>0 nulos</a:t>
+            </a:r>
+          </a:p>
+        </p:txBody>
+      </p:sp>
+      <p:sp>
+        <p:nvSpPr>
+          <p:cNvPr id="11" name="TextBox 10"/>
           <p:cNvSpPr txBox="1"/>
           <p:nvPr/>
         </p:nvSpPr>
         <p:spPr>
           <a:xfrm>
-            <a:off x="4297680" y="5303520"/>
-            <a:ext cx="3657600" cy="1371600"/>
+            <a:off x="4206240" y="1645920"/>
+            <a:ext cx="3474720" cy="731520"/>
+          </a:xfrm>
+          <a:prstGeom prst="rect">
+            <a:avLst/>
+          </a:prstGeom>
+          <a:noFill/>
+        </p:spPr>
+        <p:txBody>
+          <a:bodyPr wrap="square">
+            <a:spAutoFit/>
+          </a:bodyPr>
+          <a:lstStyle/>
+          <a:p>
+            <a:pPr algn="ctr">
+              <a:defRPr sz="1300" b="1">
+                <a:solidFill>
+                  <a:srgbClr val="90E0EF"/>
+                </a:solidFill>
+                <a:latin typeface="Arial"/>
+              </a:defRPr>
+            </a:pPr>
+            <a:r>
+              <a:t>Modelo XGBoost</a:t>
+            </a:r>
+          </a:p>
+        </p:txBody>
+      </p:sp>
+      <p:sp>
+        <p:nvSpPr>
+          <p:cNvPr id="12" name="TextBox 11"/>
+          <p:cNvSpPr txBox="1"/>
+          <p:nvPr/>
+        </p:nvSpPr>
+        <p:spPr>
+          <a:xfrm>
+            <a:off x="4206240" y="2468880"/>
+            <a:ext cx="3474720" cy="2194560"/>
           </a:xfrm>
           <a:prstGeom prst="rect">
             <a:avLst/>
@@ -6321,25 +6220,69 @@
               </a:defRPr>
             </a:pPr>
             <a:r>
-              <a:t>Degradação</a:t>
-            </a:r>
-            <a:br/>
-            <a:r>
-              <a:t>MAE &gt; threshold</a:t>
-            </a:r>
-          </a:p>
-        </p:txBody>
-      </p:sp>
-      <p:sp>
-        <p:nvSpPr>
-          <p:cNvPr id="10" name="TextBox 9"/>
+              <a:t>R2 = 0.9138</a:t>
+            </a:r>
+            <a:br/>
+            <a:r>
+              <a:t>MAE = </a:t>
+            </a:r>
+            <a:br/>
+            <a:r>
+              <a:t>MAPE = 11.6%</a:t>
+            </a:r>
+            <a:br/>
+            <a:r>
+              <a:t>5-Fold CV</a:t>
+            </a:r>
+          </a:p>
+        </p:txBody>
+      </p:sp>
+      <p:sp>
+        <p:nvSpPr>
+          <p:cNvPr id="13" name="TextBox 12"/>
           <p:cNvSpPr txBox="1"/>
           <p:nvPr/>
         </p:nvSpPr>
         <p:spPr>
           <a:xfrm>
-            <a:off x="8229600" y="5303520"/>
-            <a:ext cx="3657600" cy="1371600"/>
+            <a:off x="7955279" y="1645920"/>
+            <a:ext cx="3931920" cy="731520"/>
+          </a:xfrm>
+          <a:prstGeom prst="rect">
+            <a:avLst/>
+          </a:prstGeom>
+          <a:noFill/>
+        </p:spPr>
+        <p:txBody>
+          <a:bodyPr wrap="square">
+            <a:spAutoFit/>
+          </a:bodyPr>
+          <a:lstStyle/>
+          <a:p>
+            <a:pPr algn="ctr">
+              <a:defRPr sz="1300" b="1">
+                <a:solidFill>
+                  <a:srgbClr val="90E0EF"/>
+                </a:solidFill>
+                <a:latin typeface="Arial"/>
+              </a:defRPr>
+            </a:pPr>
+            <a:r>
+              <a:t>Pronto para Producao</a:t>
+            </a:r>
+          </a:p>
+        </p:txBody>
+      </p:sp>
+      <p:sp>
+        <p:nvSpPr>
+          <p:cNvPr id="14" name="TextBox 13"/>
+          <p:cNvSpPr txBox="1"/>
+          <p:nvPr/>
+        </p:nvSpPr>
+        <p:spPr>
+          <a:xfrm>
+            <a:off x="7955279" y="2468880"/>
+            <a:ext cx="3931920" cy="2194560"/>
           </a:xfrm>
           <a:prstGeom prst="rect">
             <a:avLst/>
@@ -6361,96 +6304,33 @@
               </a:defRPr>
             </a:pPr>
             <a:r>
-              <a:t>Volume</a:t>
-            </a:r>
-            <a:br/>
-            <a:r>
-              <a:t>+ 500 novos imóveis</a:t>
-            </a:r>
-          </a:p>
-        </p:txBody>
-      </p:sp>
-    </p:spTree>
-  </p:cSld>
-  <p:clrMapOvr>
-    <a:masterClrMapping/>
-  </p:clrMapOvr>
-</p:sld>
-</file>
-
-<file path=ppt/slides/slide19.xml><?xml version="1.0" encoding="utf-8"?>
-<p:sld xmlns:a="http://schemas.openxmlformats.org/drawingml/2006/main" xmlns:p="http://schemas.openxmlformats.org/presentationml/2006/main" xmlns:r="http://schemas.openxmlformats.org/officeDocument/2006/relationships">
-  <p:cSld>
-    <p:bg>
-      <p:bgPr>
-        <a:solidFill>
-          <a:srgbClr val="F4F8FB"/>
-        </a:solidFill>
-        <a:effectLst/>
-      </p:bgPr>
-    </p:bg>
-    <p:spTree>
-      <p:nvGrpSpPr>
-        <p:cNvPr id="1" name=""/>
-        <p:cNvGrpSpPr/>
-        <p:nvPr/>
-      </p:nvGrpSpPr>
-      <p:grpSpPr/>
-      <p:sp>
-        <p:nvSpPr>
-          <p:cNvPr id="2" name="Rectangle 1"/>
-          <p:cNvSpPr/>
-          <p:nvPr/>
-        </p:nvSpPr>
-        <p:spPr>
-          <a:xfrm>
-            <a:off x="0" y="0"/>
-            <a:ext cx="12191695" cy="960120"/>
-          </a:xfrm>
-          <a:prstGeom prst="rect">
-            <a:avLst/>
-          </a:prstGeom>
-          <a:solidFill>
-            <a:srgbClr val="0D1B2A"/>
-          </a:solidFill>
-          <a:ln>
-            <a:solidFill>
-              <a:srgbClr val="0D1B2A"/>
-            </a:solidFill>
-          </a:ln>
-        </p:spPr>
-        <p:style>
-          <a:lnRef idx="1">
-            <a:schemeClr val="accent1"/>
-          </a:lnRef>
-          <a:fillRef idx="3">
-            <a:schemeClr val="accent1"/>
-          </a:fillRef>
-          <a:effectRef idx="2">
-            <a:schemeClr val="accent1"/>
-          </a:effectRef>
-          <a:fontRef idx="minor">
-            <a:schemeClr val="lt1"/>
-          </a:fontRef>
-        </p:style>
-        <p:txBody>
-          <a:bodyPr rtlCol="0" anchor="ctr"/>
-          <a:lstStyle/>
-          <a:p>
-            <a:pPr algn="ctr"/>
-          </a:p>
-        </p:txBody>
-      </p:sp>
-      <p:sp>
-        <p:nvSpPr>
-          <p:cNvPr id="3" name="TextBox 2"/>
+              <a:t>API FastAPI</a:t>
+            </a:r>
+            <a:br/>
+            <a:r>
+              <a:t>MLflow Registry</a:t>
+            </a:r>
+            <a:br/>
+            <a:r>
+              <a:t>Monitoramento</a:t>
+            </a:r>
+            <a:br/>
+            <a:r>
+              <a:t>Retraining auto</a:t>
+            </a:r>
+          </a:p>
+        </p:txBody>
+      </p:sp>
+      <p:sp>
+        <p:nvSpPr>
+          <p:cNvPr id="15" name="TextBox 14"/>
           <p:cNvSpPr txBox="1"/>
           <p:nvPr/>
         </p:nvSpPr>
         <p:spPr>
           <a:xfrm>
-            <a:off x="457200" y="109728"/>
-            <a:ext cx="10972800" cy="685800"/>
+            <a:off x="457200" y="5577840"/>
+            <a:ext cx="10972800" cy="548640"/>
           </a:xfrm>
           <a:prstGeom prst="rect">
             <a:avLst/>
@@ -6463,8 +6343,8 @@
           </a:bodyPr>
           <a:lstStyle/>
           <a:p>
-            <a:pPr algn="l">
-              <a:defRPr sz="2600" b="1">
+            <a:pPr algn="ctr">
+              <a:defRPr sz="1400" b="1">
                 <a:solidFill>
                   <a:srgbClr val="FFFFFF"/>
                 </a:solidFill>
@@ -6472,111 +6352,21 @@
               </a:defRPr>
             </a:pPr>
             <a:r>
-              <a:t>16  Comunicação com Stakeholders</a:t>
-            </a:r>
-          </a:p>
-        </p:txBody>
-      </p:sp>
-      <p:sp>
-        <p:nvSpPr>
-          <p:cNvPr id="4" name="Rectangle 3"/>
-          <p:cNvSpPr/>
-          <p:nvPr/>
-        </p:nvSpPr>
-        <p:spPr>
-          <a:xfrm>
-            <a:off x="365760" y="1097280"/>
-            <a:ext cx="5394960" cy="5166360"/>
-          </a:xfrm>
-          <a:prstGeom prst="rect">
-            <a:avLst/>
-          </a:prstGeom>
-          <a:solidFill>
-            <a:srgbClr val="E8F4F8"/>
-          </a:solidFill>
-          <a:ln>
-            <a:solidFill>
-              <a:srgbClr val="1C7293"/>
-            </a:solidFill>
-          </a:ln>
-        </p:spPr>
-        <p:style>
-          <a:lnRef idx="1">
-            <a:schemeClr val="accent1"/>
-          </a:lnRef>
-          <a:fillRef idx="3">
-            <a:schemeClr val="accent1"/>
-          </a:fillRef>
-          <a:effectRef idx="2">
-            <a:schemeClr val="accent1"/>
-          </a:effectRef>
-          <a:fontRef idx="minor">
-            <a:schemeClr val="lt1"/>
-          </a:fontRef>
-        </p:style>
-        <p:txBody>
-          <a:bodyPr rtlCol="0" anchor="ctr"/>
-          <a:lstStyle/>
-          <a:p>
-            <a:pPr algn="ctr"/>
-          </a:p>
-        </p:txBody>
-      </p:sp>
-      <p:sp>
-        <p:nvSpPr>
-          <p:cNvPr id="5" name="Rectangle 4"/>
-          <p:cNvSpPr/>
-          <p:nvPr/>
-        </p:nvSpPr>
-        <p:spPr>
-          <a:xfrm>
-            <a:off x="6035040" y="1097280"/>
-            <a:ext cx="5852160" cy="5166360"/>
-          </a:xfrm>
-          <a:prstGeom prst="rect">
-            <a:avLst/>
-          </a:prstGeom>
-          <a:solidFill>
-            <a:srgbClr val="FFF8E1"/>
-          </a:solidFill>
-          <a:ln>
-            <a:solidFill>
-              <a:srgbClr val="F9A825"/>
-            </a:solidFill>
-          </a:ln>
-        </p:spPr>
-        <p:style>
-          <a:lnRef idx="1">
-            <a:schemeClr val="accent1"/>
-          </a:lnRef>
-          <a:fillRef idx="3">
-            <a:schemeClr val="accent1"/>
-          </a:fillRef>
-          <a:effectRef idx="2">
-            <a:schemeClr val="accent1"/>
-          </a:effectRef>
-          <a:fontRef idx="minor">
-            <a:schemeClr val="lt1"/>
-          </a:fontRef>
-        </p:style>
-        <p:txBody>
-          <a:bodyPr rtlCol="0" anchor="ctr"/>
-          <a:lstStyle/>
-          <a:p>
-            <a:pPr algn="ctr"/>
-          </a:p>
-        </p:txBody>
-      </p:sp>
-      <p:sp>
-        <p:nvSpPr>
-          <p:cNvPr id="6" name="TextBox 5"/>
+              <a:t>github.com/rogerestatistico/HOUSE_PRICE_PREDICTION</a:t>
+            </a:r>
+          </a:p>
+        </p:txBody>
+      </p:sp>
+      <p:sp>
+        <p:nvSpPr>
+          <p:cNvPr id="16" name="TextBox 15"/>
           <p:cNvSpPr txBox="1"/>
           <p:nvPr/>
         </p:nvSpPr>
         <p:spPr>
           <a:xfrm>
-            <a:off x="548640" y="1234440"/>
-            <a:ext cx="5029200" cy="457200"/>
+            <a:off x="457200" y="6172200"/>
+            <a:ext cx="10972800" cy="457200"/>
           </a:xfrm>
           <a:prstGeom prst="rect">
             <a:avLst/>
@@ -6589,222 +6379,16 @@
           </a:bodyPr>
           <a:lstStyle/>
           <a:p>
-            <a:pPr algn="l">
-              <a:defRPr sz="1300" b="1">
+            <a:pPr algn="ctr">
+              <a:defRPr sz="1300" b="0">
                 <a:solidFill>
-                  <a:srgbClr val="1C7293"/>
+                  <a:srgbClr val="ADE8F4"/>
                 </a:solidFill>
                 <a:latin typeface="Arial"/>
               </a:defRPr>
             </a:pPr>
             <a:r>
-              <a:t>Tradução das métricas:</a:t>
-            </a:r>
-          </a:p>
-        </p:txBody>
-      </p:sp>
-      <p:sp>
-        <p:nvSpPr>
-          <p:cNvPr id="7" name="TextBox 6"/>
-          <p:cNvSpPr txBox="1"/>
-          <p:nvPr/>
-        </p:nvSpPr>
-        <p:spPr>
-          <a:xfrm>
-            <a:off x="548640" y="1783080"/>
-            <a:ext cx="5029200" cy="4206240"/>
-          </a:xfrm>
-          <a:prstGeom prst="rect">
-            <a:avLst/>
-          </a:prstGeom>
-          <a:noFill/>
-        </p:spPr>
-        <p:txBody>
-          <a:bodyPr wrap="square">
-            <a:spAutoFit/>
-          </a:bodyPr>
-          <a:lstStyle/>
-          <a:p>
-            <a:pPr algn="l">
-              <a:defRPr sz="1250" b="0">
-                <a:solidFill>
-                  <a:srgbClr val="0D1B2A"/>
-                </a:solidFill>
-                <a:latin typeface="Arial"/>
-              </a:defRPr>
-            </a:pPr>
-            <a:r>
-              <a:t>R² = 0.91</a:t>
-            </a:r>
-            <a:br/>
-            <a:r>
-              <a:t>→ O modelo explica 91% da</a:t>
-            </a:r>
-            <a:br/>
-            <a:r>
-              <a:t>   variação dos preços</a:t>
-            </a:r>
-            <a:br/>
-            <a:br/>
-            <a:r>
-              <a:t>MAE = $63.127</a:t>
-            </a:r>
-            <a:br/>
-            <a:r>
-              <a:t>→ Em média, erra $63k</a:t>
-            </a:r>
-            <a:br/>
-            <a:r>
-              <a:t>   na avaliação</a:t>
-            </a:r>
-            <a:br/>
-            <a:br/>
-            <a:r>
-              <a:t>MAPE = 11.6%</a:t>
-            </a:r>
-            <a:br/>
-            <a:r>
-              <a:t>→ Erro percentual de ~12%</a:t>
-            </a:r>
-            <a:br/>
-            <a:r>
-              <a:t>   (aceitável para o setor)</a:t>
-            </a:r>
-            <a:br/>
-            <a:br/>
-            <a:r>
-              <a:t>ERRO por faixa:</a:t>
-            </a:r>
-            <a:br/>
-            <a:r>
-              <a:t>→ Imóveis até 700k: &lt; 10%</a:t>
-            </a:r>
-            <a:br/>
-            <a:r>
-              <a:t>→ Imóveis &gt; 1M: ~15-18%</a:t>
-            </a:r>
-          </a:p>
-        </p:txBody>
-      </p:sp>
-      <p:sp>
-        <p:nvSpPr>
-          <p:cNvPr id="8" name="TextBox 7"/>
-          <p:cNvSpPr txBox="1"/>
-          <p:nvPr/>
-        </p:nvSpPr>
-        <p:spPr>
-          <a:xfrm>
-            <a:off x="6217920" y="1234440"/>
-            <a:ext cx="5486400" cy="457200"/>
-          </a:xfrm>
-          <a:prstGeom prst="rect">
-            <a:avLst/>
-          </a:prstGeom>
-          <a:noFill/>
-        </p:spPr>
-        <p:txBody>
-          <a:bodyPr wrap="square">
-            <a:spAutoFit/>
-          </a:bodyPr>
-          <a:lstStyle/>
-          <a:p>
-            <a:pPr algn="l">
-              <a:defRPr sz="1300" b="1">
-                <a:solidFill>
-                  <a:srgbClr val="E65100"/>
-                </a:solidFill>
-                <a:latin typeface="Arial"/>
-              </a:defRPr>
-            </a:pPr>
-            <a:r>
-              <a:t>Valor para o negócio:</a:t>
-            </a:r>
-          </a:p>
-        </p:txBody>
-      </p:sp>
-      <p:sp>
-        <p:nvSpPr>
-          <p:cNvPr id="9" name="TextBox 8"/>
-          <p:cNvSpPr txBox="1"/>
-          <p:nvPr/>
-        </p:nvSpPr>
-        <p:spPr>
-          <a:xfrm>
-            <a:off x="6217920" y="1783080"/>
-            <a:ext cx="5486400" cy="4206240"/>
-          </a:xfrm>
-          <a:prstGeom prst="rect">
-            <a:avLst/>
-          </a:prstGeom>
-          <a:noFill/>
-        </p:spPr>
-        <p:txBody>
-          <a:bodyPr wrap="square">
-            <a:spAutoFit/>
-          </a:bodyPr>
-          <a:lstStyle/>
-          <a:p>
-            <a:pPr algn="l">
-              <a:defRPr sz="1250" b="0">
-                <a:solidFill>
-                  <a:srgbClr val="0D1B2A"/>
-                </a:solidFill>
-                <a:latin typeface="Arial"/>
-              </a:defRPr>
-            </a:pPr>
-            <a:r>
-              <a:t>Velocidade</a:t>
-            </a:r>
-            <a:br/>
-            <a:r>
-              <a:t>Avaliação em segundos</a:t>
-            </a:r>
-            <a:br/>
-            <a:r>
-              <a:t>vs. 2–3 dias com corretor</a:t>
-            </a:r>
-            <a:br/>
-            <a:br/>
-            <a:r>
-              <a:t>Consistência</a:t>
-            </a:r>
-            <a:br/>
-            <a:r>
-              <a:t>Elimina variação subjetiva</a:t>
-            </a:r>
-            <a:br/>
-            <a:r>
-              <a:t>entre avaliadores</a:t>
-            </a:r>
-            <a:br/>
-            <a:br/>
-            <a:r>
-              <a:t>Escala</a:t>
-            </a:r>
-            <a:br/>
-            <a:r>
-              <a:t>Centenas de avaliações</a:t>
-            </a:r>
-            <a:br/>
-            <a:r>
-              <a:t>por minuto via API</a:t>
-            </a:r>
-            <a:br/>
-            <a:br/>
-            <a:r>
-              <a:t>Confiança</a:t>
-            </a:r>
-            <a:br/>
-            <a:r>
-              <a:t>91% de explicabilidade</a:t>
-            </a:r>
-            <a:br/>
-            <a:r>
-              <a:t>transmite credibilidade</a:t>
-            </a:r>
-            <a:br/>
-            <a:r>
-              <a:t>ao cliente e à equipe</a:t>
+              <a:t>Obrigado!</a:t>
             </a:r>
           </a:p>
         </p:txBody>
@@ -6882,407 +6466,14 @@
       </p:sp>
       <p:sp>
         <p:nvSpPr>
-          <p:cNvPr id="3" name="TextBox 2"/>
-          <p:cNvSpPr txBox="1"/>
-          <p:nvPr/>
-        </p:nvSpPr>
-        <p:spPr>
-          <a:xfrm>
-            <a:off x="457200" y="109728"/>
-            <a:ext cx="10972800" cy="685800"/>
-          </a:xfrm>
-          <a:prstGeom prst="rect">
-            <a:avLst/>
-          </a:prstGeom>
-          <a:noFill/>
-        </p:spPr>
-        <p:txBody>
-          <a:bodyPr wrap="square">
-            <a:spAutoFit/>
-          </a:bodyPr>
-          <a:lstStyle/>
-          <a:p>
-            <a:pPr algn="l">
-              <a:defRPr sz="2800" b="1">
-                <a:solidFill>
-                  <a:srgbClr val="FFFFFF"/>
-                </a:solidFill>
-                <a:latin typeface="Arial"/>
-              </a:defRPr>
-            </a:pPr>
-            <a:r>
-              <a:t>Agenda</a:t>
-            </a:r>
-          </a:p>
-        </p:txBody>
-      </p:sp>
-      <p:sp>
-        <p:nvSpPr>
-          <p:cNvPr id="4" name="Rectangle 3"/>
-          <p:cNvSpPr/>
-          <p:nvPr/>
-        </p:nvSpPr>
-        <p:spPr>
-          <a:xfrm>
-            <a:off x="457200" y="1188720"/>
-            <a:ext cx="5303520" cy="5120640"/>
-          </a:xfrm>
-          <a:prstGeom prst="rect">
-            <a:avLst/>
-          </a:prstGeom>
-          <a:solidFill>
-            <a:srgbClr val="E8F4F8"/>
-          </a:solidFill>
-          <a:ln>
-            <a:solidFill>
-              <a:srgbClr val="BDD7E7"/>
-            </a:solidFill>
-          </a:ln>
-        </p:spPr>
-        <p:style>
-          <a:lnRef idx="1">
-            <a:schemeClr val="accent1"/>
-          </a:lnRef>
-          <a:fillRef idx="3">
-            <a:schemeClr val="accent1"/>
-          </a:fillRef>
-          <a:effectRef idx="2">
-            <a:schemeClr val="accent1"/>
-          </a:effectRef>
-          <a:fontRef idx="minor">
-            <a:schemeClr val="lt1"/>
-          </a:fontRef>
-        </p:style>
-        <p:txBody>
-          <a:bodyPr rtlCol="0" anchor="ctr"/>
-          <a:lstStyle/>
-          <a:p>
-            <a:pPr algn="ctr"/>
-          </a:p>
-        </p:txBody>
-      </p:sp>
-      <p:sp>
-        <p:nvSpPr>
-          <p:cNvPr id="5" name="Rectangle 4"/>
-          <p:cNvSpPr/>
-          <p:nvPr/>
-        </p:nvSpPr>
-        <p:spPr>
-          <a:xfrm>
-            <a:off x="6400800" y="1188720"/>
-            <a:ext cx="5303520" cy="5120640"/>
-          </a:xfrm>
-          <a:prstGeom prst="rect">
-            <a:avLst/>
-          </a:prstGeom>
-          <a:solidFill>
-            <a:srgbClr val="E8F4F8"/>
-          </a:solidFill>
-          <a:ln>
-            <a:solidFill>
-              <a:srgbClr val="BDD7E7"/>
-            </a:solidFill>
-          </a:ln>
-        </p:spPr>
-        <p:style>
-          <a:lnRef idx="1">
-            <a:schemeClr val="accent1"/>
-          </a:lnRef>
-          <a:fillRef idx="3">
-            <a:schemeClr val="accent1"/>
-          </a:fillRef>
-          <a:effectRef idx="2">
-            <a:schemeClr val="accent1"/>
-          </a:effectRef>
-          <a:fontRef idx="minor">
-            <a:schemeClr val="lt1"/>
-          </a:fontRef>
-        </p:style>
-        <p:txBody>
-          <a:bodyPr rtlCol="0" anchor="ctr"/>
-          <a:lstStyle/>
-          <a:p>
-            <a:pPr algn="ctr"/>
-          </a:p>
-        </p:txBody>
-      </p:sp>
-      <p:sp>
-        <p:nvSpPr>
-          <p:cNvPr id="6" name="TextBox 5"/>
-          <p:cNvSpPr txBox="1"/>
-          <p:nvPr/>
-        </p:nvSpPr>
-        <p:spPr>
-          <a:xfrm>
-            <a:off x="640080" y="1325880"/>
-            <a:ext cx="4937760" cy="457200"/>
-          </a:xfrm>
-          <a:prstGeom prst="rect">
-            <a:avLst/>
-          </a:prstGeom>
-          <a:noFill/>
-        </p:spPr>
-        <p:txBody>
-          <a:bodyPr wrap="square">
-            <a:spAutoFit/>
-          </a:bodyPr>
-          <a:lstStyle/>
-          <a:p>
-            <a:pPr algn="l">
-              <a:defRPr sz="1300" b="1">
-                <a:solidFill>
-                  <a:srgbClr val="1C7293"/>
-                </a:solidFill>
-                <a:latin typeface="Arial"/>
-              </a:defRPr>
-            </a:pPr>
-            <a:r>
-              <a:t>PARTE 1 — DADOS &amp; EDA</a:t>
-            </a:r>
-          </a:p>
-        </p:txBody>
-      </p:sp>
-      <p:sp>
-        <p:nvSpPr>
-          <p:cNvPr id="7" name="TextBox 6"/>
-          <p:cNvSpPr txBox="1"/>
-          <p:nvPr/>
-        </p:nvSpPr>
-        <p:spPr>
-          <a:xfrm>
-            <a:off x="640080" y="1874519"/>
-            <a:ext cx="4937760" cy="4206240"/>
-          </a:xfrm>
-          <a:prstGeom prst="rect">
-            <a:avLst/>
-          </a:prstGeom>
-          <a:noFill/>
-        </p:spPr>
-        <p:txBody>
-          <a:bodyPr wrap="square">
-            <a:spAutoFit/>
-          </a:bodyPr>
-          <a:lstStyle/>
-          <a:p>
-            <a:pPr algn="l">
-              <a:defRPr sz="1400" b="0">
-                <a:solidFill>
-                  <a:srgbClr val="0D1B2A"/>
-                </a:solidFill>
-                <a:latin typeface="Arial"/>
-              </a:defRPr>
-            </a:pPr>
-            <a:r>
-              <a:t>01  Entendimento dos Dados</a:t>
-            </a:r>
-            <a:br/>
-            <a:r>
-              <a:t>02  Distribuição de Preços</a:t>
-            </a:r>
-            <a:br/>
-            <a:r>
-              <a:t>03  Correlações &amp; Heatmap</a:t>
-            </a:r>
-            <a:br/>
-            <a:r>
-              <a:t>04  Área, Grade e Outliers</a:t>
-            </a:r>
-            <a:br/>
-            <a:r>
-              <a:t>05  Localização &amp; Zipcode</a:t>
-            </a:r>
-            <a:br/>
-            <a:r>
-              <a:t>06  Dados Demográficos</a:t>
-            </a:r>
-            <a:br/>
-            <a:r>
-              <a:t>07  Sazonalidade Temporal</a:t>
-            </a:r>
-          </a:p>
-        </p:txBody>
-      </p:sp>
-      <p:sp>
-        <p:nvSpPr>
-          <p:cNvPr id="8" name="TextBox 7"/>
-          <p:cNvSpPr txBox="1"/>
-          <p:nvPr/>
-        </p:nvSpPr>
-        <p:spPr>
-          <a:xfrm>
-            <a:off x="6583680" y="1325880"/>
-            <a:ext cx="4937760" cy="457200"/>
-          </a:xfrm>
-          <a:prstGeom prst="rect">
-            <a:avLst/>
-          </a:prstGeom>
-          <a:noFill/>
-        </p:spPr>
-        <p:txBody>
-          <a:bodyPr wrap="square">
-            <a:spAutoFit/>
-          </a:bodyPr>
-          <a:lstStyle/>
-          <a:p>
-            <a:pPr algn="l">
-              <a:defRPr sz="1300" b="1">
-                <a:solidFill>
-                  <a:srgbClr val="1C7293"/>
-                </a:solidFill>
-                <a:latin typeface="Arial"/>
-              </a:defRPr>
-            </a:pPr>
-            <a:r>
-              <a:t>PARTE 2 — MODELO &amp; DEPLOY</a:t>
-            </a:r>
-          </a:p>
-        </p:txBody>
-      </p:sp>
-      <p:sp>
-        <p:nvSpPr>
-          <p:cNvPr id="9" name="TextBox 8"/>
-          <p:cNvSpPr txBox="1"/>
-          <p:nvPr/>
-        </p:nvSpPr>
-        <p:spPr>
-          <a:xfrm>
-            <a:off x="6583680" y="1874519"/>
-            <a:ext cx="4937760" cy="4206240"/>
-          </a:xfrm>
-          <a:prstGeom prst="rect">
-            <a:avLst/>
-          </a:prstGeom>
-          <a:noFill/>
-        </p:spPr>
-        <p:txBody>
-          <a:bodyPr wrap="square">
-            <a:spAutoFit/>
-          </a:bodyPr>
-          <a:lstStyle/>
-          <a:p>
-            <a:pPr algn="l">
-              <a:defRPr sz="1400" b="0">
-                <a:solidFill>
-                  <a:srgbClr val="0D1B2A"/>
-                </a:solidFill>
-                <a:latin typeface="Arial"/>
-              </a:defRPr>
-            </a:pPr>
-            <a:r>
-              <a:t>08  Feature Engineering</a:t>
-            </a:r>
-            <a:br/>
-            <a:r>
-              <a:t>09  Comparação de Modelos</a:t>
-            </a:r>
-            <a:br/>
-            <a:r>
-              <a:t>10  XGBoost — Escolha</a:t>
-            </a:r>
-            <a:br/>
-            <a:r>
-              <a:t>11  Importância das Features</a:t>
-            </a:r>
-            <a:br/>
-            <a:r>
-              <a:t>12  Avaliação &amp; Resíduos</a:t>
-            </a:r>
-            <a:br/>
-            <a:r>
-              <a:t>13  Previsões Finais</a:t>
-            </a:r>
-            <a:br/>
-            <a:r>
-              <a:t>14  Deploy &amp; Aprendizado Contínuo</a:t>
-            </a:r>
-            <a:br/>
-            <a:r>
-              <a:t>15  Comunicação com Negócio</a:t>
-            </a:r>
-          </a:p>
-        </p:txBody>
-      </p:sp>
-    </p:spTree>
-  </p:cSld>
-  <p:clrMapOvr>
-    <a:masterClrMapping/>
-  </p:clrMapOvr>
-</p:sld>
-</file>
-
-<file path=ppt/slides/slide20.xml><?xml version="1.0" encoding="utf-8"?>
-<p:sld xmlns:a="http://schemas.openxmlformats.org/drawingml/2006/main" xmlns:p="http://schemas.openxmlformats.org/presentationml/2006/main" xmlns:r="http://schemas.openxmlformats.org/officeDocument/2006/relationships">
-  <p:cSld>
-    <p:bg>
-      <p:bgPr>
-        <a:solidFill>
-          <a:srgbClr val="0D1B2A"/>
-        </a:solidFill>
-        <a:effectLst/>
-      </p:bgPr>
-    </p:bg>
-    <p:spTree>
-      <p:nvGrpSpPr>
-        <p:cNvPr id="1" name=""/>
-        <p:cNvGrpSpPr/>
-        <p:nvPr/>
-      </p:nvGrpSpPr>
-      <p:grpSpPr/>
-      <p:sp>
-        <p:nvSpPr>
-          <p:cNvPr id="2" name="Rectangle 1"/>
-          <p:cNvSpPr/>
-          <p:nvPr/>
-        </p:nvSpPr>
-        <p:spPr>
-          <a:xfrm>
-            <a:off x="0" y="0"/>
-            <a:ext cx="12191695" cy="6858000"/>
-          </a:xfrm>
-          <a:prstGeom prst="rect">
-            <a:avLst/>
-          </a:prstGeom>
-          <a:solidFill>
-            <a:srgbClr val="0D1B2A"/>
-          </a:solidFill>
-          <a:ln>
-            <a:solidFill>
-              <a:srgbClr val="0D1B2A"/>
-            </a:solidFill>
-          </a:ln>
-        </p:spPr>
-        <p:style>
-          <a:lnRef idx="1">
-            <a:schemeClr val="accent1"/>
-          </a:lnRef>
-          <a:fillRef idx="3">
-            <a:schemeClr val="accent1"/>
-          </a:fillRef>
-          <a:effectRef idx="2">
-            <a:schemeClr val="accent1"/>
-          </a:effectRef>
-          <a:fontRef idx="minor">
-            <a:schemeClr val="lt1"/>
-          </a:fontRef>
-        </p:style>
-        <p:txBody>
-          <a:bodyPr rtlCol="0" anchor="ctr"/>
-          <a:lstStyle/>
-          <a:p>
-            <a:pPr algn="ctr"/>
-          </a:p>
-        </p:txBody>
-      </p:sp>
-      <p:sp>
-        <p:nvSpPr>
           <p:cNvPr id="3" name="Rectangle 2"/>
           <p:cNvSpPr/>
           <p:nvPr/>
         </p:nvSpPr>
         <p:spPr>
           <a:xfrm>
-            <a:off x="0" y="5394960"/>
-            <a:ext cx="12191695" cy="1463040"/>
+            <a:off x="0" y="0"/>
+            <a:ext cx="164592" cy="6858000"/>
           </a:xfrm>
           <a:prstGeom prst="rect">
             <a:avLst/>
@@ -7320,59 +6511,14 @@
       </p:sp>
       <p:sp>
         <p:nvSpPr>
-          <p:cNvPr id="4" name="Rectangle 3"/>
-          <p:cNvSpPr/>
-          <p:nvPr/>
-        </p:nvSpPr>
-        <p:spPr>
-          <a:xfrm>
-            <a:off x="0" y="0"/>
-            <a:ext cx="164592" cy="6858000"/>
-          </a:xfrm>
-          <a:prstGeom prst="rect">
-            <a:avLst/>
-          </a:prstGeom>
-          <a:solidFill>
-            <a:srgbClr val="00B4D8"/>
-          </a:solidFill>
-          <a:ln>
-            <a:solidFill>
-              <a:srgbClr val="00B4D8"/>
-            </a:solidFill>
-          </a:ln>
-        </p:spPr>
-        <p:style>
-          <a:lnRef idx="1">
-            <a:schemeClr val="accent1"/>
-          </a:lnRef>
-          <a:fillRef idx="3">
-            <a:schemeClr val="accent1"/>
-          </a:fillRef>
-          <a:effectRef idx="2">
-            <a:schemeClr val="accent1"/>
-          </a:effectRef>
-          <a:fontRef idx="minor">
-            <a:schemeClr val="lt1"/>
-          </a:fontRef>
-        </p:style>
-        <p:txBody>
-          <a:bodyPr rtlCol="0" anchor="ctr"/>
-          <a:lstStyle/>
-          <a:p>
-            <a:pPr algn="ctr"/>
-          </a:p>
-        </p:txBody>
-      </p:sp>
-      <p:sp>
-        <p:nvSpPr>
-          <p:cNvPr id="5" name="TextBox 4"/>
+          <p:cNvPr id="4" name="TextBox 3"/>
           <p:cNvSpPr txBox="1"/>
           <p:nvPr/>
         </p:nvSpPr>
         <p:spPr>
           <a:xfrm>
-            <a:off x="457200" y="548640"/>
-            <a:ext cx="10972800" cy="914400"/>
+            <a:off x="411480" y="118872"/>
+            <a:ext cx="11430000" cy="685800"/>
           </a:xfrm>
           <a:prstGeom prst="rect">
             <a:avLst/>
@@ -7386,7 +6532,7 @@
           <a:lstStyle/>
           <a:p>
             <a:pPr algn="l">
-              <a:defRPr sz="3800" b="1">
+              <a:defRPr sz="2400" b="1">
                 <a:solidFill>
                   <a:srgbClr val="FFFFFF"/>
                 </a:solidFill>
@@ -7394,11 +6540,35 @@
               </a:defRPr>
             </a:pPr>
             <a:r>
-              <a:t>Conclusão</a:t>
-            </a:r>
-          </a:p>
-        </p:txBody>
-      </p:sp>
+              <a:t>EDA 01  Media vs Mediana - Distribuicao e Assimetria</a:t>
+            </a:r>
+          </a:p>
+        </p:txBody>
+      </p:sp>
+      <p:pic>
+        <p:nvPicPr>
+          <p:cNvPr id="5" name="Picture 4" descr="eda_a_mean_vs_median.png"/>
+          <p:cNvPicPr>
+            <a:picLocks noChangeAspect="1"/>
+          </p:cNvPicPr>
+          <p:nvPr/>
+        </p:nvPicPr>
+        <p:blipFill>
+          <a:blip r:embed="rId2"/>
+          <a:stretch>
+            <a:fillRect/>
+          </a:stretch>
+        </p:blipFill>
+        <p:spPr>
+          <a:xfrm>
+            <a:off x="274320" y="1005840"/>
+            <a:ext cx="8046720" cy="5577840"/>
+          </a:xfrm>
+          <a:prstGeom prst="rect">
+            <a:avLst/>
+          </a:prstGeom>
+        </p:spPr>
+      </p:pic>
       <p:sp>
         <p:nvSpPr>
           <p:cNvPr id="6" name="Rectangle 5"/>
@@ -7407,14 +6577,14 @@
         </p:nvSpPr>
         <p:spPr>
           <a:xfrm>
-            <a:off x="457200" y="1645920"/>
-            <a:ext cx="3474720" cy="3200400"/>
+            <a:off x="8549640" y="1005840"/>
+            <a:ext cx="3337560" cy="5577840"/>
           </a:xfrm>
           <a:prstGeom prst="rect">
             <a:avLst/>
           </a:prstGeom>
           <a:solidFill>
-            <a:srgbClr val="1C3A52"/>
+            <a:srgbClr val="E8F4F8"/>
           </a:solidFill>
           <a:ln>
             <a:solidFill>
@@ -7446,104 +6616,14 @@
       </p:sp>
       <p:sp>
         <p:nvSpPr>
-          <p:cNvPr id="7" name="Rectangle 6"/>
-          <p:cNvSpPr/>
-          <p:nvPr/>
-        </p:nvSpPr>
-        <p:spPr>
-          <a:xfrm>
-            <a:off x="4206240" y="1645920"/>
-            <a:ext cx="3474720" cy="3200400"/>
-          </a:xfrm>
-          <a:prstGeom prst="rect">
-            <a:avLst/>
-          </a:prstGeom>
-          <a:solidFill>
-            <a:srgbClr val="1C3A52"/>
-          </a:solidFill>
-          <a:ln>
-            <a:solidFill>
-              <a:srgbClr val="1C7293"/>
-            </a:solidFill>
-          </a:ln>
-        </p:spPr>
-        <p:style>
-          <a:lnRef idx="1">
-            <a:schemeClr val="accent1"/>
-          </a:lnRef>
-          <a:fillRef idx="3">
-            <a:schemeClr val="accent1"/>
-          </a:fillRef>
-          <a:effectRef idx="2">
-            <a:schemeClr val="accent1"/>
-          </a:effectRef>
-          <a:fontRef idx="minor">
-            <a:schemeClr val="lt1"/>
-          </a:fontRef>
-        </p:style>
-        <p:txBody>
-          <a:bodyPr rtlCol="0" anchor="ctr"/>
-          <a:lstStyle/>
-          <a:p>
-            <a:pPr algn="ctr"/>
-          </a:p>
-        </p:txBody>
-      </p:sp>
-      <p:sp>
-        <p:nvSpPr>
-          <p:cNvPr id="8" name="Rectangle 7"/>
-          <p:cNvSpPr/>
-          <p:nvPr/>
-        </p:nvSpPr>
-        <p:spPr>
-          <a:xfrm>
-            <a:off x="7955279" y="1645920"/>
-            <a:ext cx="3931920" cy="3200400"/>
-          </a:xfrm>
-          <a:prstGeom prst="rect">
-            <a:avLst/>
-          </a:prstGeom>
-          <a:solidFill>
-            <a:srgbClr val="1C3A52"/>
-          </a:solidFill>
-          <a:ln>
-            <a:solidFill>
-              <a:srgbClr val="1C7293"/>
-            </a:solidFill>
-          </a:ln>
-        </p:spPr>
-        <p:style>
-          <a:lnRef idx="1">
-            <a:schemeClr val="accent1"/>
-          </a:lnRef>
-          <a:fillRef idx="3">
-            <a:schemeClr val="accent1"/>
-          </a:fillRef>
-          <a:effectRef idx="2">
-            <a:schemeClr val="accent1"/>
-          </a:effectRef>
-          <a:fontRef idx="minor">
-            <a:schemeClr val="lt1"/>
-          </a:fontRef>
-        </p:style>
-        <p:txBody>
-          <a:bodyPr rtlCol="0" anchor="ctr"/>
-          <a:lstStyle/>
-          <a:p>
-            <a:pPr algn="ctr"/>
-          </a:p>
-        </p:txBody>
-      </p:sp>
-      <p:sp>
-        <p:nvSpPr>
-          <p:cNvPr id="9" name="TextBox 8"/>
+          <p:cNvPr id="7" name="TextBox 6"/>
           <p:cNvSpPr txBox="1"/>
           <p:nvPr/>
         </p:nvSpPr>
         <p:spPr>
           <a:xfrm>
-            <a:off x="457200" y="1645920"/>
-            <a:ext cx="3474720" cy="731520"/>
+            <a:off x="8686800" y="1143000"/>
+            <a:ext cx="3017520" cy="411480"/>
           </a:xfrm>
           <a:prstGeom prst="rect">
             <a:avLst/>
@@ -7556,34 +6636,30 @@
           </a:bodyPr>
           <a:lstStyle/>
           <a:p>
-            <a:pPr algn="ctr">
-              <a:defRPr sz="1300" b="1">
+            <a:pPr algn="l">
+              <a:defRPr sz="1200" b="1">
                 <a:solidFill>
-                  <a:srgbClr val="90E0EF"/>
+                  <a:srgbClr val="1C7293"/>
                 </a:solidFill>
                 <a:latin typeface="Arial"/>
               </a:defRPr>
             </a:pPr>
             <a:r>
-              <a:t>Dados</a:t>
-            </a:r>
-            <a:br/>
-            <a:r>
-              <a:t>Explorados</a:t>
-            </a:r>
-          </a:p>
-        </p:txBody>
-      </p:sp>
-      <p:sp>
-        <p:nvSpPr>
-          <p:cNvPr id="10" name="TextBox 9"/>
+              <a:t>Por que importa?</a:t>
+            </a:r>
+          </a:p>
+        </p:txBody>
+      </p:sp>
+      <p:sp>
+        <p:nvSpPr>
+          <p:cNvPr id="8" name="TextBox 7"/>
           <p:cNvSpPr txBox="1"/>
           <p:nvPr/>
         </p:nvSpPr>
         <p:spPr>
           <a:xfrm>
-            <a:off x="457200" y="2468880"/>
-            <a:ext cx="3474720" cy="2194560"/>
+            <a:off x="8686800" y="1645920"/>
+            <a:ext cx="3017520" cy="4663440"/>
           </a:xfrm>
           <a:prstGeom prst="rect">
             <a:avLst/>
@@ -7596,276 +6672,31 @@
           </a:bodyPr>
           <a:lstStyle/>
           <a:p>
-            <a:pPr algn="ctr">
-              <a:defRPr sz="1300" b="0">
+            <a:pPr algn="l">
+              <a:defRPr sz="1100" b="0">
                 <a:solidFill>
-                  <a:srgbClr val="FFFFFF"/>
+                  <a:srgbClr val="0D1B2A"/>
                 </a:solidFill>
                 <a:latin typeface="Arial"/>
               </a:defRPr>
             </a:pPr>
             <a:r>
-              <a:t>21.613 imóveis</a:t>
-            </a:r>
-            <a:br/>
-            <a:r>
-              <a:t>70 zipcodes</a:t>
-            </a:r>
-            <a:br/>
-            <a:r>
-              <a:t>47 features</a:t>
-            </a:r>
-            <a:br/>
-            <a:r>
-              <a:t>0 nulos</a:t>
-            </a:r>
-          </a:p>
-        </p:txBody>
-      </p:sp>
-      <p:sp>
-        <p:nvSpPr>
-          <p:cNvPr id="11" name="TextBox 10"/>
-          <p:cNvSpPr txBox="1"/>
-          <p:nvPr/>
-        </p:nvSpPr>
-        <p:spPr>
-          <a:xfrm>
-            <a:off x="4206240" y="1645920"/>
-            <a:ext cx="3474720" cy="731520"/>
-          </a:xfrm>
-          <a:prstGeom prst="rect">
-            <a:avLst/>
-          </a:prstGeom>
-          <a:noFill/>
-        </p:spPr>
-        <p:txBody>
-          <a:bodyPr wrap="square">
-            <a:spAutoFit/>
-          </a:bodyPr>
-          <a:lstStyle/>
-          <a:p>
-            <a:pPr algn="ctr">
-              <a:defRPr sz="1300" b="1">
-                <a:solidFill>
-                  <a:srgbClr val="90E0EF"/>
-                </a:solidFill>
-                <a:latin typeface="Arial"/>
-              </a:defRPr>
-            </a:pPr>
-            <a:r>
-              <a:t>Modelo</a:t>
-            </a:r>
-            <a:br/>
-            <a:r>
-              <a:t>XGBoost</a:t>
-            </a:r>
-          </a:p>
-        </p:txBody>
-      </p:sp>
-      <p:sp>
-        <p:nvSpPr>
-          <p:cNvPr id="12" name="TextBox 11"/>
-          <p:cNvSpPr txBox="1"/>
-          <p:nvPr/>
-        </p:nvSpPr>
-        <p:spPr>
-          <a:xfrm>
-            <a:off x="4206240" y="2468880"/>
-            <a:ext cx="3474720" cy="2194560"/>
-          </a:xfrm>
-          <a:prstGeom prst="rect">
-            <a:avLst/>
-          </a:prstGeom>
-          <a:noFill/>
-        </p:spPr>
-        <p:txBody>
-          <a:bodyPr wrap="square">
-            <a:spAutoFit/>
-          </a:bodyPr>
-          <a:lstStyle/>
-          <a:p>
-            <a:pPr algn="ctr">
-              <a:defRPr sz="1300" b="0">
-                <a:solidFill>
-                  <a:srgbClr val="FFFFFF"/>
-                </a:solidFill>
-                <a:latin typeface="Arial"/>
-              </a:defRPr>
-            </a:pPr>
-            <a:r>
-              <a:t>R² = 0.9138</a:t>
-            </a:r>
-            <a:br/>
-            <a:r>
-              <a:t>MAE = $63k</a:t>
-            </a:r>
-            <a:br/>
-            <a:r>
-              <a:t>MAPE = 11.6%</a:t>
-            </a:r>
-            <a:br/>
-            <a:r>
-              <a:t>5-Fold CV</a:t>
-            </a:r>
-          </a:p>
-        </p:txBody>
-      </p:sp>
-      <p:sp>
-        <p:nvSpPr>
-          <p:cNvPr id="13" name="TextBox 12"/>
-          <p:cNvSpPr txBox="1"/>
-          <p:nvPr/>
-        </p:nvSpPr>
-        <p:spPr>
-          <a:xfrm>
-            <a:off x="7955279" y="1645920"/>
-            <a:ext cx="3931920" cy="731520"/>
-          </a:xfrm>
-          <a:prstGeom prst="rect">
-            <a:avLst/>
-          </a:prstGeom>
-          <a:noFill/>
-        </p:spPr>
-        <p:txBody>
-          <a:bodyPr wrap="square">
-            <a:spAutoFit/>
-          </a:bodyPr>
-          <a:lstStyle/>
-          <a:p>
-            <a:pPr algn="ctr">
-              <a:defRPr sz="1300" b="1">
-                <a:solidFill>
-                  <a:srgbClr val="90E0EF"/>
-                </a:solidFill>
-                <a:latin typeface="Arial"/>
-              </a:defRPr>
-            </a:pPr>
-            <a:r>
-              <a:t>Pronto para</a:t>
-            </a:r>
-            <a:br/>
-            <a:r>
-              <a:t>Produção</a:t>
-            </a:r>
-          </a:p>
-        </p:txBody>
-      </p:sp>
-      <p:sp>
-        <p:nvSpPr>
-          <p:cNvPr id="14" name="TextBox 13"/>
-          <p:cNvSpPr txBox="1"/>
-          <p:nvPr/>
-        </p:nvSpPr>
-        <p:spPr>
-          <a:xfrm>
-            <a:off x="7955279" y="2468880"/>
-            <a:ext cx="3931920" cy="2194560"/>
-          </a:xfrm>
-          <a:prstGeom prst="rect">
-            <a:avLst/>
-          </a:prstGeom>
-          <a:noFill/>
-        </p:spPr>
-        <p:txBody>
-          <a:bodyPr wrap="square">
-            <a:spAutoFit/>
-          </a:bodyPr>
-          <a:lstStyle/>
-          <a:p>
-            <a:pPr algn="ctr">
-              <a:defRPr sz="1300" b="0">
-                <a:solidFill>
-                  <a:srgbClr val="FFFFFF"/>
-                </a:solidFill>
-                <a:latin typeface="Arial"/>
-              </a:defRPr>
-            </a:pPr>
-            <a:r>
-              <a:t>API FastAPI</a:t>
-            </a:r>
-            <a:br/>
-            <a:r>
-              <a:t>MLflow Registry</a:t>
-            </a:r>
-            <a:br/>
-            <a:r>
-              <a:t>Monitoramento</a:t>
-            </a:r>
-            <a:br/>
-            <a:r>
-              <a:t>Retraining auto</a:t>
-            </a:r>
-          </a:p>
-        </p:txBody>
-      </p:sp>
-      <p:sp>
-        <p:nvSpPr>
-          <p:cNvPr id="15" name="TextBox 14"/>
-          <p:cNvSpPr txBox="1"/>
-          <p:nvPr/>
-        </p:nvSpPr>
-        <p:spPr>
-          <a:xfrm>
-            <a:off x="457200" y="5577840"/>
-            <a:ext cx="10972800" cy="548640"/>
-          </a:xfrm>
-          <a:prstGeom prst="rect">
-            <a:avLst/>
-          </a:prstGeom>
-          <a:noFill/>
-        </p:spPr>
-        <p:txBody>
-          <a:bodyPr wrap="square">
-            <a:spAutoFit/>
-          </a:bodyPr>
-          <a:lstStyle/>
-          <a:p>
-            <a:pPr algn="ctr">
-              <a:defRPr sz="1400" b="1">
-                <a:solidFill>
-                  <a:srgbClr val="FFFFFF"/>
-                </a:solidFill>
-                <a:latin typeface="Arial"/>
-              </a:defRPr>
-            </a:pPr>
-            <a:r>
-              <a:t>github.com/rogerestatistico/HOUSE_PRICE_PREDICTION</a:t>
-            </a:r>
-          </a:p>
-        </p:txBody>
-      </p:sp>
-      <p:sp>
-        <p:nvSpPr>
-          <p:cNvPr id="16" name="TextBox 15"/>
-          <p:cNvSpPr txBox="1"/>
-          <p:nvPr/>
-        </p:nvSpPr>
-        <p:spPr>
-          <a:xfrm>
-            <a:off x="457200" y="6172200"/>
-            <a:ext cx="10972800" cy="457200"/>
-          </a:xfrm>
-          <a:prstGeom prst="rect">
-            <a:avLst/>
-          </a:prstGeom>
-          <a:noFill/>
-        </p:spPr>
-        <p:txBody>
-          <a:bodyPr wrap="square">
-            <a:spAutoFit/>
-          </a:bodyPr>
-          <a:lstStyle/>
-          <a:p>
-            <a:pPr algn="ctr">
-              <a:defRPr sz="1300" b="0">
-                <a:solidFill>
-                  <a:srgbClr val="ADE8F4"/>
-                </a:solidFill>
-                <a:latin typeface="Arial"/>
-              </a:defRPr>
-            </a:pPr>
-            <a:r>
-              <a:t>Obrigado!</a:t>
+              <a:t>Quando media &gt; mediana a distribuicao e assimetrica a direita (cauda longa).</a:t>
+            </a:r>
+            <a:br/>
+            <a:br/>
+            <a:r>
+              <a:t>Isso indica outliers de alto valor que puxam a media para cima.</a:t>
+            </a:r>
+            <a:br/>
+            <a:br/>
+            <a:r>
+              <a:t>Usar mediana e mais robusto para comunicar ao negocio o preco tipico.</a:t>
+            </a:r>
+            <a:br/>
+            <a:br/>
+            <a:r>
+              <a:t>No modelo: aplicamos log1p(price) para normalizar essa assimetria.</a:t>
             </a:r>
           </a:p>
         </p:txBody>
@@ -7943,14 +6774,59 @@
       </p:sp>
       <p:sp>
         <p:nvSpPr>
-          <p:cNvPr id="3" name="TextBox 2"/>
+          <p:cNvPr id="3" name="Rectangle 2"/>
+          <p:cNvSpPr/>
+          <p:nvPr/>
+        </p:nvSpPr>
+        <p:spPr>
+          <a:xfrm>
+            <a:off x="0" y="0"/>
+            <a:ext cx="164592" cy="6858000"/>
+          </a:xfrm>
+          <a:prstGeom prst="rect">
+            <a:avLst/>
+          </a:prstGeom>
+          <a:solidFill>
+            <a:srgbClr val="1C7293"/>
+          </a:solidFill>
+          <a:ln>
+            <a:solidFill>
+              <a:srgbClr val="1C7293"/>
+            </a:solidFill>
+          </a:ln>
+        </p:spPr>
+        <p:style>
+          <a:lnRef idx="1">
+            <a:schemeClr val="accent1"/>
+          </a:lnRef>
+          <a:fillRef idx="3">
+            <a:schemeClr val="accent1"/>
+          </a:fillRef>
+          <a:effectRef idx="2">
+            <a:schemeClr val="accent1"/>
+          </a:effectRef>
+          <a:fontRef idx="minor">
+            <a:schemeClr val="lt1"/>
+          </a:fontRef>
+        </p:style>
+        <p:txBody>
+          <a:bodyPr rtlCol="0" anchor="ctr"/>
+          <a:lstStyle/>
+          <a:p>
+            <a:pPr algn="ctr"/>
+          </a:p>
+        </p:txBody>
+      </p:sp>
+      <p:sp>
+        <p:nvSpPr>
+          <p:cNvPr id="4" name="TextBox 3"/>
           <p:cNvSpPr txBox="1"/>
           <p:nvPr/>
         </p:nvSpPr>
         <p:spPr>
           <a:xfrm>
-            <a:off x="457200" y="109728"/>
-            <a:ext cx="10972800" cy="685800"/>
+            <a:off x="411480" y="118872"/>
+            <a:ext cx="11430000" cy="685800"/>
           </a:xfrm>
           <a:prstGeom prst="rect">
             <a:avLst/>
@@ -7964,7 +6840,7 @@
           <a:lstStyle/>
           <a:p>
             <a:pPr algn="l">
-              <a:defRPr sz="2600" b="1">
+              <a:defRPr sz="2400" b="1">
                 <a:solidFill>
                   <a:srgbClr val="FFFFFF"/>
                 </a:solidFill>
@@ -7972,27 +6848,96 @@
               </a:defRPr>
             </a:pPr>
             <a:r>
-              <a:t>01  Entendimento dos Dados</a:t>
-            </a:r>
-          </a:p>
-        </p:txBody>
-      </p:sp>
-      <p:sp>
-        <p:nvSpPr>
-          <p:cNvPr id="4" name="Rectangle 3"/>
+              <a:t>EDA 02  Resumo Estatistico - Media, Mediana e Assimetria</a:t>
+            </a:r>
+          </a:p>
+        </p:txBody>
+      </p:sp>
+      <p:pic>
+        <p:nvPicPr>
+          <p:cNvPr id="5" name="Picture 4" descr="eda_b_stats_table.png"/>
+          <p:cNvPicPr>
+            <a:picLocks noChangeAspect="1"/>
+          </p:cNvPicPr>
+          <p:nvPr/>
+        </p:nvPicPr>
+        <p:blipFill>
+          <a:blip r:embed="rId2"/>
+          <a:stretch>
+            <a:fillRect/>
+          </a:stretch>
+        </p:blipFill>
+        <p:spPr>
+          <a:xfrm>
+            <a:off x="274320" y="1005840"/>
+            <a:ext cx="11612880" cy="3749039"/>
+          </a:xfrm>
+          <a:prstGeom prst="rect">
+            <a:avLst/>
+          </a:prstGeom>
+        </p:spPr>
+      </p:pic>
+      <p:sp>
+        <p:nvSpPr>
+          <p:cNvPr id="6" name="Rectangle 5"/>
           <p:cNvSpPr/>
           <p:nvPr/>
         </p:nvSpPr>
         <p:spPr>
           <a:xfrm>
-            <a:off x="365760" y="1097280"/>
-            <a:ext cx="3474720" cy="5212080"/>
+            <a:off x="365760" y="4892040"/>
+            <a:ext cx="3566160" cy="1737360"/>
           </a:xfrm>
           <a:prstGeom prst="rect">
             <a:avLst/>
           </a:prstGeom>
           <a:solidFill>
-            <a:srgbClr val="DAEEF7"/>
+            <a:srgbClr val="FFECB3"/>
+          </a:solidFill>
+          <a:ln>
+            <a:solidFill>
+              <a:srgbClr val="F9A825"/>
+            </a:solidFill>
+          </a:ln>
+        </p:spPr>
+        <p:style>
+          <a:lnRef idx="1">
+            <a:schemeClr val="accent1"/>
+          </a:lnRef>
+          <a:fillRef idx="3">
+            <a:schemeClr val="accent1"/>
+          </a:fillRef>
+          <a:effectRef idx="2">
+            <a:schemeClr val="accent1"/>
+          </a:effectRef>
+          <a:fontRef idx="minor">
+            <a:schemeClr val="lt1"/>
+          </a:fontRef>
+        </p:style>
+        <p:txBody>
+          <a:bodyPr rtlCol="0" anchor="ctr"/>
+          <a:lstStyle/>
+          <a:p>
+            <a:pPr algn="ctr"/>
+          </a:p>
+        </p:txBody>
+      </p:sp>
+      <p:sp>
+        <p:nvSpPr>
+          <p:cNvPr id="7" name="Rectangle 6"/>
+          <p:cNvSpPr/>
+          <p:nvPr/>
+        </p:nvSpPr>
+        <p:spPr>
+          <a:xfrm>
+            <a:off x="4114800" y="4892040"/>
+            <a:ext cx="3566160" cy="1737360"/>
+          </a:xfrm>
+          <a:prstGeom prst="rect">
+            <a:avLst/>
+          </a:prstGeom>
+          <a:solidFill>
+            <a:srgbClr val="E8F4F8"/>
           </a:solidFill>
           <a:ln>
             <a:solidFill>
@@ -8024,24 +6969,24 @@
       </p:sp>
       <p:sp>
         <p:nvSpPr>
-          <p:cNvPr id="5" name="Rectangle 4"/>
+          <p:cNvPr id="8" name="Rectangle 7"/>
           <p:cNvSpPr/>
           <p:nvPr/>
         </p:nvSpPr>
         <p:spPr>
           <a:xfrm>
-            <a:off x="4114800" y="1097280"/>
-            <a:ext cx="3474720" cy="5212080"/>
+            <a:off x="7863840" y="4892040"/>
+            <a:ext cx="4023360" cy="1737360"/>
           </a:xfrm>
           <a:prstGeom prst="rect">
             <a:avLst/>
           </a:prstGeom>
           <a:solidFill>
-            <a:srgbClr val="DAEEF7"/>
+            <a:srgbClr val="E8F5E9"/>
           </a:solidFill>
           <a:ln>
             <a:solidFill>
-              <a:srgbClr val="1C7293"/>
+              <a:srgbClr val="388E3C"/>
             </a:solidFill>
           </a:ln>
         </p:spPr>
@@ -8069,59 +7014,14 @@
       </p:sp>
       <p:sp>
         <p:nvSpPr>
-          <p:cNvPr id="6" name="Rectangle 5"/>
-          <p:cNvSpPr/>
-          <p:nvPr/>
-        </p:nvSpPr>
-        <p:spPr>
-          <a:xfrm>
-            <a:off x="7863840" y="1097280"/>
-            <a:ext cx="3931920" cy="5212080"/>
-          </a:xfrm>
-          <a:prstGeom prst="rect">
-            <a:avLst/>
-          </a:prstGeom>
-          <a:solidFill>
-            <a:srgbClr val="FFF8E1"/>
-          </a:solidFill>
-          <a:ln>
-            <a:solidFill>
-              <a:srgbClr val="F9A825"/>
-            </a:solidFill>
-          </a:ln>
-        </p:spPr>
-        <p:style>
-          <a:lnRef idx="1">
-            <a:schemeClr val="accent1"/>
-          </a:lnRef>
-          <a:fillRef idx="3">
-            <a:schemeClr val="accent1"/>
-          </a:fillRef>
-          <a:effectRef idx="2">
-            <a:schemeClr val="accent1"/>
-          </a:effectRef>
-          <a:fontRef idx="minor">
-            <a:schemeClr val="lt1"/>
-          </a:fontRef>
-        </p:style>
-        <p:txBody>
-          <a:bodyPr rtlCol="0" anchor="ctr"/>
-          <a:lstStyle/>
-          <a:p>
-            <a:pPr algn="ctr"/>
-          </a:p>
-        </p:txBody>
-      </p:sp>
-      <p:sp>
-        <p:nvSpPr>
-          <p:cNvPr id="7" name="TextBox 6"/>
+          <p:cNvPr id="9" name="TextBox 8"/>
           <p:cNvSpPr txBox="1"/>
           <p:nvPr/>
         </p:nvSpPr>
         <p:spPr>
           <a:xfrm>
-            <a:off x="502920" y="1234440"/>
-            <a:ext cx="3200400" cy="457200"/>
+            <a:off x="365760" y="4919472"/>
+            <a:ext cx="3566160" cy="411480"/>
           </a:xfrm>
           <a:prstGeom prst="rect">
             <a:avLst/>
@@ -8134,8 +7034,88 @@
           </a:bodyPr>
           <a:lstStyle/>
           <a:p>
-            <a:pPr algn="l">
-              <a:defRPr sz="1200" b="1">
+            <a:pPr algn="ctr">
+              <a:defRPr sz="1100" b="1">
+                <a:solidFill>
+                  <a:srgbClr val="E65100"/>
+                </a:solidFill>
+                <a:latin typeface="Arial"/>
+              </a:defRPr>
+            </a:pPr>
+            <a:r>
+              <a:t>Assimetria Alta (skew &gt; 1.0)</a:t>
+            </a:r>
+          </a:p>
+        </p:txBody>
+      </p:sp>
+      <p:sp>
+        <p:nvSpPr>
+          <p:cNvPr id="10" name="TextBox 9"/>
+          <p:cNvSpPr txBox="1"/>
+          <p:nvPr/>
+        </p:nvSpPr>
+        <p:spPr>
+          <a:xfrm>
+            <a:off x="365760" y="5394960"/>
+            <a:ext cx="3566160" cy="1097280"/>
+          </a:xfrm>
+          <a:prstGeom prst="rect">
+            <a:avLst/>
+          </a:prstGeom>
+          <a:noFill/>
+        </p:spPr>
+        <p:txBody>
+          <a:bodyPr wrap="square">
+            <a:spAutoFit/>
+          </a:bodyPr>
+          <a:lstStyle/>
+          <a:p>
+            <a:pPr algn="ctr">
+              <a:defRPr sz="1050" b="0">
+                <a:solidFill>
+                  <a:srgbClr val="0D1B2A"/>
+                </a:solidFill>
+                <a:latin typeface="Arial"/>
+              </a:defRPr>
+            </a:pPr>
+            <a:r>
+              <a:t>price, sqft_lot</a:t>
+            </a:r>
+            <a:br/>
+            <a:r>
+              <a:t>Outliers de luxo puxam a media.</a:t>
+            </a:r>
+            <a:br/>
+            <a:r>
+              <a:t>Mediana e mais representativa.</a:t>
+            </a:r>
+          </a:p>
+        </p:txBody>
+      </p:sp>
+      <p:sp>
+        <p:nvSpPr>
+          <p:cNvPr id="11" name="TextBox 10"/>
+          <p:cNvSpPr txBox="1"/>
+          <p:nvPr/>
+        </p:nvSpPr>
+        <p:spPr>
+          <a:xfrm>
+            <a:off x="4114800" y="4919472"/>
+            <a:ext cx="3566160" cy="411480"/>
+          </a:xfrm>
+          <a:prstGeom prst="rect">
+            <a:avLst/>
+          </a:prstGeom>
+          <a:noFill/>
+        </p:spPr>
+        <p:txBody>
+          <a:bodyPr wrap="square">
+            <a:spAutoFit/>
+          </a:bodyPr>
+          <a:lstStyle/>
+          <a:p>
+            <a:pPr algn="ctr">
+              <a:defRPr sz="1100" b="1">
                 <a:solidFill>
                   <a:srgbClr val="1C7293"/>
                 </a:solidFill>
@@ -8143,21 +7123,21 @@
               </a:defRPr>
             </a:pPr>
             <a:r>
-              <a:t>kc_house_data.csv</a:t>
-            </a:r>
-          </a:p>
-        </p:txBody>
-      </p:sp>
-      <p:sp>
-        <p:nvSpPr>
-          <p:cNvPr id="8" name="TextBox 7"/>
+              <a:t>Assimetria Moderada (0.5-1.0)</a:t>
+            </a:r>
+          </a:p>
+        </p:txBody>
+      </p:sp>
+      <p:sp>
+        <p:nvSpPr>
+          <p:cNvPr id="12" name="TextBox 11"/>
           <p:cNvSpPr txBox="1"/>
           <p:nvPr/>
         </p:nvSpPr>
         <p:spPr>
           <a:xfrm>
-            <a:off x="502920" y="1783080"/>
-            <a:ext cx="3200400" cy="4297680"/>
+            <a:off x="4114800" y="5394960"/>
+            <a:ext cx="3566160" cy="1097280"/>
           </a:xfrm>
           <a:prstGeom prst="rect">
             <a:avLst/>
@@ -8170,8 +7150,8 @@
           </a:bodyPr>
           <a:lstStyle/>
           <a:p>
-            <a:pPr algn="l">
-              <a:defRPr sz="1200" b="0">
+            <a:pPr algn="ctr">
+              <a:defRPr sz="1050" b="0">
                 <a:solidFill>
                   <a:srgbClr val="0D1B2A"/>
                 </a:solidFill>
@@ -8179,62 +7159,29 @@
               </a:defRPr>
             </a:pPr>
             <a:r>
-              <a:t>21.613 imóveis</a:t>
-            </a:r>
-            <a:br/>
-            <a:r>
-              <a:t>21 variáveis</a:t>
-            </a:r>
-            <a:br/>
-            <a:br/>
-            <a:r>
-              <a:t>• Preço (target)</a:t>
-            </a:r>
-            <a:br/>
-            <a:r>
-              <a:t>• Área: sqft_living,</a:t>
-            </a:r>
-            <a:br/>
-            <a:r>
-              <a:t>  sqft_lot, sqft_above</a:t>
-            </a:r>
-            <a:br/>
-            <a:r>
-              <a:t>• Estruturais: quartos,</a:t>
-            </a:r>
-            <a:br/>
-            <a:r>
-              <a:t>  banheiros, andares</a:t>
-            </a:r>
-            <a:br/>
-            <a:r>
-              <a:t>• grade, condition</a:t>
-            </a:r>
-            <a:br/>
-            <a:r>
-              <a:t>• waterfront, view</a:t>
-            </a:r>
-            <a:br/>
-            <a:r>
-              <a:t>• lat, long, zipcode</a:t>
-            </a:r>
-            <a:br/>
-            <a:r>
-              <a:t>• yr_built, yr_renovated</a:t>
-            </a:r>
-          </a:p>
-        </p:txBody>
-      </p:sp>
-      <p:sp>
-        <p:nvSpPr>
-          <p:cNvPr id="9" name="TextBox 8"/>
+              <a:t>sqft_living, bathrooms</a:t>
+            </a:r>
+            <a:br/>
+            <a:r>
+              <a:t>Alongamento leve.</a:t>
+            </a:r>
+            <a:br/>
+            <a:r>
+              <a:t>Ambas as metricas uteis.</a:t>
+            </a:r>
+          </a:p>
+        </p:txBody>
+      </p:sp>
+      <p:sp>
+        <p:nvSpPr>
+          <p:cNvPr id="13" name="TextBox 12"/>
           <p:cNvSpPr txBox="1"/>
           <p:nvPr/>
         </p:nvSpPr>
         <p:spPr>
           <a:xfrm>
-            <a:off x="4251960" y="1234440"/>
-            <a:ext cx="3200400" cy="457200"/>
+            <a:off x="7863840" y="4919472"/>
+            <a:ext cx="4023360" cy="411480"/>
           </a:xfrm>
           <a:prstGeom prst="rect">
             <a:avLst/>
@@ -8247,30 +7194,30 @@
           </a:bodyPr>
           <a:lstStyle/>
           <a:p>
-            <a:pPr algn="l">
-              <a:defRPr sz="1200" b="1">
+            <a:pPr algn="ctr">
+              <a:defRPr sz="1100" b="1">
                 <a:solidFill>
-                  <a:srgbClr val="1C7293"/>
+                  <a:srgbClr val="2E7D32"/>
                 </a:solidFill>
                 <a:latin typeface="Arial"/>
               </a:defRPr>
             </a:pPr>
             <a:r>
-              <a:t>zipcode_demographics.csv</a:t>
-            </a:r>
-          </a:p>
-        </p:txBody>
-      </p:sp>
-      <p:sp>
-        <p:nvSpPr>
-          <p:cNvPr id="10" name="TextBox 9"/>
+              <a:t>Distribuicao Simetrica (&lt;=0.5)</a:t>
+            </a:r>
+          </a:p>
+        </p:txBody>
+      </p:sp>
+      <p:sp>
+        <p:nvSpPr>
+          <p:cNvPr id="14" name="TextBox 13"/>
           <p:cNvSpPr txBox="1"/>
           <p:nvPr/>
         </p:nvSpPr>
         <p:spPr>
           <a:xfrm>
-            <a:off x="4251960" y="1783080"/>
-            <a:ext cx="3200400" cy="4297680"/>
+            <a:off x="7863840" y="5394960"/>
+            <a:ext cx="4023360" cy="1097280"/>
           </a:xfrm>
           <a:prstGeom prst="rect">
             <a:avLst/>
@@ -8283,8 +7230,8 @@
           </a:bodyPr>
           <a:lstStyle/>
           <a:p>
-            <a:pPr algn="l">
-              <a:defRPr sz="1200" b="0">
+            <a:pPr algn="ctr">
+              <a:defRPr sz="1050" b="0">
                 <a:solidFill>
                   <a:srgbClr val="0D1B2A"/>
                 </a:solidFill>
@@ -8292,133 +7239,15 @@
               </a:defRPr>
             </a:pPr>
             <a:r>
-              <a:t>70 zipcodes</a:t>
-            </a:r>
-            <a:br/>
-            <a:r>
-              <a:t>27 variáveis</a:t>
-            </a:r>
-            <a:br/>
-            <a:br/>
-            <a:r>
-              <a:t>• Renda mediana</a:t>
-            </a:r>
-            <a:br/>
-            <a:r>
-              <a:t>• Valor mediano imóveis</a:t>
-            </a:r>
-            <a:br/>
-            <a:r>
-              <a:t>• % população urbana</a:t>
-            </a:r>
-            <a:br/>
-            <a:r>
-              <a:t>• Nível educacional</a:t>
-            </a:r>
-            <a:br/>
-            <a:r>
-              <a:t>  (% graduados)</a:t>
-            </a:r>
-            <a:br/>
-            <a:r>
-              <a:t>• População total</a:t>
-            </a:r>
-          </a:p>
-        </p:txBody>
-      </p:sp>
-      <p:sp>
-        <p:nvSpPr>
-          <p:cNvPr id="11" name="TextBox 10"/>
-          <p:cNvSpPr txBox="1"/>
-          <p:nvPr/>
-        </p:nvSpPr>
-        <p:spPr>
-          <a:xfrm>
-            <a:off x="8001000" y="1234440"/>
-            <a:ext cx="3566160" cy="457200"/>
-          </a:xfrm>
-          <a:prstGeom prst="rect">
-            <a:avLst/>
-          </a:prstGeom>
-          <a:noFill/>
-        </p:spPr>
-        <p:txBody>
-          <a:bodyPr wrap="square">
-            <a:spAutoFit/>
-          </a:bodyPr>
-          <a:lstStyle/>
-          <a:p>
-            <a:pPr algn="l">
-              <a:defRPr sz="1200" b="1">
-                <a:solidFill>
-                  <a:srgbClr val="E65100"/>
-                </a:solidFill>
-                <a:latin typeface="Arial"/>
-              </a:defRPr>
-            </a:pPr>
-            <a:r>
-              <a:t>Qualidade dos Dados</a:t>
-            </a:r>
-          </a:p>
-        </p:txBody>
-      </p:sp>
-      <p:sp>
-        <p:nvSpPr>
-          <p:cNvPr id="12" name="TextBox 11"/>
-          <p:cNvSpPr txBox="1"/>
-          <p:nvPr/>
-        </p:nvSpPr>
-        <p:spPr>
-          <a:xfrm>
-            <a:off x="8001000" y="1783080"/>
-            <a:ext cx="3566160" cy="4297680"/>
-          </a:xfrm>
-          <a:prstGeom prst="rect">
-            <a:avLst/>
-          </a:prstGeom>
-          <a:noFill/>
-        </p:spPr>
-        <p:txBody>
-          <a:bodyPr wrap="square">
-            <a:spAutoFit/>
-          </a:bodyPr>
-          <a:lstStyle/>
-          <a:p>
-            <a:pPr algn="l">
-              <a:defRPr sz="1300" b="0">
-                <a:solidFill>
-                  <a:srgbClr val="0D1B2A"/>
-                </a:solidFill>
-                <a:latin typeface="Arial"/>
-              </a:defRPr>
-            </a:pPr>
-            <a:r>
-              <a:t>✔  0 valores nulos</a:t>
-            </a:r>
-            <a:br/>
-            <a:r>
-              <a:t>✔  2 duplicatas removidas</a:t>
-            </a:r>
-            <a:br/>
-            <a:r>
-              <a:t>✔  Merge por zipcode</a:t>
-            </a:r>
-            <a:br/>
-            <a:r>
-              <a:t>    sem perda de registros</a:t>
-            </a:r>
-            <a:br/>
-            <a:br/>
-            <a:r>
-              <a:t>Dataset final:</a:t>
-            </a:r>
-            <a:br/>
-            <a:r>
-              <a:t>21.613 imóveis</a:t>
-            </a:r>
-            <a:br/>
-            <a:r>
-              <a:t>47 colunas</a:t>
+              <a:t>grade, yr_built, bedrooms</a:t>
+            </a:r>
+            <a:br/>
+            <a:r>
+              <a:t>Media aprox. Mediana.</a:t>
+            </a:r>
+            <a:br/>
+            <a:r>
+              <a:t>Sem distorcao por outliers.</a:t>
             </a:r>
           </a:p>
         </p:txBody>
@@ -8496,14 +7325,59 @@
       </p:sp>
       <p:sp>
         <p:nvSpPr>
-          <p:cNvPr id="3" name="TextBox 2"/>
+          <p:cNvPr id="3" name="Rectangle 2"/>
+          <p:cNvSpPr/>
+          <p:nvPr/>
+        </p:nvSpPr>
+        <p:spPr>
+          <a:xfrm>
+            <a:off x="0" y="0"/>
+            <a:ext cx="164592" cy="6858000"/>
+          </a:xfrm>
+          <a:prstGeom prst="rect">
+            <a:avLst/>
+          </a:prstGeom>
+          <a:solidFill>
+            <a:srgbClr val="1C7293"/>
+          </a:solidFill>
+          <a:ln>
+            <a:solidFill>
+              <a:srgbClr val="1C7293"/>
+            </a:solidFill>
+          </a:ln>
+        </p:spPr>
+        <p:style>
+          <a:lnRef idx="1">
+            <a:schemeClr val="accent1"/>
+          </a:lnRef>
+          <a:fillRef idx="3">
+            <a:schemeClr val="accent1"/>
+          </a:fillRef>
+          <a:effectRef idx="2">
+            <a:schemeClr val="accent1"/>
+          </a:effectRef>
+          <a:fontRef idx="minor">
+            <a:schemeClr val="lt1"/>
+          </a:fontRef>
+        </p:style>
+        <p:txBody>
+          <a:bodyPr rtlCol="0" anchor="ctr"/>
+          <a:lstStyle/>
+          <a:p>
+            <a:pPr algn="ctr"/>
+          </a:p>
+        </p:txBody>
+      </p:sp>
+      <p:sp>
+        <p:nvSpPr>
+          <p:cNvPr id="4" name="TextBox 3"/>
           <p:cNvSpPr txBox="1"/>
           <p:nvPr/>
         </p:nvSpPr>
         <p:spPr>
           <a:xfrm>
-            <a:off x="457200" y="109728"/>
-            <a:ext cx="10972800" cy="685800"/>
+            <a:off x="411480" y="118872"/>
+            <a:ext cx="11430000" cy="685800"/>
           </a:xfrm>
           <a:prstGeom prst="rect">
             <a:avLst/>
@@ -8517,7 +7391,7 @@
           <a:lstStyle/>
           <a:p>
             <a:pPr algn="l">
-              <a:defRPr sz="2600" b="1">
+              <a:defRPr sz="2400" b="1">
                 <a:solidFill>
                   <a:srgbClr val="FFFFFF"/>
                 </a:solidFill>
@@ -8525,14 +7399,14 @@
               </a:defRPr>
             </a:pPr>
             <a:r>
-              <a:t>02  Distribuição de Preços</a:t>
+              <a:t>EDA 03  Matriz de Colinearidade entre Features</a:t>
             </a:r>
           </a:p>
         </p:txBody>
       </p:sp>
       <p:pic>
         <p:nvPicPr>
-          <p:cNvPr id="4" name="Picture 3" descr="01_price_distribution.png"/>
+          <p:cNvPr id="5" name="Picture 4" descr="eda_c_collinearity.png"/>
           <p:cNvPicPr>
             <a:picLocks noChangeAspect="1"/>
           </p:cNvPicPr>
@@ -8546,14 +7420,171 @@
         </p:blipFill>
         <p:spPr>
           <a:xfrm>
-            <a:off x="365760" y="1051560"/>
-            <a:ext cx="11430000" cy="5120640"/>
+            <a:off x="274320" y="1005840"/>
+            <a:ext cx="8686800" cy="5577840"/>
           </a:xfrm>
           <a:prstGeom prst="rect">
             <a:avLst/>
           </a:prstGeom>
         </p:spPr>
       </p:pic>
+      <p:sp>
+        <p:nvSpPr>
+          <p:cNvPr id="6" name="Rectangle 5"/>
+          <p:cNvSpPr/>
+          <p:nvPr/>
+        </p:nvSpPr>
+        <p:spPr>
+          <a:xfrm>
+            <a:off x="9189720" y="1005840"/>
+            <a:ext cx="2743200" cy="5577840"/>
+          </a:xfrm>
+          <a:prstGeom prst="rect">
+            <a:avLst/>
+          </a:prstGeom>
+          <a:solidFill>
+            <a:srgbClr val="FFF8E1"/>
+          </a:solidFill>
+          <a:ln>
+            <a:solidFill>
+              <a:srgbClr val="F9A825"/>
+            </a:solidFill>
+          </a:ln>
+        </p:spPr>
+        <p:style>
+          <a:lnRef idx="1">
+            <a:schemeClr val="accent1"/>
+          </a:lnRef>
+          <a:fillRef idx="3">
+            <a:schemeClr val="accent1"/>
+          </a:fillRef>
+          <a:effectRef idx="2">
+            <a:schemeClr val="accent1"/>
+          </a:effectRef>
+          <a:fontRef idx="minor">
+            <a:schemeClr val="lt1"/>
+          </a:fontRef>
+        </p:style>
+        <p:txBody>
+          <a:bodyPr rtlCol="0" anchor="ctr"/>
+          <a:lstStyle/>
+          <a:p>
+            <a:pPr algn="ctr"/>
+          </a:p>
+        </p:txBody>
+      </p:sp>
+      <p:sp>
+        <p:nvSpPr>
+          <p:cNvPr id="7" name="TextBox 6"/>
+          <p:cNvSpPr txBox="1"/>
+          <p:nvPr/>
+        </p:nvSpPr>
+        <p:spPr>
+          <a:xfrm>
+            <a:off x="9326880" y="1143000"/>
+            <a:ext cx="2468880" cy="411480"/>
+          </a:xfrm>
+          <a:prstGeom prst="rect">
+            <a:avLst/>
+          </a:prstGeom>
+          <a:noFill/>
+        </p:spPr>
+        <p:txBody>
+          <a:bodyPr wrap="square">
+            <a:spAutoFit/>
+          </a:bodyPr>
+          <a:lstStyle/>
+          <a:p>
+            <a:pPr algn="l">
+              <a:defRPr sz="1200" b="1">
+                <a:solidFill>
+                  <a:srgbClr val="E65100"/>
+                </a:solidFill>
+                <a:latin typeface="Arial"/>
+              </a:defRPr>
+            </a:pPr>
+            <a:r>
+              <a:t>Pares colineares:</a:t>
+            </a:r>
+          </a:p>
+        </p:txBody>
+      </p:sp>
+      <p:sp>
+        <p:nvSpPr>
+          <p:cNvPr id="8" name="TextBox 7"/>
+          <p:cNvSpPr txBox="1"/>
+          <p:nvPr/>
+        </p:nvSpPr>
+        <p:spPr>
+          <a:xfrm>
+            <a:off x="9326880" y="1645920"/>
+            <a:ext cx="2468880" cy="4754880"/>
+          </a:xfrm>
+          <a:prstGeom prst="rect">
+            <a:avLst/>
+          </a:prstGeom>
+          <a:noFill/>
+        </p:spPr>
+        <p:txBody>
+          <a:bodyPr wrap="square">
+            <a:spAutoFit/>
+          </a:bodyPr>
+          <a:lstStyle/>
+          <a:p>
+            <a:pPr algn="l">
+              <a:defRPr sz="1050" b="0">
+                <a:solidFill>
+                  <a:srgbClr val="0D1B2A"/>
+                </a:solidFill>
+                <a:latin typeface="Arial"/>
+              </a:defRPr>
+            </a:pPr>
+            <a:r>
+              <a:t>sqft_living x sqft_above</a:t>
+            </a:r>
+            <a:br/>
+            <a:r>
+              <a:t>r = 0.88</a:t>
+            </a:r>
+            <a:br/>
+            <a:br/>
+            <a:r>
+              <a:t>sqft_living x sqft_living15</a:t>
+            </a:r>
+            <a:br/>
+            <a:r>
+              <a:t>r = 0.76</a:t>
+            </a:r>
+            <a:br/>
+            <a:br/>
+            <a:r>
+              <a:t>bathrooms x sqft_living</a:t>
+            </a:r>
+            <a:br/>
+            <a:r>
+              <a:t>r = 0.75</a:t>
+            </a:r>
+            <a:br/>
+            <a:br/>
+            <a:r>
+              <a:t>hous_val_amt x renda</a:t>
+            </a:r>
+            <a:br/>
+            <a:r>
+              <a:t>r = 0.73</a:t>
+            </a:r>
+            <a:br/>
+            <a:br/>
+            <a:r>
+              <a:t>Como tratamos:</a:t>
+            </a:r>
+            <a:br/>
+            <a:r>
+              <a:t>XGBoost e robusto a colinearidade. Features redundantes mantidas pois aumentam R2. VIF calculado para confirmar.</a:t>
+            </a:r>
+          </a:p>
+        </p:txBody>
+      </p:sp>
     </p:spTree>
   </p:cSld>
   <p:clrMapOvr>
@@ -8627,14 +7658,59 @@
       </p:sp>
       <p:sp>
         <p:nvSpPr>
-          <p:cNvPr id="3" name="TextBox 2"/>
+          <p:cNvPr id="3" name="Rectangle 2"/>
+          <p:cNvSpPr/>
+          <p:nvPr/>
+        </p:nvSpPr>
+        <p:spPr>
+          <a:xfrm>
+            <a:off x="0" y="0"/>
+            <a:ext cx="164592" cy="6858000"/>
+          </a:xfrm>
+          <a:prstGeom prst="rect">
+            <a:avLst/>
+          </a:prstGeom>
+          <a:solidFill>
+            <a:srgbClr val="1C7293"/>
+          </a:solidFill>
+          <a:ln>
+            <a:solidFill>
+              <a:srgbClr val="1C7293"/>
+            </a:solidFill>
+          </a:ln>
+        </p:spPr>
+        <p:style>
+          <a:lnRef idx="1">
+            <a:schemeClr val="accent1"/>
+          </a:lnRef>
+          <a:fillRef idx="3">
+            <a:schemeClr val="accent1"/>
+          </a:fillRef>
+          <a:effectRef idx="2">
+            <a:schemeClr val="accent1"/>
+          </a:effectRef>
+          <a:fontRef idx="minor">
+            <a:schemeClr val="lt1"/>
+          </a:fontRef>
+        </p:style>
+        <p:txBody>
+          <a:bodyPr rtlCol="0" anchor="ctr"/>
+          <a:lstStyle/>
+          <a:p>
+            <a:pPr algn="ctr"/>
+          </a:p>
+        </p:txBody>
+      </p:sp>
+      <p:sp>
+        <p:nvSpPr>
+          <p:cNvPr id="4" name="TextBox 3"/>
           <p:cNvSpPr txBox="1"/>
           <p:nvPr/>
         </p:nvSpPr>
         <p:spPr>
           <a:xfrm>
-            <a:off x="457200" y="109728"/>
-            <a:ext cx="10972800" cy="685800"/>
+            <a:off x="411480" y="118872"/>
+            <a:ext cx="11430000" cy="685800"/>
           </a:xfrm>
           <a:prstGeom prst="rect">
             <a:avLst/>
@@ -8648,7 +7724,7 @@
           <a:lstStyle/>
           <a:p>
             <a:pPr algn="l">
-              <a:defRPr sz="2600" b="1">
+              <a:defRPr sz="2400" b="1">
                 <a:solidFill>
                   <a:srgbClr val="FFFFFF"/>
                 </a:solidFill>
@@ -8656,14 +7732,14 @@
               </a:defRPr>
             </a:pPr>
             <a:r>
-              <a:t>03  Correlações com o Preço</a:t>
+              <a:t>EDA 04  Analise de Colinearidade - VIF e Pares Criticos</a:t>
             </a:r>
           </a:p>
         </p:txBody>
       </p:sp>
       <p:pic>
         <p:nvPicPr>
-          <p:cNvPr id="4" name="Picture 3" descr="02_correlation_price.png"/>
+          <p:cNvPr id="5" name="Picture 4" descr="eda_d_vif.png"/>
           <p:cNvPicPr>
             <a:picLocks noChangeAspect="1"/>
           </p:cNvPicPr>
@@ -8678,7 +7754,7 @@
         <p:spPr>
           <a:xfrm>
             <a:off x="274320" y="1005840"/>
-            <a:ext cx="5943600" cy="5577840"/>
+            <a:ext cx="11612880" cy="3977639"/>
           </a:xfrm>
           <a:prstGeom prst="rect">
             <a:avLst/>
@@ -8687,24 +7763,24 @@
       </p:pic>
       <p:sp>
         <p:nvSpPr>
-          <p:cNvPr id="5" name="Rectangle 4"/>
+          <p:cNvPr id="6" name="Rectangle 5"/>
           <p:cNvSpPr/>
           <p:nvPr/>
         </p:nvSpPr>
         <p:spPr>
           <a:xfrm>
-            <a:off x="6492240" y="1005840"/>
-            <a:ext cx="5303520" cy="5577840"/>
+            <a:off x="365760" y="5120640"/>
+            <a:ext cx="3657600" cy="1554480"/>
           </a:xfrm>
           <a:prstGeom prst="rect">
             <a:avLst/>
           </a:prstGeom>
           <a:solidFill>
-            <a:srgbClr val="E8F4F8"/>
+            <a:srgbClr val="FFEBEE"/>
           </a:solidFill>
           <a:ln>
             <a:solidFill>
-              <a:srgbClr val="BDD7E7"/>
+              <a:srgbClr val="E74C3C"/>
             </a:solidFill>
           </a:ln>
         </p:spPr>
@@ -8732,14 +7808,104 @@
       </p:sp>
       <p:sp>
         <p:nvSpPr>
-          <p:cNvPr id="6" name="TextBox 5"/>
+          <p:cNvPr id="7" name="Rectangle 6"/>
+          <p:cNvSpPr/>
+          <p:nvPr/>
+        </p:nvSpPr>
+        <p:spPr>
+          <a:xfrm>
+            <a:off x="4251960" y="5120640"/>
+            <a:ext cx="3657600" cy="1554480"/>
+          </a:xfrm>
+          <a:prstGeom prst="rect">
+            <a:avLst/>
+          </a:prstGeom>
+          <a:solidFill>
+            <a:srgbClr val="FFF8E1"/>
+          </a:solidFill>
+          <a:ln>
+            <a:solidFill>
+              <a:srgbClr val="F9A825"/>
+            </a:solidFill>
+          </a:ln>
+        </p:spPr>
+        <p:style>
+          <a:lnRef idx="1">
+            <a:schemeClr val="accent1"/>
+          </a:lnRef>
+          <a:fillRef idx="3">
+            <a:schemeClr val="accent1"/>
+          </a:fillRef>
+          <a:effectRef idx="2">
+            <a:schemeClr val="accent1"/>
+          </a:effectRef>
+          <a:fontRef idx="minor">
+            <a:schemeClr val="lt1"/>
+          </a:fontRef>
+        </p:style>
+        <p:txBody>
+          <a:bodyPr rtlCol="0" anchor="ctr"/>
+          <a:lstStyle/>
+          <a:p>
+            <a:pPr algn="ctr"/>
+          </a:p>
+        </p:txBody>
+      </p:sp>
+      <p:sp>
+        <p:nvSpPr>
+          <p:cNvPr id="8" name="Rectangle 7"/>
+          <p:cNvSpPr/>
+          <p:nvPr/>
+        </p:nvSpPr>
+        <p:spPr>
+          <a:xfrm>
+            <a:off x="8138160" y="5120640"/>
+            <a:ext cx="3749039" cy="1554480"/>
+          </a:xfrm>
+          <a:prstGeom prst="rect">
+            <a:avLst/>
+          </a:prstGeom>
+          <a:solidFill>
+            <a:srgbClr val="E8F5E9"/>
+          </a:solidFill>
+          <a:ln>
+            <a:solidFill>
+              <a:srgbClr val="388E3C"/>
+            </a:solidFill>
+          </a:ln>
+        </p:spPr>
+        <p:style>
+          <a:lnRef idx="1">
+            <a:schemeClr val="accent1"/>
+          </a:lnRef>
+          <a:fillRef idx="3">
+            <a:schemeClr val="accent1"/>
+          </a:fillRef>
+          <a:effectRef idx="2">
+            <a:schemeClr val="accent1"/>
+          </a:effectRef>
+          <a:fontRef idx="minor">
+            <a:schemeClr val="lt1"/>
+          </a:fontRef>
+        </p:style>
+        <p:txBody>
+          <a:bodyPr rtlCol="0" anchor="ctr"/>
+          <a:lstStyle/>
+          <a:p>
+            <a:pPr algn="ctr"/>
+          </a:p>
+        </p:txBody>
+      </p:sp>
+      <p:sp>
+        <p:nvSpPr>
+          <p:cNvPr id="9" name="TextBox 8"/>
           <p:cNvSpPr txBox="1"/>
           <p:nvPr/>
         </p:nvSpPr>
         <p:spPr>
           <a:xfrm>
-            <a:off x="6675120" y="1143000"/>
-            <a:ext cx="4937760" cy="411480"/>
+            <a:off x="365760" y="5148072"/>
+            <a:ext cx="3657600" cy="365760"/>
           </a:xfrm>
           <a:prstGeom prst="rect">
             <a:avLst/>
@@ -8752,30 +7918,30 @@
           </a:bodyPr>
           <a:lstStyle/>
           <a:p>
-            <a:pPr algn="l">
-              <a:defRPr sz="1300" b="1">
+            <a:pPr algn="ctr">
+              <a:defRPr sz="1100" b="1">
                 <a:solidFill>
-                  <a:srgbClr val="1C7293"/>
+                  <a:srgbClr val="C0392B"/>
                 </a:solidFill>
                 <a:latin typeface="Arial"/>
               </a:defRPr>
             </a:pPr>
             <a:r>
-              <a:t>Principais correlações:</a:t>
-            </a:r>
-          </a:p>
-        </p:txBody>
-      </p:sp>
-      <p:sp>
-        <p:nvSpPr>
-          <p:cNvPr id="7" name="TextBox 6"/>
+              <a:t>VIF &gt; 10 - Alta</a:t>
+            </a:r>
+          </a:p>
+        </p:txBody>
+      </p:sp>
+      <p:sp>
+        <p:nvSpPr>
+          <p:cNvPr id="10" name="TextBox 9"/>
           <p:cNvSpPr txBox="1"/>
           <p:nvPr/>
         </p:nvSpPr>
         <p:spPr>
           <a:xfrm>
-            <a:off x="6675120" y="1645920"/>
-            <a:ext cx="4937760" cy="2560320"/>
+            <a:off x="365760" y="5559552"/>
+            <a:ext cx="3657600" cy="1005840"/>
           </a:xfrm>
           <a:prstGeom prst="rect">
             <a:avLst/>
@@ -8788,8 +7954,8 @@
           </a:bodyPr>
           <a:lstStyle/>
           <a:p>
-            <a:pPr algn="l">
-              <a:defRPr sz="1300" b="0">
+            <a:pPr algn="ctr">
+              <a:defRPr sz="1000" b="0">
                 <a:solidFill>
                   <a:srgbClr val="0D1B2A"/>
                 </a:solidFill>
@@ -8797,45 +7963,25 @@
               </a:defRPr>
             </a:pPr>
             <a:r>
-              <a:t>sqft_living → 0.70</a:t>
-            </a:r>
-            <a:br/>
-            <a:r>
-              <a:t>grade → 0.67</a:t>
-            </a:r>
-            <a:br/>
-            <a:r>
-              <a:t>sqft_above → 0.60</a:t>
-            </a:r>
-            <a:br/>
-            <a:r>
-              <a:t>hous_val_amt → 0.63</a:t>
-            </a:r>
-            <a:br/>
-            <a:r>
-              <a:t>renda mediana → 0.48</a:t>
-            </a:r>
-            <a:br/>
-            <a:r>
-              <a:t>bathrooms → 0.53</a:t>
-            </a:r>
-            <a:br/>
-            <a:r>
-              <a:t>waterfront → 0.27</a:t>
-            </a:r>
-          </a:p>
-        </p:txBody>
-      </p:sp>
-      <p:sp>
-        <p:nvSpPr>
-          <p:cNvPr id="8" name="TextBox 7"/>
+              <a:t>sqft_above, sqft_living</a:t>
+            </a:r>
+            <a:br/>
+            <a:r>
+              <a:t>Colineares. XGBoost as mantem pois capturam aspectos distintos.</a:t>
+            </a:r>
+          </a:p>
+        </p:txBody>
+      </p:sp>
+      <p:sp>
+        <p:nvSpPr>
+          <p:cNvPr id="11" name="TextBox 10"/>
           <p:cNvSpPr txBox="1"/>
           <p:nvPr/>
         </p:nvSpPr>
         <p:spPr>
           <a:xfrm>
-            <a:off x="6675120" y="4343400"/>
-            <a:ext cx="4937760" cy="365760"/>
+            <a:off x="4251960" y="5148072"/>
+            <a:ext cx="3657600" cy="365760"/>
           </a:xfrm>
           <a:prstGeom prst="rect">
             <a:avLst/>
@@ -8848,30 +7994,30 @@
           </a:bodyPr>
           <a:lstStyle/>
           <a:p>
-            <a:pPr algn="l">
-              <a:defRPr sz="1200" b="1">
+            <a:pPr algn="ctr">
+              <a:defRPr sz="1100" b="1">
                 <a:solidFill>
-                  <a:srgbClr val="1C7293"/>
+                  <a:srgbClr val="E65100"/>
                 </a:solidFill>
                 <a:latin typeface="Arial"/>
               </a:defRPr>
             </a:pPr>
             <a:r>
-              <a:t>Insight chave:</a:t>
-            </a:r>
-          </a:p>
-        </p:txBody>
-      </p:sp>
-      <p:sp>
-        <p:nvSpPr>
-          <p:cNvPr id="9" name="TextBox 8"/>
+              <a:t>VIF 5-10 - Moderada</a:t>
+            </a:r>
+          </a:p>
+        </p:txBody>
+      </p:sp>
+      <p:sp>
+        <p:nvSpPr>
+          <p:cNvPr id="12" name="TextBox 11"/>
           <p:cNvSpPr txBox="1"/>
           <p:nvPr/>
         </p:nvSpPr>
         <p:spPr>
           <a:xfrm>
-            <a:off x="6675120" y="4754880"/>
-            <a:ext cx="4937760" cy="1554480"/>
+            <a:off x="4251960" y="5559552"/>
+            <a:ext cx="3657600" cy="1005840"/>
           </a:xfrm>
           <a:prstGeom prst="rect">
             <a:avLst/>
@@ -8884,8 +8030,8 @@
           </a:bodyPr>
           <a:lstStyle/>
           <a:p>
-            <a:pPr algn="l">
-              <a:defRPr sz="1200" b="0">
+            <a:pPr algn="ctr">
+              <a:defRPr sz="1000" b="0">
                 <a:solidFill>
                   <a:srgbClr val="0D1B2A"/>
                 </a:solidFill>
@@ -8893,7 +8039,87 @@
               </a:defRPr>
             </a:pPr>
             <a:r>
-              <a:t>Características físicas (área, qualidade) e contexto socioeconômico do bairro (renda, valor médio) são os maiores preditores de preço.</a:t>
+              <a:t>bathrooms, sqft_living15</a:t>
+            </a:r>
+            <a:br/>
+            <a:r>
+              <a:t>Colinearidade aceitavel. Mantidas por correlacao com preco.</a:t>
+            </a:r>
+          </a:p>
+        </p:txBody>
+      </p:sp>
+      <p:sp>
+        <p:nvSpPr>
+          <p:cNvPr id="13" name="TextBox 12"/>
+          <p:cNvSpPr txBox="1"/>
+          <p:nvPr/>
+        </p:nvSpPr>
+        <p:spPr>
+          <a:xfrm>
+            <a:off x="8138160" y="5148072"/>
+            <a:ext cx="3749039" cy="365760"/>
+          </a:xfrm>
+          <a:prstGeom prst="rect">
+            <a:avLst/>
+          </a:prstGeom>
+          <a:noFill/>
+        </p:spPr>
+        <p:txBody>
+          <a:bodyPr wrap="square">
+            <a:spAutoFit/>
+          </a:bodyPr>
+          <a:lstStyle/>
+          <a:p>
+            <a:pPr algn="ctr">
+              <a:defRPr sz="1100" b="1">
+                <a:solidFill>
+                  <a:srgbClr val="2E7D32"/>
+                </a:solidFill>
+                <a:latin typeface="Arial"/>
+              </a:defRPr>
+            </a:pPr>
+            <a:r>
+              <a:t>VIF &lt; 5 - Baixa</a:t>
+            </a:r>
+          </a:p>
+        </p:txBody>
+      </p:sp>
+      <p:sp>
+        <p:nvSpPr>
+          <p:cNvPr id="14" name="TextBox 13"/>
+          <p:cNvSpPr txBox="1"/>
+          <p:nvPr/>
+        </p:nvSpPr>
+        <p:spPr>
+          <a:xfrm>
+            <a:off x="8138160" y="5559552"/>
+            <a:ext cx="3749039" cy="1005840"/>
+          </a:xfrm>
+          <a:prstGeom prst="rect">
+            <a:avLst/>
+          </a:prstGeom>
+          <a:noFill/>
+        </p:spPr>
+        <p:txBody>
+          <a:bodyPr wrap="square">
+            <a:spAutoFit/>
+          </a:bodyPr>
+          <a:lstStyle/>
+          <a:p>
+            <a:pPr algn="ctr">
+              <a:defRPr sz="1000" b="0">
+                <a:solidFill>
+                  <a:srgbClr val="0D1B2A"/>
+                </a:solidFill>
+                <a:latin typeface="Arial"/>
+              </a:defRPr>
+            </a:pPr>
+            <a:r>
+              <a:t>grade, yr_built, bedrooms</a:t>
+            </a:r>
+            <a:br/>
+            <a:r>
+              <a:t>Features independentes. Priorizadas no modelo final.</a:t>
             </a:r>
           </a:p>
         </p:txBody>
@@ -8971,14 +8197,59 @@
       </p:sp>
       <p:sp>
         <p:nvSpPr>
-          <p:cNvPr id="3" name="TextBox 2"/>
+          <p:cNvPr id="3" name="Rectangle 2"/>
+          <p:cNvSpPr/>
+          <p:nvPr/>
+        </p:nvSpPr>
+        <p:spPr>
+          <a:xfrm>
+            <a:off x="0" y="0"/>
+            <a:ext cx="164592" cy="6858000"/>
+          </a:xfrm>
+          <a:prstGeom prst="rect">
+            <a:avLst/>
+          </a:prstGeom>
+          <a:solidFill>
+            <a:srgbClr val="1C7293"/>
+          </a:solidFill>
+          <a:ln>
+            <a:solidFill>
+              <a:srgbClr val="1C7293"/>
+            </a:solidFill>
+          </a:ln>
+        </p:spPr>
+        <p:style>
+          <a:lnRef idx="1">
+            <a:schemeClr val="accent1"/>
+          </a:lnRef>
+          <a:fillRef idx="3">
+            <a:schemeClr val="accent1"/>
+          </a:fillRef>
+          <a:effectRef idx="2">
+            <a:schemeClr val="accent1"/>
+          </a:effectRef>
+          <a:fontRef idx="minor">
+            <a:schemeClr val="lt1"/>
+          </a:fontRef>
+        </p:style>
+        <p:txBody>
+          <a:bodyPr rtlCol="0" anchor="ctr"/>
+          <a:lstStyle/>
+          <a:p>
+            <a:pPr algn="ctr"/>
+          </a:p>
+        </p:txBody>
+      </p:sp>
+      <p:sp>
+        <p:nvSpPr>
+          <p:cNvPr id="4" name="TextBox 3"/>
           <p:cNvSpPr txBox="1"/>
           <p:nvPr/>
         </p:nvSpPr>
         <p:spPr>
           <a:xfrm>
-            <a:off x="457200" y="109728"/>
-            <a:ext cx="10972800" cy="685800"/>
+            <a:off x="411480" y="118872"/>
+            <a:ext cx="11430000" cy="685800"/>
           </a:xfrm>
           <a:prstGeom prst="rect">
             <a:avLst/>
@@ -8992,7 +8263,7 @@
           <a:lstStyle/>
           <a:p>
             <a:pPr algn="l">
-              <a:defRPr sz="2600" b="1">
+              <a:defRPr sz="2400" b="1">
                 <a:solidFill>
                   <a:srgbClr val="FFFFFF"/>
                 </a:solidFill>
@@ -9000,14 +8271,14 @@
               </a:defRPr>
             </a:pPr>
             <a:r>
-              <a:t>04  Heatmap de Correlação</a:t>
+              <a:t>EDA 05  Correlacao &amp; Criterio de Selecao de Features</a:t>
             </a:r>
           </a:p>
         </p:txBody>
       </p:sp>
       <p:pic>
         <p:nvPicPr>
-          <p:cNvPr id="4" name="Picture 3" descr="03_heatmap.png"/>
+          <p:cNvPr id="5" name="Picture 4" descr="eda_e_feature_selection.png"/>
           <p:cNvPicPr>
             <a:picLocks noChangeAspect="1"/>
           </p:cNvPicPr>
@@ -9021,14 +8292,360 @@
         </p:blipFill>
         <p:spPr>
           <a:xfrm>
-            <a:off x="365760" y="1005840"/>
-            <a:ext cx="11430000" cy="5577840"/>
+            <a:off x="274320" y="1005840"/>
+            <a:ext cx="7498079" cy="5577840"/>
           </a:xfrm>
           <a:prstGeom prst="rect">
             <a:avLst/>
           </a:prstGeom>
         </p:spPr>
       </p:pic>
+      <p:sp>
+        <p:nvSpPr>
+          <p:cNvPr id="6" name="Rectangle 5"/>
+          <p:cNvSpPr/>
+          <p:nvPr/>
+        </p:nvSpPr>
+        <p:spPr>
+          <a:xfrm>
+            <a:off x="7955279" y="1005840"/>
+            <a:ext cx="3931920" cy="5577840"/>
+          </a:xfrm>
+          <a:prstGeom prst="rect">
+            <a:avLst/>
+          </a:prstGeom>
+          <a:solidFill>
+            <a:srgbClr val="E8F4F8"/>
+          </a:solidFill>
+          <a:ln>
+            <a:solidFill>
+              <a:srgbClr val="1C7293"/>
+            </a:solidFill>
+          </a:ln>
+        </p:spPr>
+        <p:style>
+          <a:lnRef idx="1">
+            <a:schemeClr val="accent1"/>
+          </a:lnRef>
+          <a:fillRef idx="3">
+            <a:schemeClr val="accent1"/>
+          </a:fillRef>
+          <a:effectRef idx="2">
+            <a:schemeClr val="accent1"/>
+          </a:effectRef>
+          <a:fontRef idx="minor">
+            <a:schemeClr val="lt1"/>
+          </a:fontRef>
+        </p:style>
+        <p:txBody>
+          <a:bodyPr rtlCol="0" anchor="ctr"/>
+          <a:lstStyle/>
+          <a:p>
+            <a:pPr algn="ctr"/>
+          </a:p>
+        </p:txBody>
+      </p:sp>
+      <p:sp>
+        <p:nvSpPr>
+          <p:cNvPr id="7" name="TextBox 6"/>
+          <p:cNvSpPr txBox="1"/>
+          <p:nvPr/>
+        </p:nvSpPr>
+        <p:spPr>
+          <a:xfrm>
+            <a:off x="8092440" y="1143000"/>
+            <a:ext cx="3657600" cy="411480"/>
+          </a:xfrm>
+          <a:prstGeom prst="rect">
+            <a:avLst/>
+          </a:prstGeom>
+          <a:noFill/>
+        </p:spPr>
+        <p:txBody>
+          <a:bodyPr wrap="square">
+            <a:spAutoFit/>
+          </a:bodyPr>
+          <a:lstStyle/>
+          <a:p>
+            <a:pPr algn="l">
+              <a:defRPr sz="1200" b="1">
+                <a:solidFill>
+                  <a:srgbClr val="1C7293"/>
+                </a:solidFill>
+                <a:latin typeface="Arial"/>
+              </a:defRPr>
+            </a:pPr>
+            <a:r>
+              <a:t>Criterio de selecao:</a:t>
+            </a:r>
+          </a:p>
+        </p:txBody>
+      </p:sp>
+      <p:sp>
+        <p:nvSpPr>
+          <p:cNvPr id="8" name="TextBox 7"/>
+          <p:cNvSpPr txBox="1"/>
+          <p:nvPr/>
+        </p:nvSpPr>
+        <p:spPr>
+          <a:xfrm>
+            <a:off x="8092440" y="1645920"/>
+            <a:ext cx="3657600" cy="2834640"/>
+          </a:xfrm>
+          <a:prstGeom prst="rect">
+            <a:avLst/>
+          </a:prstGeom>
+          <a:noFill/>
+        </p:spPr>
+        <p:txBody>
+          <a:bodyPr wrap="square">
+            <a:spAutoFit/>
+          </a:bodyPr>
+          <a:lstStyle/>
+          <a:p>
+            <a:pPr algn="l">
+              <a:defRPr sz="1150" b="0">
+                <a:solidFill>
+                  <a:srgbClr val="0D1B2A"/>
+                </a:solidFill>
+                <a:latin typeface="Arial"/>
+              </a:defRPr>
+            </a:pPr>
+            <a:r>
+              <a:t>1. Correlacao |r| &gt; 0.3</a:t>
+            </a:r>
+            <a:br/>
+            <a:r>
+              <a:t>   com o preco</a:t>
+            </a:r>
+            <a:br/>
+            <a:br/>
+            <a:r>
+              <a:t>2. Disponivel no</a:t>
+            </a:r>
+            <a:br/>
+            <a:r>
+              <a:t>   dataset futuro</a:t>
+            </a:r>
+            <a:br/>
+            <a:br/>
+            <a:r>
+              <a:t>3. Sem data leakage</a:t>
+            </a:r>
+            <a:br/>
+            <a:br/>
+            <a:r>
+              <a:t>4. Contribuicao unica</a:t>
+            </a:r>
+            <a:br/>
+            <a:r>
+              <a:t>   (VIF &lt; 10 ou alta</a:t>
+            </a:r>
+            <a:br/>
+            <a:r>
+              <a:t>   correl. com target)</a:t>
+            </a:r>
+          </a:p>
+        </p:txBody>
+      </p:sp>
+      <p:sp>
+        <p:nvSpPr>
+          <p:cNvPr id="9" name="TextBox 8"/>
+          <p:cNvSpPr txBox="1"/>
+          <p:nvPr/>
+        </p:nvSpPr>
+        <p:spPr>
+          <a:xfrm>
+            <a:off x="8092440" y="4617720"/>
+            <a:ext cx="3657600" cy="365760"/>
+          </a:xfrm>
+          <a:prstGeom prst="rect">
+            <a:avLst/>
+          </a:prstGeom>
+          <a:noFill/>
+        </p:spPr>
+        <p:txBody>
+          <a:bodyPr wrap="square">
+            <a:spAutoFit/>
+          </a:bodyPr>
+          <a:lstStyle/>
+          <a:p>
+            <a:pPr algn="l">
+              <a:defRPr sz="1200" b="1">
+                <a:solidFill>
+                  <a:srgbClr val="1C7293"/>
+                </a:solidFill>
+                <a:latin typeface="Arial"/>
+              </a:defRPr>
+            </a:pPr>
+            <a:r>
+              <a:t>Resultado:</a:t>
+            </a:r>
+          </a:p>
+        </p:txBody>
+      </p:sp>
+      <p:sp>
+        <p:nvSpPr>
+          <p:cNvPr id="10" name="Rectangle 9"/>
+          <p:cNvSpPr/>
+          <p:nvPr/>
+        </p:nvSpPr>
+        <p:spPr>
+          <a:xfrm>
+            <a:off x="8092440" y="5074920"/>
+            <a:ext cx="3657600" cy="685800"/>
+          </a:xfrm>
+          <a:prstGeom prst="rect">
+            <a:avLst/>
+          </a:prstGeom>
+          <a:solidFill>
+            <a:srgbClr val="27AE60"/>
+          </a:solidFill>
+          <a:ln>
+            <a:solidFill>
+              <a:srgbClr val="27AE60"/>
+            </a:solidFill>
+          </a:ln>
+        </p:spPr>
+        <p:style>
+          <a:lnRef idx="1">
+            <a:schemeClr val="accent1"/>
+          </a:lnRef>
+          <a:fillRef idx="3">
+            <a:schemeClr val="accent1"/>
+          </a:fillRef>
+          <a:effectRef idx="2">
+            <a:schemeClr val="accent1"/>
+          </a:effectRef>
+          <a:fontRef idx="minor">
+            <a:schemeClr val="lt1"/>
+          </a:fontRef>
+        </p:style>
+        <p:txBody>
+          <a:bodyPr rtlCol="0" anchor="ctr"/>
+          <a:lstStyle/>
+          <a:p>
+            <a:pPr algn="ctr"/>
+          </a:p>
+        </p:txBody>
+      </p:sp>
+      <p:sp>
+        <p:nvSpPr>
+          <p:cNvPr id="11" name="TextBox 10"/>
+          <p:cNvSpPr txBox="1"/>
+          <p:nvPr/>
+        </p:nvSpPr>
+        <p:spPr>
+          <a:xfrm>
+            <a:off x="8092440" y="5074920"/>
+            <a:ext cx="3657600" cy="685800"/>
+          </a:xfrm>
+          <a:prstGeom prst="rect">
+            <a:avLst/>
+          </a:prstGeom>
+          <a:noFill/>
+        </p:spPr>
+        <p:txBody>
+          <a:bodyPr wrap="square">
+            <a:spAutoFit/>
+          </a:bodyPr>
+          <a:lstStyle/>
+          <a:p>
+            <a:pPr algn="ctr">
+              <a:defRPr sz="1100" b="1">
+                <a:solidFill>
+                  <a:srgbClr val="FFFFFF"/>
+                </a:solidFill>
+                <a:latin typeface="Arial"/>
+              </a:defRPr>
+            </a:pPr>
+            <a:r>
+              <a:t>18 originais + 10 criadas = 36 features</a:t>
+            </a:r>
+          </a:p>
+        </p:txBody>
+      </p:sp>
+      <p:sp>
+        <p:nvSpPr>
+          <p:cNvPr id="12" name="Rectangle 11"/>
+          <p:cNvSpPr/>
+          <p:nvPr/>
+        </p:nvSpPr>
+        <p:spPr>
+          <a:xfrm>
+            <a:off x="8092440" y="5897880"/>
+            <a:ext cx="3657600" cy="548640"/>
+          </a:xfrm>
+          <a:prstGeom prst="rect">
+            <a:avLst/>
+          </a:prstGeom>
+          <a:solidFill>
+            <a:srgbClr val="E74C3C"/>
+          </a:solidFill>
+          <a:ln>
+            <a:solidFill>
+              <a:srgbClr val="E74C3C"/>
+            </a:solidFill>
+          </a:ln>
+        </p:spPr>
+        <p:style>
+          <a:lnRef idx="1">
+            <a:schemeClr val="accent1"/>
+          </a:lnRef>
+          <a:fillRef idx="3">
+            <a:schemeClr val="accent1"/>
+          </a:fillRef>
+          <a:effectRef idx="2">
+            <a:schemeClr val="accent1"/>
+          </a:effectRef>
+          <a:fontRef idx="minor">
+            <a:schemeClr val="lt1"/>
+          </a:fontRef>
+        </p:style>
+        <p:txBody>
+          <a:bodyPr rtlCol="0" anchor="ctr"/>
+          <a:lstStyle/>
+          <a:p>
+            <a:pPr algn="ctr"/>
+          </a:p>
+        </p:txBody>
+      </p:sp>
+      <p:sp>
+        <p:nvSpPr>
+          <p:cNvPr id="13" name="TextBox 12"/>
+          <p:cNvSpPr txBox="1"/>
+          <p:nvPr/>
+        </p:nvSpPr>
+        <p:spPr>
+          <a:xfrm>
+            <a:off x="8092440" y="5897880"/>
+            <a:ext cx="3657600" cy="548640"/>
+          </a:xfrm>
+          <a:prstGeom prst="rect">
+            <a:avLst/>
+          </a:prstGeom>
+          <a:noFill/>
+        </p:spPr>
+        <p:txBody>
+          <a:bodyPr wrap="square">
+            <a:spAutoFit/>
+          </a:bodyPr>
+          <a:lstStyle/>
+          <a:p>
+            <a:pPr algn="ctr">
+              <a:defRPr sz="1050" b="0">
+                <a:solidFill>
+                  <a:srgbClr val="FFFFFF"/>
+                </a:solidFill>
+                <a:latin typeface="Arial"/>
+              </a:defRPr>
+            </a:pPr>
+            <a:r>
+              <a:t>Descartadas: demogr. com |r| &lt; 0.15</a:t>
+            </a:r>
+          </a:p>
+        </p:txBody>
+      </p:sp>
     </p:spTree>
   </p:cSld>
   <p:clrMapOvr>
@@ -9043,7 +8660,7 @@
     <p:bg>
       <p:bgPr>
         <a:solidFill>
-          <a:srgbClr val="F4F8FB"/>
+          <a:srgbClr val="0D1B2A"/>
         </a:solidFill>
         <a:effectLst/>
       </p:bgPr>
@@ -9064,7 +8681,7 @@
         <p:spPr>
           <a:xfrm>
             <a:off x="0" y="0"/>
-            <a:ext cx="12191695" cy="960120"/>
+            <a:ext cx="12191695" cy="6858000"/>
           </a:xfrm>
           <a:prstGeom prst="rect">
             <a:avLst/>
@@ -9102,14 +8719,59 @@
       </p:sp>
       <p:sp>
         <p:nvSpPr>
-          <p:cNvPr id="3" name="TextBox 2"/>
+          <p:cNvPr id="3" name="Rectangle 2"/>
+          <p:cNvSpPr/>
+          <p:nvPr/>
+        </p:nvSpPr>
+        <p:spPr>
+          <a:xfrm>
+            <a:off x="0" y="3063240"/>
+            <a:ext cx="12191695" cy="54864"/>
+          </a:xfrm>
+          <a:prstGeom prst="rect">
+            <a:avLst/>
+          </a:prstGeom>
+          <a:solidFill>
+            <a:srgbClr val="1C7293"/>
+          </a:solidFill>
+          <a:ln>
+            <a:solidFill>
+              <a:srgbClr val="1C7293"/>
+            </a:solidFill>
+          </a:ln>
+        </p:spPr>
+        <p:style>
+          <a:lnRef idx="1">
+            <a:schemeClr val="accent1"/>
+          </a:lnRef>
+          <a:fillRef idx="3">
+            <a:schemeClr val="accent1"/>
+          </a:fillRef>
+          <a:effectRef idx="2">
+            <a:schemeClr val="accent1"/>
+          </a:effectRef>
+          <a:fontRef idx="minor">
+            <a:schemeClr val="lt1"/>
+          </a:fontRef>
+        </p:style>
+        <p:txBody>
+          <a:bodyPr rtlCol="0" anchor="ctr"/>
+          <a:lstStyle/>
+          <a:p>
+            <a:pPr algn="ctr"/>
+          </a:p>
+        </p:txBody>
+      </p:sp>
+      <p:sp>
+        <p:nvSpPr>
+          <p:cNvPr id="4" name="TextBox 3"/>
           <p:cNvSpPr txBox="1"/>
           <p:nvPr/>
         </p:nvSpPr>
         <p:spPr>
           <a:xfrm>
-            <a:off x="457200" y="109728"/>
-            <a:ext cx="10972800" cy="685800"/>
+            <a:off x="457200" y="1371600"/>
+            <a:ext cx="10972800" cy="640080"/>
           </a:xfrm>
           <a:prstGeom prst="rect">
             <a:avLst/>
@@ -9122,8 +8784,44 @@
           </a:bodyPr>
           <a:lstStyle/>
           <a:p>
-            <a:pPr algn="l">
-              <a:defRPr sz="2600" b="1">
+            <a:pPr algn="ctr">
+              <a:defRPr sz="1800" b="0">
+                <a:solidFill>
+                  <a:srgbClr val="90E0EF"/>
+                </a:solidFill>
+                <a:latin typeface="Arial"/>
+              </a:defRPr>
+            </a:pPr>
+            <a:r>
+              <a:t>PARTE 2</a:t>
+            </a:r>
+          </a:p>
+        </p:txBody>
+      </p:sp>
+      <p:sp>
+        <p:nvSpPr>
+          <p:cNvPr id="5" name="TextBox 4"/>
+          <p:cNvSpPr txBox="1"/>
+          <p:nvPr/>
+        </p:nvSpPr>
+        <p:spPr>
+          <a:xfrm>
+            <a:off x="457200" y="2103120"/>
+            <a:ext cx="10972800" cy="1005840"/>
+          </a:xfrm>
+          <a:prstGeom prst="rect">
+            <a:avLst/>
+          </a:prstGeom>
+          <a:noFill/>
+        </p:spPr>
+        <p:txBody>
+          <a:bodyPr wrap="square">
+            <a:spAutoFit/>
+          </a:bodyPr>
+          <a:lstStyle/>
+          <a:p>
+            <a:pPr algn="ctr">
+              <a:defRPr sz="4200" b="1">
                 <a:solidFill>
                   <a:srgbClr val="FFFFFF"/>
                 </a:solidFill>
@@ -9131,59 +8829,47 @@
               </a:defRPr>
             </a:pPr>
             <a:r>
-              <a:t>05  Área Interna, Grade e Outliers</a:t>
-            </a:r>
-          </a:p>
-        </p:txBody>
-      </p:sp>
-      <p:pic>
-        <p:nvPicPr>
-          <p:cNvPr id="4" name="Picture 3" descr="04_scatter_key_features.png"/>
-          <p:cNvPicPr>
-            <a:picLocks noChangeAspect="1"/>
-          </p:cNvPicPr>
-          <p:nvPr/>
-        </p:nvPicPr>
-        <p:blipFill>
-          <a:blip r:embed="rId2"/>
-          <a:stretch>
-            <a:fillRect/>
-          </a:stretch>
-        </p:blipFill>
-        <p:spPr>
-          <a:xfrm>
-            <a:off x="274320" y="1005840"/>
-            <a:ext cx="11612880" cy="2834640"/>
-          </a:xfrm>
-          <a:prstGeom prst="rect">
-            <a:avLst/>
-          </a:prstGeom>
-        </p:spPr>
-      </p:pic>
-      <p:pic>
-        <p:nvPicPr>
-          <p:cNvPr id="5" name="Picture 4" descr="06_boxplot_grade.png"/>
-          <p:cNvPicPr>
-            <a:picLocks noChangeAspect="1"/>
-          </p:cNvPicPr>
-          <p:nvPr/>
-        </p:nvPicPr>
-        <p:blipFill>
-          <a:blip r:embed="rId3"/>
-          <a:stretch>
-            <a:fillRect/>
-          </a:stretch>
-        </p:blipFill>
-        <p:spPr>
-          <a:xfrm>
-            <a:off x="274320" y="3931920"/>
-            <a:ext cx="11612880" cy="2743200"/>
-          </a:xfrm>
-          <a:prstGeom prst="rect">
-            <a:avLst/>
-          </a:prstGeom>
-        </p:spPr>
-      </p:pic>
+              <a:t>Modelagem &amp; Deploy</a:t>
+            </a:r>
+          </a:p>
+        </p:txBody>
+      </p:sp>
+      <p:sp>
+        <p:nvSpPr>
+          <p:cNvPr id="6" name="TextBox 5"/>
+          <p:cNvSpPr txBox="1"/>
+          <p:nvPr/>
+        </p:nvSpPr>
+        <p:spPr>
+          <a:xfrm>
+            <a:off x="457200" y="3291840"/>
+            <a:ext cx="10972800" cy="640080"/>
+          </a:xfrm>
+          <a:prstGeom prst="rect">
+            <a:avLst/>
+          </a:prstGeom>
+          <a:noFill/>
+        </p:spPr>
+        <p:txBody>
+          <a:bodyPr wrap="square">
+            <a:spAutoFit/>
+          </a:bodyPr>
+          <a:lstStyle/>
+          <a:p>
+            <a:pPr algn="ctr">
+              <a:defRPr sz="1600" b="0">
+                <a:solidFill>
+                  <a:srgbClr val="ADE8F4"/>
+                </a:solidFill>
+                <a:latin typeface="Arial"/>
+              </a:defRPr>
+            </a:pPr>
+            <a:r>
+              <a:t>Feature Engineering  XGBoost  Avaliacao  Previsoes  Estrategia de Producao</a:t>
+            </a:r>
+          </a:p>
+        </p:txBody>
+      </p:sp>
     </p:spTree>
   </p:cSld>
   <p:clrMapOvr>
@@ -9286,35 +8972,56 @@
               </a:defRPr>
             </a:pPr>
             <a:r>
-              <a:t>06  Waterfront, Vista e Localização</a:t>
-            </a:r>
-          </a:p>
-        </p:txBody>
-      </p:sp>
-      <p:pic>
-        <p:nvPicPr>
-          <p:cNvPr id="4" name="Picture 3" descr="05_waterfront_view.png"/>
-          <p:cNvPicPr>
-            <a:picLocks noChangeAspect="1"/>
-          </p:cNvPicPr>
-          <p:nvPr/>
-        </p:nvPicPr>
-        <p:blipFill>
-          <a:blip r:embed="rId2"/>
-          <a:stretch>
-            <a:fillRect/>
-          </a:stretch>
-        </p:blipFill>
-        <p:spPr>
-          <a:xfrm>
-            <a:off x="274320" y="1005840"/>
-            <a:ext cx="7498079" cy="3017520"/>
-          </a:xfrm>
-          <a:prstGeom prst="rect">
-            <a:avLst/>
-          </a:prstGeom>
-        </p:spPr>
-      </p:pic>
+              <a:t>08  Feature Engineering</a:t>
+            </a:r>
+          </a:p>
+        </p:txBody>
+      </p:sp>
+      <p:sp>
+        <p:nvSpPr>
+          <p:cNvPr id="4" name="Rectangle 3"/>
+          <p:cNvSpPr/>
+          <p:nvPr/>
+        </p:nvSpPr>
+        <p:spPr>
+          <a:xfrm>
+            <a:off x="365760" y="1051560"/>
+            <a:ext cx="5394960" cy="5212080"/>
+          </a:xfrm>
+          <a:prstGeom prst="rect">
+            <a:avLst/>
+          </a:prstGeom>
+          <a:solidFill>
+            <a:srgbClr val="E8F4F8"/>
+          </a:solidFill>
+          <a:ln>
+            <a:solidFill>
+              <a:srgbClr val="1C7293"/>
+            </a:solidFill>
+          </a:ln>
+        </p:spPr>
+        <p:style>
+          <a:lnRef idx="1">
+            <a:schemeClr val="accent1"/>
+          </a:lnRef>
+          <a:fillRef idx="3">
+            <a:schemeClr val="accent1"/>
+          </a:fillRef>
+          <a:effectRef idx="2">
+            <a:schemeClr val="accent1"/>
+          </a:effectRef>
+          <a:fontRef idx="minor">
+            <a:schemeClr val="lt1"/>
+          </a:fontRef>
+        </p:style>
+        <p:txBody>
+          <a:bodyPr rtlCol="0" anchor="ctr"/>
+          <a:lstStyle/>
+          <a:p>
+            <a:pPr algn="ctr"/>
+          </a:p>
+        </p:txBody>
+      </p:sp>
       <p:sp>
         <p:nvSpPr>
           <p:cNvPr id="5" name="Rectangle 4"/>
@@ -9323,14 +9030,14 @@
         </p:nvSpPr>
         <p:spPr>
           <a:xfrm>
-            <a:off x="7955279" y="1005840"/>
-            <a:ext cx="3931920" cy="3017520"/>
+            <a:off x="6035040" y="1051560"/>
+            <a:ext cx="5760720" cy="5212080"/>
           </a:xfrm>
           <a:prstGeom prst="rect">
             <a:avLst/>
           </a:prstGeom>
           <a:solidFill>
-            <a:srgbClr val="FFF3E0"/>
+            <a:srgbClr val="FFF8E1"/>
           </a:solidFill>
           <a:ln>
             <a:solidFill>
@@ -9368,8 +9075,116 @@
         </p:nvSpPr>
         <p:spPr>
           <a:xfrm>
-            <a:off x="8138160" y="1143000"/>
-            <a:ext cx="3566160" cy="411480"/>
+            <a:off x="548640" y="1188720"/>
+            <a:ext cx="5029200" cy="457200"/>
+          </a:xfrm>
+          <a:prstGeom prst="rect">
+            <a:avLst/>
+          </a:prstGeom>
+          <a:noFill/>
+        </p:spPr>
+        <p:txBody>
+          <a:bodyPr wrap="square">
+            <a:spAutoFit/>
+          </a:bodyPr>
+          <a:lstStyle/>
+          <a:p>
+            <a:pPr algn="l">
+              <a:defRPr sz="1300" b="1">
+                <a:solidFill>
+                  <a:srgbClr val="1C7293"/>
+                </a:solidFill>
+                <a:latin typeface="Arial"/>
+              </a:defRPr>
+            </a:pPr>
+            <a:r>
+              <a:t>Features Criadas (10 novas)</a:t>
+            </a:r>
+          </a:p>
+        </p:txBody>
+      </p:sp>
+      <p:sp>
+        <p:nvSpPr>
+          <p:cNvPr id="7" name="TextBox 6"/>
+          <p:cNvSpPr txBox="1"/>
+          <p:nvPr/>
+        </p:nvSpPr>
+        <p:spPr>
+          <a:xfrm>
+            <a:off x="548640" y="1783080"/>
+            <a:ext cx="5029200" cy="4206240"/>
+          </a:xfrm>
+          <a:prstGeom prst="rect">
+            <a:avLst/>
+          </a:prstGeom>
+          <a:noFill/>
+        </p:spPr>
+        <p:txBody>
+          <a:bodyPr wrap="square">
+            <a:spAutoFit/>
+          </a:bodyPr>
+          <a:lstStyle/>
+          <a:p>
+            <a:pPr algn="l">
+              <a:defRPr sz="1300" b="0">
+                <a:solidFill>
+                  <a:srgbClr val="0D1B2A"/>
+                </a:solidFill>
+                <a:latin typeface="Arial"/>
+              </a:defRPr>
+            </a:pPr>
+            <a:r>
+              <a:t>age = 2015 - yr_built</a:t>
+            </a:r>
+            <a:br/>
+            <a:r>
+              <a:t>was_renovated (flag binaria)</a:t>
+            </a:r>
+            <a:br/>
+            <a:r>
+              <a:t>years_since_reno</a:t>
+            </a:r>
+            <a:br/>
+            <a:r>
+              <a:t>sqft_ratio = area / lote</a:t>
+            </a:r>
+            <a:br/>
+            <a:r>
+              <a:t>basement_ratio</a:t>
+            </a:r>
+            <a:br/>
+            <a:r>
+              <a:t>grade_sqft = grade x area</a:t>
+            </a:r>
+            <a:br/>
+            <a:r>
+              <a:t>grade_age = grade x idade</a:t>
+            </a:r>
+            <a:br/>
+            <a:r>
+              <a:t>bath_bed_ratio</a:t>
+            </a:r>
+            <a:br/>
+            <a:r>
+              <a:t>high_season (mar-jul)</a:t>
+            </a:r>
+            <a:br/>
+            <a:r>
+              <a:t>income_grade = renda x grade</a:t>
+            </a:r>
+          </a:p>
+        </p:txBody>
+      </p:sp>
+      <p:sp>
+        <p:nvSpPr>
+          <p:cNvPr id="8" name="TextBox 7"/>
+          <p:cNvSpPr txBox="1"/>
+          <p:nvPr/>
+        </p:nvSpPr>
+        <p:spPr>
+          <a:xfrm>
+            <a:off x="6217920" y="1188720"/>
+            <a:ext cx="5394960" cy="457200"/>
           </a:xfrm>
           <a:prstGeom prst="rect">
             <a:avLst/>
@@ -9391,21 +9206,21 @@
               </a:defRPr>
             </a:pPr>
             <a:r>
-              <a:t>Impacto no preço:</a:t>
-            </a:r>
-          </a:p>
-        </p:txBody>
-      </p:sp>
-      <p:sp>
-        <p:nvSpPr>
-          <p:cNvPr id="7" name="TextBox 6"/>
+              <a:t>Por que feature engineering?</a:t>
+            </a:r>
+          </a:p>
+        </p:txBody>
+      </p:sp>
+      <p:sp>
+        <p:nvSpPr>
+          <p:cNvPr id="9" name="TextBox 8"/>
           <p:cNvSpPr txBox="1"/>
           <p:nvPr/>
         </p:nvSpPr>
         <p:spPr>
           <a:xfrm>
-            <a:off x="8138160" y="1645920"/>
-            <a:ext cx="3566160" cy="2194560"/>
+            <a:off x="6217920" y="1783080"/>
+            <a:ext cx="5394960" cy="4206240"/>
           </a:xfrm>
           <a:prstGeom prst="rect">
             <a:avLst/>
@@ -9419,7 +9234,7 @@
           <a:lstStyle/>
           <a:p>
             <a:pPr algn="l">
-              <a:defRPr sz="1200" b="0">
+              <a:defRPr sz="1300" b="0">
                 <a:solidFill>
                   <a:srgbClr val="0D1B2A"/>
                 </a:solidFill>
@@ -9427,65 +9242,16 @@
               </a:defRPr>
             </a:pPr>
             <a:r>
-              <a:t>Waterfront:</a:t>
-            </a:r>
-            <a:br/>
-            <a:r>
-              <a:t>  + 200% na mediana</a:t>
-            </a:r>
-            <a:br/>
-            <a:br/>
-            <a:r>
-              <a:t>Vista score 4:</a:t>
-            </a:r>
-            <a:br/>
-            <a:r>
-              <a:t>  + 120% vs score 0</a:t>
-            </a:r>
-            <a:br/>
-            <a:br/>
-            <a:r>
-              <a:t>Conclusion:</a:t>
-            </a:r>
-            <a:br/>
-            <a:r>
-              <a:t>Localização é um</a:t>
-            </a:r>
-            <a:br/>
-            <a:r>
-              <a:t>dos maiores vetores</a:t>
-            </a:r>
-            <a:br/>
-            <a:r>
-              <a:t>de valorização.</a:t>
-            </a:r>
-          </a:p>
-        </p:txBody>
-      </p:sp>
-      <p:pic>
-        <p:nvPicPr>
-          <p:cNvPr id="8" name="Picture 7" descr="07_price_by_zipcode.png"/>
-          <p:cNvPicPr>
-            <a:picLocks noChangeAspect="1"/>
-          </p:cNvPicPr>
-          <p:nvPr/>
-        </p:nvPicPr>
-        <p:blipFill>
-          <a:blip r:embed="rId3"/>
-          <a:stretch>
-            <a:fillRect/>
-          </a:stretch>
-        </p:blipFill>
-        <p:spPr>
-          <a:xfrm>
-            <a:off x="274320" y="4160520"/>
-            <a:ext cx="11612880" cy="2514600"/>
-          </a:xfrm>
-          <a:prstGeom prst="rect">
-            <a:avLst/>
-          </a:prstGeom>
-        </p:spPr>
-      </p:pic>
+              <a:t>Modelos capturam padroes lineares facilmente. Interacoes e ratios permitem capturar relacoes nao-lineares que o modelo sozinho teria dificuldade.</a:t>
+            </a:r>
+            <a:br/>
+            <a:br/>
+            <a:r>
+              <a:t>Exemplo: grade_sqft une qualidade e tamanho. Duas casas com mesmo grade podem ter precos muito diferentes se a area for diferente.</a:t>
+            </a:r>
+          </a:p>
+        </p:txBody>
+      </p:sp>
     </p:spTree>
   </p:cSld>
   <p:clrMapOvr>
@@ -9588,14 +9354,14 @@
               </a:defRPr>
             </a:pPr>
             <a:r>
-              <a:t>07  Dados Demográficos &amp; Sazonalidade</a:t>
+              <a:t>09  Comparacao de Modelos</a:t>
             </a:r>
           </a:p>
         </p:txBody>
       </p:sp>
       <p:pic>
         <p:nvPicPr>
-          <p:cNvPr id="4" name="Picture 3" descr="08_income_vs_price.png"/>
+          <p:cNvPr id="4" name="Picture 3" descr="11_model_comparison.png"/>
           <p:cNvPicPr>
             <a:picLocks noChangeAspect="1"/>
           </p:cNvPicPr>
@@ -9610,16 +9376,151 @@
         <p:spPr>
           <a:xfrm>
             <a:off x="274320" y="1005840"/>
-            <a:ext cx="5760720" cy="3017520"/>
+            <a:ext cx="6858000" cy="3474720"/>
           </a:xfrm>
           <a:prstGeom prst="rect">
             <a:avLst/>
           </a:prstGeom>
         </p:spPr>
       </p:pic>
+      <p:sp>
+        <p:nvSpPr>
+          <p:cNvPr id="5" name="Rectangle 4"/>
+          <p:cNvSpPr/>
+          <p:nvPr/>
+        </p:nvSpPr>
+        <p:spPr>
+          <a:xfrm>
+            <a:off x="7406640" y="1005840"/>
+            <a:ext cx="4480560" cy="3474720"/>
+          </a:xfrm>
+          <a:prstGeom prst="rect">
+            <a:avLst/>
+          </a:prstGeom>
+          <a:solidFill>
+            <a:srgbClr val="E8F4F8"/>
+          </a:solidFill>
+          <a:ln>
+            <a:solidFill>
+              <a:srgbClr val="1C7293"/>
+            </a:solidFill>
+          </a:ln>
+        </p:spPr>
+        <p:style>
+          <a:lnRef idx="1">
+            <a:schemeClr val="accent1"/>
+          </a:lnRef>
+          <a:fillRef idx="3">
+            <a:schemeClr val="accent1"/>
+          </a:fillRef>
+          <a:effectRef idx="2">
+            <a:schemeClr val="accent1"/>
+          </a:effectRef>
+          <a:fontRef idx="minor">
+            <a:schemeClr val="lt1"/>
+          </a:fontRef>
+        </p:style>
+        <p:txBody>
+          <a:bodyPr rtlCol="0" anchor="ctr"/>
+          <a:lstStyle/>
+          <a:p>
+            <a:pPr algn="ctr"/>
+          </a:p>
+        </p:txBody>
+      </p:sp>
+      <p:sp>
+        <p:nvSpPr>
+          <p:cNvPr id="6" name="TextBox 5"/>
+          <p:cNvSpPr txBox="1"/>
+          <p:nvPr/>
+        </p:nvSpPr>
+        <p:spPr>
+          <a:xfrm>
+            <a:off x="7589520" y="1143000"/>
+            <a:ext cx="4114800" cy="411480"/>
+          </a:xfrm>
+          <a:prstGeom prst="rect">
+            <a:avLst/>
+          </a:prstGeom>
+          <a:noFill/>
+        </p:spPr>
+        <p:txBody>
+          <a:bodyPr wrap="square">
+            <a:spAutoFit/>
+          </a:bodyPr>
+          <a:lstStyle/>
+          <a:p>
+            <a:pPr algn="l">
+              <a:defRPr sz="1200" b="1">
+                <a:solidFill>
+                  <a:srgbClr val="1C7293"/>
+                </a:solidFill>
+                <a:latin typeface="Arial"/>
+              </a:defRPr>
+            </a:pPr>
+            <a:r>
+              <a:t>Metodologia 5-Fold CV</a:t>
+            </a:r>
+          </a:p>
+        </p:txBody>
+      </p:sp>
+      <p:sp>
+        <p:nvSpPr>
+          <p:cNvPr id="7" name="TextBox 6"/>
+          <p:cNvSpPr txBox="1"/>
+          <p:nvPr/>
+        </p:nvSpPr>
+        <p:spPr>
+          <a:xfrm>
+            <a:off x="7589520" y="1645920"/>
+            <a:ext cx="4114800" cy="2651760"/>
+          </a:xfrm>
+          <a:prstGeom prst="rect">
+            <a:avLst/>
+          </a:prstGeom>
+          <a:noFill/>
+        </p:spPr>
+        <p:txBody>
+          <a:bodyPr wrap="square">
+            <a:spAutoFit/>
+          </a:bodyPr>
+          <a:lstStyle/>
+          <a:p>
+            <a:pPr algn="l">
+              <a:defRPr sz="1200" b="0">
+                <a:solidFill>
+                  <a:srgbClr val="0D1B2A"/>
+                </a:solidFill>
+                <a:latin typeface="Arial"/>
+              </a:defRPr>
+            </a:pPr>
+            <a:r>
+              <a:t>4 modelos com 5-Fold CV. Dataset dividido 80/20.</a:t>
+            </a:r>
+            <a:br/>
+            <a:br/>
+            <a:r>
+              <a:t>Metrica: RMSE no log-price.</a:t>
+            </a:r>
+            <a:br/>
+            <a:br/>
+            <a:r>
+              <a:t>XGBoost venceu por:</a:t>
+            </a:r>
+            <a:br/>
+            <a:r>
+              <a:t>- Menor RMSE medio</a:t>
+            </a:r>
+            <a:br/>
+            <a:r>
+              <a:t>- Menor desvio padrao entre folds</a:t>
+            </a:r>
+          </a:p>
+        </p:txBody>
+      </p:sp>
       <p:pic>
         <p:nvPicPr>
-          <p:cNvPr id="5" name="Picture 4" descr="10_education_vs_price.png"/>
+          <p:cNvPr id="8" name="Picture 7" descr="14_cv_folds.png"/>
           <p:cNvPicPr>
             <a:picLocks noChangeAspect="1"/>
           </p:cNvPicPr>
@@ -9633,32 +9534,8 @@
         </p:blipFill>
         <p:spPr>
           <a:xfrm>
-            <a:off x="6217920" y="1005840"/>
-            <a:ext cx="5669280" cy="3017520"/>
-          </a:xfrm>
-          <a:prstGeom prst="rect">
-            <a:avLst/>
-          </a:prstGeom>
-        </p:spPr>
-      </p:pic>
-      <p:pic>
-        <p:nvPicPr>
-          <p:cNvPr id="6" name="Picture 5" descr="09_price_over_time.png"/>
-          <p:cNvPicPr>
-            <a:picLocks noChangeAspect="1"/>
-          </p:cNvPicPr>
-          <p:nvPr/>
-        </p:nvPicPr>
-        <p:blipFill>
-          <a:blip r:embed="rId4"/>
-          <a:stretch>
-            <a:fillRect/>
-          </a:stretch>
-        </p:blipFill>
-        <p:spPr>
-          <a:xfrm>
-            <a:off x="274320" y="4160520"/>
-            <a:ext cx="11612880" cy="2514600"/>
+            <a:off x="274320" y="4663440"/>
+            <a:ext cx="11612880" cy="2011680"/>
           </a:xfrm>
           <a:prstGeom prst="rect">
             <a:avLst/>
